--- a/MBRP_Research_Synopsis_PPT.pptx
+++ b/MBRP_Research_Synopsis_PPT.pptx
@@ -43,8 +43,6 @@
     <p:sldId id="291" r:id="rId42"/>
     <p:sldId id="292" r:id="rId43"/>
     <p:sldId id="293" r:id="rId44"/>
-    <p:sldId id="294" r:id="rId45"/>
-    <p:sldId id="295" r:id="rId46"/>
   </p:sldIdLst>
   <p:sldSz cx="12191695" cy="6858000" type="screen4x3"/>
   <p:notesSz cx="6858000" cy="9144000"/>
@@ -3158,7 +3156,7 @@
           <a:lstStyle/>
           <a:p>
             <a:pPr algn="ctr">
-              <a:defRPr sz="2800" b="1">
+              <a:defRPr sz="2600" b="1">
                 <a:solidFill>
                   <a:srgbClr val="FFFFFF"/>
                 </a:solidFill>
@@ -3317,14 +3315,14 @@
           <a:lstStyle/>
           <a:p>
             <a:pPr algn="l">
-              <a:defRPr sz="2200" b="1">
+              <a:defRPr sz="2000" b="1">
                 <a:solidFill>
                   <a:srgbClr val="FFFFFF"/>
                 </a:solidFill>
               </a:defRPr>
             </a:pPr>
             <a:r>
-              <a:t>SLIDE 10: Review of Literature (3/7) - Impulsivity Studies</a:t>
+              <a:t>Review of Literature (3/5) - Impulsivity &amp; Mindfulness</a:t>
             </a:r>
           </a:p>
         </p:txBody>
@@ -3337,8 +3335,8 @@
         </p:nvSpPr>
         <p:spPr>
           <a:xfrm>
-            <a:off x="640080" y="1188720"/>
-            <a:ext cx="10881360" cy="5394960"/>
+            <a:off x="548640" y="1143000"/>
+            <a:ext cx="11064240" cy="5486400"/>
           </a:xfrm>
           <a:prstGeom prst="rect">
             <a:avLst/>
@@ -3353,76 +3351,52 @@
           <a:p>
             <a:pPr>
               <a:spcBef>
-                <a:spcPts val="800"/>
-              </a:spcBef>
-              <a:defRPr sz="1400">
-                <a:solidFill>
-                  <a:srgbClr val="2D2D44"/>
-                </a:solidFill>
-              </a:defRPr>
-            </a:pPr>
-            <a:r>
-              <a:t>Garland, Roberts-Lewis, et al. (2016): Mindfulness-based intervention reduced BIS-11 impulsivity scores significantly in substance-dependent adults</a:t>
-            </a:r>
-          </a:p>
-          <a:p>
-            <a:pPr>
-              <a:spcBef>
-                <a:spcPts val="800"/>
-              </a:spcBef>
-              <a:defRPr sz="1400">
-                <a:solidFill>
-                  <a:srgbClr val="2D2D44"/>
-                </a:solidFill>
-              </a:defRPr>
-            </a:pPr>
-            <a:r>
-              <a:t>Murphy &amp; MacKillop (2012): Trait mindfulness inversely associated with impulsive decision-making (delay discounting) in alcohol users</a:t>
-            </a:r>
-          </a:p>
-          <a:p>
-            <a:pPr>
-              <a:spcBef>
-                <a:spcPts val="800"/>
-              </a:spcBef>
-              <a:defRPr sz="1400">
-                <a:solidFill>
-                  <a:srgbClr val="2D2D44"/>
-                </a:solidFill>
-              </a:defRPr>
-            </a:pPr>
-            <a:r>
-              <a:t>Korponay, Dentico, et al. (2019): Long-term meditators exhibited lower impulsivity and greater prefrontal cortical thickness vs. controls</a:t>
-            </a:r>
-          </a:p>
-          <a:p>
-            <a:pPr>
-              <a:spcBef>
-                <a:spcPts val="800"/>
-              </a:spcBef>
-              <a:defRPr sz="1400">
-                <a:solidFill>
-                  <a:srgbClr val="2D2D44"/>
-                </a:solidFill>
-              </a:defRPr>
-            </a:pPr>
-            <a:r>
-              <a:t>Alfonso, Caracuel, et al. (2011): Combined mindfulness-inhibitory control training reduced impulsive responding in polysubstance users</a:t>
-            </a:r>
-          </a:p>
-          <a:p>
-            <a:pPr>
-              <a:spcBef>
-                <a:spcPts val="800"/>
-              </a:spcBef>
-              <a:defRPr sz="1400">
-                <a:solidFill>
-                  <a:srgbClr val="2D2D44"/>
-                </a:solidFill>
-              </a:defRPr>
-            </a:pPr>
-            <a:r>
-              <a:t>Peters, Erisman, et al. (2011): Brief mindfulness induction reduced impulsive responses on behavioral tasks among high-impulsivity individuals</a:t>
+                <a:spcPts val="1200"/>
+              </a:spcBef>
+              <a:spcAft>
+                <a:spcPts val="600"/>
+              </a:spcAft>
+              <a:defRPr sz="1200">
+                <a:solidFill>
+                  <a:srgbClr val="2D2D44"/>
+                </a:solidFill>
+              </a:defRPr>
+            </a:pPr>
+            <a:r>
+              <a:t>Garland, Roberts-Lewis, Tronnier, Graves, and Kelley (2016) examine the efficacy of Mindfulness-Oriented Recovery Enhancement versus CBT for co-occurring substance dependence, traumatic stress, and psychiatric disorders in the Journal of Consulting and Clinical Psychology. The study employed a randomized controlled design with substance-dependent adults exhibiting elevated impulsivity. Results demonstrated that the mindfulness-based intervention produced significant reductions in impulsivity scores as measured by the Barratt Impulsiveness Scale (BIS-11), particularly in the motor and attentional impulsivity subscales. The authors theorize that mindfulness meditation strengthens prefrontal cortical inhibitory mechanisms by repeatedly engaging participants in exercises requiring sustained attention, response monitoring, and deliberate non-reactivity. This enhanced top-down cognitive control translates into improved ability to inhibit prepotent impulsive responses in daily life, particularly in high-risk situations where automatic substance-seeking behavior would otherwise occur. The clinical implication is that MBRP can address impulsivity as a transdiagnostic risk factor for relapse, not merely as a stable trait but as a modifiable behavioral pattern amenable to mindfulness-based intervention.</a:t>
+            </a:r>
+          </a:p>
+          <a:p>
+            <a:pPr>
+              <a:spcBef>
+                <a:spcPts val="1200"/>
+              </a:spcBef>
+              <a:spcAft>
+                <a:spcPts val="600"/>
+              </a:spcAft>
+              <a:defRPr sz="1200">
+                <a:solidFill>
+                  <a:srgbClr val="2D2D44"/>
+                </a:solidFill>
+              </a:defRPr>
+            </a:pPr>
+          </a:p>
+          <a:p>
+            <a:pPr>
+              <a:spcBef>
+                <a:spcPts val="1200"/>
+              </a:spcBef>
+              <a:spcAft>
+                <a:spcPts val="600"/>
+              </a:spcAft>
+              <a:defRPr sz="1200">
+                <a:solidFill>
+                  <a:srgbClr val="2D2D44"/>
+                </a:solidFill>
+              </a:defRPr>
+            </a:pPr>
+            <a:r>
+              <a:t>Murphy and MacKillop (2012) explore the interrelationships between impulsivity, mindfulness, and alcohol misuse in Psychopharmacology. The study investigates whether dispositional mindfulness buffers against the effects of trait impulsivity on problematic substance use. Using a cross-sectional design with 340 participants, the researchers found that trait mindfulness was inversely associated with impulsive decision-making as measured by delay discounting tasks. Critically, mindfulness moderated the relationship between impulsivity and substance use problems, such that individuals with higher mindfulness showed weaker associations between impulsivity and alcohol-related consequences. The authors propose that mindfulness functions as a cognitive resource that enables impulsive individuals to override automatic behavioral tendencies through enhanced metacognitive awareness and response flexibility. These findings support the inclusion of impulsivity as a dependent variable in MBRP research and suggest that mindfulness enhancement may serve as a mechanism through which impulsive responding is attenuated in substance-dependent populations.</a:t>
             </a:r>
           </a:p>
         </p:txBody>
@@ -3519,14 +3493,14 @@
           <a:lstStyle/>
           <a:p>
             <a:pPr algn="l">
-              <a:defRPr sz="2200" b="1">
+              <a:defRPr sz="2000" b="1">
                 <a:solidFill>
                   <a:srgbClr val="FFFFFF"/>
                 </a:solidFill>
               </a:defRPr>
             </a:pPr>
             <a:r>
-              <a:t>SLIDE 11: Review of Literature (4/7) - Mindfulness &amp; Substance Use</a:t>
+              <a:t>Review of Literature (4/5) - Meta-Analyses &amp; Brief Models</a:t>
             </a:r>
           </a:p>
         </p:txBody>
@@ -3539,8 +3513,8 @@
         </p:nvSpPr>
         <p:spPr>
           <a:xfrm>
-            <a:off x="640080" y="1188720"/>
-            <a:ext cx="10881360" cy="5394960"/>
+            <a:off x="548640" y="1143000"/>
+            <a:ext cx="11064240" cy="5486400"/>
           </a:xfrm>
           <a:prstGeom prst="rect">
             <a:avLst/>
@@ -3555,76 +3529,52 @@
           <a:p>
             <a:pPr>
               <a:spcBef>
-                <a:spcPts val="800"/>
-              </a:spcBef>
-              <a:defRPr sz="1400">
-                <a:solidFill>
-                  <a:srgbClr val="2D2D44"/>
-                </a:solidFill>
-              </a:defRPr>
-            </a:pPr>
-            <a:r>
-              <a:t>Karyadi, VanderVeen, &amp; Cyders (2014) meta-analysis: significant negative association between mindfulness and substance use (r = -0.21), craving, and problems</a:t>
-            </a:r>
-          </a:p>
-          <a:p>
-            <a:pPr>
-              <a:spcBef>
-                <a:spcPts val="800"/>
-              </a:spcBef>
-              <a:defRPr sz="1400">
-                <a:solidFill>
-                  <a:srgbClr val="2D2D44"/>
-                </a:solidFill>
-              </a:defRPr>
-            </a:pPr>
-            <a:r>
-              <a:t>Li, Howard, Garland, et al. (2017) meta-analysis of 42 RCTs: MBIs reduced substance misuse (d=0.33), craving (d=0.68), and stress (d=0.44)</a:t>
-            </a:r>
-          </a:p>
-          <a:p>
-            <a:pPr>
-              <a:spcBef>
-                <a:spcPts val="800"/>
-              </a:spcBef>
-              <a:defRPr sz="1400">
-                <a:solidFill>
-                  <a:srgbClr val="2D2D44"/>
-                </a:solidFill>
-              </a:defRPr>
-            </a:pPr>
-            <a:r>
-              <a:t>Chiesa &amp; Serretti (2014) reviewed 24 studies: MBIs show moderate efficacy for reducing substance use and craving across substances</a:t>
-            </a:r>
-          </a:p>
-          <a:p>
-            <a:pPr>
-              <a:spcBef>
-                <a:spcPts val="800"/>
-              </a:spcBef>
-              <a:defRPr sz="1400">
-                <a:solidFill>
-                  <a:srgbClr val="2D2D44"/>
-                </a:solidFill>
-              </a:defRPr>
-            </a:pPr>
-            <a:r>
-              <a:t>Bowen, Witkiewitz, Dillworth, &amp; Marlatt (2007): MBRP increased acceptance and acting with awareness (FFMQ facets) in post-treatment users</a:t>
-            </a:r>
-          </a:p>
-          <a:p>
-            <a:pPr>
-              <a:spcBef>
-                <a:spcPts val="800"/>
-              </a:spcBef>
-              <a:defRPr sz="1400">
-                <a:solidFill>
-                  <a:srgbClr val="2D2D44"/>
-                </a:solidFill>
-              </a:defRPr>
-            </a:pPr>
-            <a:r>
-              <a:t>Grant, Colaiaco, et al. (2017) Cochrane-level review: moderate-quality evidence supporting MBIs for substance use disorders</a:t>
+                <a:spcPts val="1200"/>
+              </a:spcBef>
+              <a:spcAft>
+                <a:spcPts val="600"/>
+              </a:spcAft>
+              <a:defRPr sz="1200">
+                <a:solidFill>
+                  <a:srgbClr val="2D2D44"/>
+                </a:solidFill>
+              </a:defRPr>
+            </a:pPr>
+            <a:r>
+              <a:t>Li, Howard, Garland, McGovern, and Lazar (2017) conduct a systematic review and meta-analysis of mindfulness treatment for substance misuse in the Journal of Substance Abuse Treatment, encompassing 42 randomized controlled trials. The meta-analytic findings reveal that mindfulness-based interventions produce significant effect sizes for reducing substance misuse (d = 0.33), craving (d = 0.68), and stress (d = 0.44) across diverse substance use populations and treatment contexts. The authors highlight that effect sizes for craving reduction are particularly robust, supporting the theoretical premise that mindfulness directly targets craving mechanisms through enhanced interoceptive awareness and non-reactive observation of urge states. Furthermore, the review identifies that interventions of shorter duration (4-8 sessions) demonstrated comparable efficacy to longer protocols when appropriately structured, providing empirical justification for brief MBRP adaptations. The review concludes that mindfulness-based interventions represent a viable evidence-based treatment approach with medium-to-large effects on the primary mechanisms of relapse, supporting their integration into standard substance use disorder treatment protocols.</a:t>
+            </a:r>
+          </a:p>
+          <a:p>
+            <a:pPr>
+              <a:spcBef>
+                <a:spcPts val="1200"/>
+              </a:spcBef>
+              <a:spcAft>
+                <a:spcPts val="600"/>
+              </a:spcAft>
+              <a:defRPr sz="1200">
+                <a:solidFill>
+                  <a:srgbClr val="2D2D44"/>
+                </a:solidFill>
+              </a:defRPr>
+            </a:pPr>
+          </a:p>
+          <a:p>
+            <a:pPr>
+              <a:spcBef>
+                <a:spcPts val="1200"/>
+              </a:spcBef>
+              <a:spcAft>
+                <a:spcPts val="600"/>
+              </a:spcAft>
+              <a:defRPr sz="1200">
+                <a:solidFill>
+                  <a:srgbClr val="2D2D44"/>
+                </a:solidFill>
+              </a:defRPr>
+            </a:pPr>
+            <a:r>
+              <a:t>Glasner-Edwards, Mooney, Ang, Garneau, Hartwell, Brecht, and Rawson (2017) examine a pilot randomized clinical trial of mindfulness-based relapse prevention for stimulant-dependent adults using an abbreviated 6-session protocol in the journal Mindfulness. The study demonstrates that a condensed mindfulness intervention is both feasible and effective in outpatient substance use treatment settings. Participants in the brief MBRP condition showed significant reductions in substance use frequency and craving intensity compared to the health education control group. The authors emphasize that the abbreviated format maintained the core therapeutic elements of standard MBRP (body scan, sitting meditation, urge surfing, mindful movement) while condensing psychoeducational components. This study is directly relevant to the present research as it validates the brief intervention model proposed here, demonstrating that 6-8 session MBRP protocols can be successfully implemented without substantial loss of therapeutic efficacy, making them particularly appropriate for Indian rehabilitation settings with 4-8 week typical admission durations.</a:t>
             </a:r>
           </a:p>
         </p:txBody>
@@ -3721,14 +3671,14 @@
           <a:lstStyle/>
           <a:p>
             <a:pPr algn="l">
-              <a:defRPr sz="2200" b="1">
+              <a:defRPr sz="2000" b="1">
                 <a:solidFill>
                   <a:srgbClr val="FFFFFF"/>
                 </a:solidFill>
               </a:defRPr>
             </a:pPr>
             <a:r>
-              <a:t>SLIDE 12: Review of Literature (5/7) - Brief Interventions</a:t>
+              <a:t>Review of Literature (5/5) - Indian Context &amp; Research Gap</a:t>
             </a:r>
           </a:p>
         </p:txBody>
@@ -3741,8 +3691,8 @@
         </p:nvSpPr>
         <p:spPr>
           <a:xfrm>
-            <a:off x="640080" y="1188720"/>
-            <a:ext cx="10881360" cy="5394960"/>
+            <a:off x="548640" y="1143000"/>
+            <a:ext cx="11064240" cy="5486400"/>
           </a:xfrm>
           <a:prstGeom prst="rect">
             <a:avLst/>
@@ -3757,76 +3707,52 @@
           <a:p>
             <a:pPr>
               <a:spcBef>
-                <a:spcPts val="800"/>
-              </a:spcBef>
-              <a:defRPr sz="1400">
-                <a:solidFill>
-                  <a:srgbClr val="2D2D44"/>
-                </a:solidFill>
-              </a:defRPr>
-            </a:pPr>
-            <a:r>
-              <a:t>Glasner-Edwards, Mooney, et al. (2017): Abbreviated 6-session mindfulness intervention feasible and effective in reducing stimulant use</a:t>
-            </a:r>
-          </a:p>
-          <a:p>
-            <a:pPr>
-              <a:spcBef>
-                <a:spcPts val="800"/>
-              </a:spcBef>
-              <a:defRPr sz="1400">
-                <a:solidFill>
-                  <a:srgbClr val="2D2D44"/>
-                </a:solidFill>
-              </a:defRPr>
-            </a:pPr>
-            <a:r>
-              <a:t>Davis, Goldberg, et al. (2014): Brief 4-week mindfulness training reduced cigarette consumption and craving among smokers</a:t>
-            </a:r>
-          </a:p>
-          <a:p>
-            <a:pPr>
-              <a:spcBef>
-                <a:spcPts val="800"/>
-              </a:spcBef>
-              <a:defRPr sz="1400">
-                <a:solidFill>
-                  <a:srgbClr val="2D2D44"/>
-                </a:solidFill>
-              </a:defRPr>
-            </a:pPr>
-            <a:r>
-              <a:t>Shorey, Elmquist, et al. (2017): Brief (single-session + booster) mindfulness intervention reduced substance craving in residential treatment</a:t>
-            </a:r>
-          </a:p>
-          <a:p>
-            <a:pPr>
-              <a:spcBef>
-                <a:spcPts val="800"/>
-              </a:spcBef>
-              <a:defRPr sz="1400">
-                <a:solidFill>
-                  <a:srgbClr val="2D2D44"/>
-                </a:solidFill>
-              </a:defRPr>
-            </a:pPr>
-            <a:r>
-              <a:t>Roos, Bowen, &amp; Witkiewitz (2017): Even brief daily 15-min meditation mediated MBRP effects on craving and substance use</a:t>
-            </a:r>
-          </a:p>
-          <a:p>
-            <a:pPr>
-              <a:spcBef>
-                <a:spcPts val="800"/>
-              </a:spcBef>
-              <a:defRPr sz="1400">
-                <a:solidFill>
-                  <a:srgbClr val="2D2D44"/>
-                </a:solidFill>
-              </a:defRPr>
-            </a:pPr>
-            <a:r>
-              <a:t>Rationale: Indian rehabilitation settings typically have 4-8 week admission, necessitating condensed evidence-based protocols</a:t>
+                <a:spcPts val="1200"/>
+              </a:spcBef>
+              <a:spcAft>
+                <a:spcPts val="600"/>
+              </a:spcAft>
+              <a:defRPr sz="1200">
+                <a:solidFill>
+                  <a:srgbClr val="2D2D44"/>
+                </a:solidFill>
+              </a:defRPr>
+            </a:pPr>
+            <a:r>
+              <a:t>Ghosh, Basu, and Avasthi (2018) conduct a comprehensive review of relapse in opioid dependence from an Indian perspective in the Indian Journal of Psychiatry. The study reports alarmingly high relapse rates exceeding 70% among opioid-dependent patients treated in North Indian de-addiction centers, with the majority of relapses occurring within the first three months post-discharge. The authors identify craving, peer influence, negative emotional states, and lack of structured psychological aftercare as primary relapse determinants in the Indian context. Significantly, the review highlights that Indian treatment facilities predominantly rely on pharmacological approaches (opioid substitution therapy, naltrexone maintenance) with minimal integration of evidence-based psychological interventions. The authors advocate strongly for the development and validation of structured psychosocial intervention protocols tailored to Indian treatment infrastructure, patient characteristics, and resource constraints. This study directly establishes the clinical need for the present research by documenting both the high relapse burden and the psychosocial treatment gap in Indian de-addiction settings.</a:t>
+            </a:r>
+          </a:p>
+          <a:p>
+            <a:pPr>
+              <a:spcBef>
+                <a:spcPts val="1200"/>
+              </a:spcBef>
+              <a:spcAft>
+                <a:spcPts val="600"/>
+              </a:spcAft>
+              <a:defRPr sz="1200">
+                <a:solidFill>
+                  <a:srgbClr val="2D2D44"/>
+                </a:solidFill>
+              </a:defRPr>
+            </a:pPr>
+          </a:p>
+          <a:p>
+            <a:pPr>
+              <a:spcBef>
+                <a:spcPts val="1200"/>
+              </a:spcBef>
+              <a:spcAft>
+                <a:spcPts val="600"/>
+              </a:spcAft>
+              <a:defRPr sz="1200">
+                <a:solidFill>
+                  <a:srgbClr val="2D2D44"/>
+                </a:solidFill>
+              </a:defRPr>
+            </a:pPr>
+            <a:r>
+              <a:t>Sarkar and Balhara (2016) examine the underutilization of structured psychological interventions in Indian de-addiction settings. The authors note that despite international evidence supporting the integration of psychosocial treatments alongside pharmacotherapy, Indian rehabilitation centers continue to operate with minimal structured psychological programming. The study identifies barriers including limited trained personnel, absence of culturally validated intervention protocols, short admission durations, and institutional emphasis on pharmacological management. Jain, Majumder, and Gupta (2013) provide preliminary evidence from a mindfulness-based intervention study with alcohol-dependent patients in India, demonstrating initial reductions in craving, but no systematic MBRP trial has been conducted with Indian opioid-dependent populations. CRITICAL GAP: No published Indian RCT has tested Brief MBRP specifically in opioid-dependent populations, simultaneously assessing craving, impulsivity, and mindfulness as treatment outcomes. The present study addresses this gap as the first brief MBRP trial designed for Indian de-addiction center infrastructure.</a:t>
             </a:r>
           </a:p>
         </p:txBody>
@@ -3930,7 +3856,7 @@
               </a:defRPr>
             </a:pPr>
             <a:r>
-              <a:t>SLIDE 13: Review of Literature (6/7) - Indian Studies</a:t>
+              <a:t>Research Gap</a:t>
             </a:r>
           </a:p>
         </p:txBody>
@@ -3959,76 +3885,106 @@
           <a:p>
             <a:pPr>
               <a:spcBef>
-                <a:spcPts val="800"/>
-              </a:spcBef>
-              <a:defRPr sz="1400">
-                <a:solidFill>
-                  <a:srgbClr val="2D2D44"/>
-                </a:solidFill>
-              </a:defRPr>
-            </a:pPr>
-            <a:r>
-              <a:t>Sarkar &amp; Balhara (2016): Highlighted underutilization of structured psychological interventions in Indian de-addiction settings</a:t>
-            </a:r>
-          </a:p>
-          <a:p>
-            <a:pPr>
-              <a:spcBef>
-                <a:spcPts val="800"/>
-              </a:spcBef>
-              <a:defRPr sz="1400">
-                <a:solidFill>
-                  <a:srgbClr val="2D2D44"/>
-                </a:solidFill>
-              </a:defRPr>
-            </a:pPr>
-            <a:r>
-              <a:t>Murthy (2016): Indian de-addiction centers predominantly use pharmacotherapy with limited psychosocial integration</a:t>
-            </a:r>
-          </a:p>
-          <a:p>
-            <a:pPr>
-              <a:spcBef>
-                <a:spcPts val="800"/>
-              </a:spcBef>
-              <a:defRPr sz="1400">
-                <a:solidFill>
-                  <a:srgbClr val="2D2D44"/>
-                </a:solidFill>
-              </a:defRPr>
-            </a:pPr>
-            <a:r>
-              <a:t>Ghosh, Basu, &amp; Avasthi (2018): Relapse rates &gt;70% among opioid-dependent patients in North Indian treatment centers</a:t>
-            </a:r>
-          </a:p>
-          <a:p>
-            <a:pPr>
-              <a:spcBef>
-                <a:spcPts val="800"/>
-              </a:spcBef>
-              <a:defRPr sz="1400">
-                <a:solidFill>
-                  <a:srgbClr val="2D2D44"/>
-                </a:solidFill>
-              </a:defRPr>
-            </a:pPr>
-            <a:r>
-              <a:t>Jain, Majumder, &amp; Gupta (2013): Preliminary mindfulness-based intervention study in alcohol-dependent patients (India) showed craving reductions</a:t>
-            </a:r>
-          </a:p>
-          <a:p>
-            <a:pPr>
-              <a:spcBef>
-                <a:spcPts val="800"/>
-              </a:spcBef>
-              <a:defRPr sz="1400">
-                <a:solidFill>
-                  <a:srgbClr val="2D2D44"/>
-                </a:solidFill>
-              </a:defRPr>
-            </a:pPr>
-            <a:r>
-              <a:t>CRITICAL NOTE: No published Indian RCT on Brief MBRP for opioid dependence identified - establishes critical research gap</a:t>
+                <a:spcPts val="600"/>
+              </a:spcBef>
+              <a:defRPr sz="1300">
+                <a:solidFill>
+                  <a:srgbClr val="2D2D44"/>
+                </a:solidFill>
+              </a:defRPr>
+            </a:pPr>
+            <a:r>
+              <a:t>No published RCT has tested MBRP (standard or brief) specifically in Indian opioid-dependent populations</a:t>
+            </a:r>
+          </a:p>
+          <a:p>
+            <a:pPr>
+              <a:spcBef>
+                <a:spcPts val="600"/>
+              </a:spcBef>
+              <a:defRPr sz="1300">
+                <a:solidFill>
+                  <a:srgbClr val="2D2D44"/>
+                </a:solidFill>
+              </a:defRPr>
+            </a:pPr>
+            <a:r>
+              <a:t>Most studies examine craving OR mindfulness in isolation; few simultaneously assess craving + impulsivity + mindfulness as treatment outcomes</a:t>
+            </a:r>
+          </a:p>
+          <a:p>
+            <a:pPr>
+              <a:spcBef>
+                <a:spcPts val="600"/>
+              </a:spcBef>
+              <a:defRPr sz="1300">
+                <a:solidFill>
+                  <a:srgbClr val="2D2D44"/>
+                </a:solidFill>
+              </a:defRPr>
+            </a:pPr>
+            <a:r>
+              <a:t>Indian rehab settings require condensed 6-8 session interventions but no brief MBRP model has been empirically validated in this context</a:t>
+            </a:r>
+          </a:p>
+          <a:p>
+            <a:pPr>
+              <a:spcBef>
+                <a:spcPts val="600"/>
+              </a:spcBef>
+              <a:defRPr sz="1300">
+                <a:solidFill>
+                  <a:srgbClr val="2D2D44"/>
+                </a:solidFill>
+              </a:defRPr>
+            </a:pPr>
+            <a:r>
+              <a:t>Indian treatment landscape lacks integration of structured evidence-based psychological interventions alongside pharmacotherapy</a:t>
+            </a:r>
+          </a:p>
+          <a:p>
+            <a:pPr>
+              <a:spcBef>
+                <a:spcPts val="600"/>
+              </a:spcBef>
+              <a:defRPr sz="1300">
+                <a:solidFill>
+                  <a:srgbClr val="2D2D44"/>
+                </a:solidFill>
+              </a:defRPr>
+            </a:pPr>
+            <a:r>
+              <a:t>Global MBRP studies focus on alcohol/polysubstance users; opioid-specific MBRP evidence is limited</a:t>
+            </a:r>
+          </a:p>
+          <a:p>
+            <a:pPr>
+              <a:spcBef>
+                <a:spcPts val="600"/>
+              </a:spcBef>
+              <a:defRPr sz="1300">
+                <a:solidFill>
+                  <a:srgbClr val="2D2D44"/>
+                </a:solidFill>
+              </a:defRPr>
+            </a:pPr>
+            <a:r>
+              <a:t>Mindfulness practices require culturally congruent adaptation for Indian populations</a:t>
+            </a:r>
+          </a:p>
+          <a:p>
+            <a:pPr>
+              <a:spcBef>
+                <a:spcPts val="600"/>
+              </a:spcBef>
+              <a:defRPr sz="1300">
+                <a:solidFill>
+                  <a:srgbClr val="2D2D44"/>
+                </a:solidFill>
+              </a:defRPr>
+            </a:pPr>
+            <a:r>
+              <a:t>PRESENT STUDY: First brief MBRP trial in Indian opioid-dependent sample assessing craving, impulsivity, and mindfulness simultaneously</a:t>
             </a:r>
           </a:p>
         </p:txBody>
@@ -4132,7 +4088,7 @@
               </a:defRPr>
             </a:pPr>
             <a:r>
-              <a:t>SLIDE 14: Review of Literature (7/7) - Summary Table</a:t>
+              <a:t>Aim of the Study</a:t>
             </a:r>
           </a:p>
         </p:txBody>
@@ -4161,91 +4117,43 @@
           <a:p>
             <a:pPr>
               <a:spcBef>
-                <a:spcPts val="800"/>
-              </a:spcBef>
-              <a:defRPr sz="1400">
-                <a:solidFill>
-                  <a:srgbClr val="2D2D44"/>
-                </a:solidFill>
-              </a:defRPr>
-            </a:pPr>
-            <a:r>
-              <a:t>MBRP &amp; Relapse: Fewer substance use days at 12-month follow-up | Evidence: RCT (Bowen et al., 2014)</a:t>
-            </a:r>
-          </a:p>
-          <a:p>
-            <a:pPr>
-              <a:spcBef>
-                <a:spcPts val="800"/>
-              </a:spcBef>
-              <a:defRPr sz="1400">
-                <a:solidFill>
-                  <a:srgbClr val="2D2D44"/>
-                </a:solidFill>
-              </a:defRPr>
-            </a:pPr>
-            <a:r>
-              <a:t>Craving: MBRP reduces craving intensity via urge surfing | Evidence: Multiple RCTs</a:t>
-            </a:r>
-          </a:p>
-          <a:p>
-            <a:pPr>
-              <a:spcBef>
-                <a:spcPts val="800"/>
-              </a:spcBef>
-              <a:defRPr sz="1400">
-                <a:solidFill>
-                  <a:srgbClr val="2D2D44"/>
-                </a:solidFill>
-              </a:defRPr>
-            </a:pPr>
-            <a:r>
-              <a:t>Impulsivity: Mindfulness inversely associated with impulsive responding | Evidence: Correlational + RCT</a:t>
-            </a:r>
-          </a:p>
-          <a:p>
-            <a:pPr>
-              <a:spcBef>
-                <a:spcPts val="800"/>
-              </a:spcBef>
-              <a:defRPr sz="1400">
-                <a:solidFill>
-                  <a:srgbClr val="2D2D44"/>
-                </a:solidFill>
-              </a:defRPr>
-            </a:pPr>
-            <a:r>
-              <a:t>Mindfulness: Significant improvement in FFMQ scores post-MBRP | Evidence: Pre-post + RCT</a:t>
-            </a:r>
-          </a:p>
-          <a:p>
-            <a:pPr>
-              <a:spcBef>
-                <a:spcPts val="800"/>
-              </a:spcBef>
-              <a:defRPr sz="1400">
-                <a:solidFill>
-                  <a:srgbClr val="2D2D44"/>
-                </a:solidFill>
-              </a:defRPr>
-            </a:pPr>
-            <a:r>
-              <a:t>Brief Models: 4-8 session protocols feasible and effective | Evidence: Emerging</a:t>
-            </a:r>
-          </a:p>
-          <a:p>
-            <a:pPr>
-              <a:spcBef>
-                <a:spcPts val="800"/>
-              </a:spcBef>
-              <a:defRPr sz="1400">
-                <a:solidFill>
-                  <a:srgbClr val="2D2D44"/>
-                </a:solidFill>
-              </a:defRPr>
-            </a:pPr>
-            <a:r>
-              <a:t>Indian Context: Extremely limited MBRP research; high relapse burden | Evidence: Gap identified</a:t>
+                <a:spcPts val="600"/>
+              </a:spcBef>
+              <a:defRPr sz="1300">
+                <a:solidFill>
+                  <a:srgbClr val="2D2D44"/>
+                </a:solidFill>
+              </a:defRPr>
+            </a:pPr>
+            <a:r>
+              <a:t>To evaluate the efficacy of a Brief Mindfulness-Based Relapse Prevention (MBRP) intervention in reducing craving and impulsivity, and enhancing mindfulness, among substance-dependent patients in an Indian de-addiction setting</a:t>
+            </a:r>
+          </a:p>
+          <a:p>
+            <a:pPr>
+              <a:spcBef>
+                <a:spcPts val="600"/>
+              </a:spcBef>
+              <a:defRPr sz="1300">
+                <a:solidFill>
+                  <a:srgbClr val="2D2D44"/>
+                </a:solidFill>
+              </a:defRPr>
+            </a:pPr>
+          </a:p>
+          <a:p>
+            <a:pPr>
+              <a:spcBef>
+                <a:spcPts val="600"/>
+              </a:spcBef>
+              <a:defRPr sz="1300">
+                <a:solidFill>
+                  <a:srgbClr val="2D2D44"/>
+                </a:solidFill>
+              </a:defRPr>
+            </a:pPr>
+            <a:r>
+              <a:t>Specifically: To compare outcomes between Brief MBRP + TAU (Experimental) and Psychoeducation + TAU (Control) on three dependent variables measured pre- and post-intervention</a:t>
             </a:r>
           </a:p>
         </p:txBody>
@@ -4349,7 +4257,7 @@
               </a:defRPr>
             </a:pPr>
             <a:r>
-              <a:t>SLIDE 15: Research Gap</a:t>
+              <a:t>Objectives</a:t>
             </a:r>
           </a:p>
         </p:txBody>
@@ -4378,106 +4286,91 @@
           <a:p>
             <a:pPr>
               <a:spcBef>
-                <a:spcPts val="800"/>
-              </a:spcBef>
-              <a:defRPr sz="1400">
-                <a:solidFill>
-                  <a:srgbClr val="2D2D44"/>
-                </a:solidFill>
-              </a:defRPr>
-            </a:pPr>
-            <a:r>
-              <a:t>Lack of Indian MBRP studies: No published RCT has tested MBRP (standard or brief) in Indian opioid-dependent populations</a:t>
-            </a:r>
-          </a:p>
-          <a:p>
-            <a:pPr>
-              <a:spcBef>
-                <a:spcPts val="800"/>
-              </a:spcBef>
-              <a:defRPr sz="1400">
-                <a:solidFill>
-                  <a:srgbClr val="2D2D44"/>
-                </a:solidFill>
-              </a:defRPr>
-            </a:pPr>
-            <a:r>
-              <a:t>Limited combined variable assessment: Most studies examine craving OR mindfulness in isolation; few assess craving + impulsivity + mindfulness simultaneously</a:t>
-            </a:r>
-          </a:p>
-          <a:p>
-            <a:pPr>
-              <a:spcBef>
-                <a:spcPts val="800"/>
-              </a:spcBef>
-              <a:defRPr sz="1400">
-                <a:solidFill>
-                  <a:srgbClr val="2D2D44"/>
-                </a:solidFill>
-              </a:defRPr>
-            </a:pPr>
-            <a:r>
-              <a:t>Absence of brief protocol validation: Indian rehab settings need 6-8 session models but none empirically validated in this context</a:t>
-            </a:r>
-          </a:p>
-          <a:p>
-            <a:pPr>
-              <a:spcBef>
-                <a:spcPts val="800"/>
-              </a:spcBef>
-              <a:defRPr sz="1400">
-                <a:solidFill>
-                  <a:srgbClr val="2D2D44"/>
-                </a:solidFill>
-              </a:defRPr>
-            </a:pPr>
-            <a:r>
-              <a:t>Overreliance on pharmacotherapy: Indian treatment lacks integration of structured evidence-based psychological interventions alongside OST</a:t>
-            </a:r>
-          </a:p>
-          <a:p>
-            <a:pPr>
-              <a:spcBef>
-                <a:spcPts val="800"/>
-              </a:spcBef>
-              <a:defRPr sz="1400">
-                <a:solidFill>
-                  <a:srgbClr val="2D2D44"/>
-                </a:solidFill>
-              </a:defRPr>
-            </a:pPr>
-            <a:r>
-              <a:t>Population specificity: Global MBRP studies focus on alcohol/polysubstance; opioid-specific MBRP evidence is limited</a:t>
-            </a:r>
-          </a:p>
-          <a:p>
-            <a:pPr>
-              <a:spcBef>
-                <a:spcPts val="800"/>
-              </a:spcBef>
-              <a:defRPr sz="1400">
-                <a:solidFill>
-                  <a:srgbClr val="2D2D44"/>
-                </a:solidFill>
-              </a:defRPr>
-            </a:pPr>
-            <a:r>
-              <a:t>Cultural adaptation need: Mindfulness requires culturally congruent adaptation for Indian populations</a:t>
-            </a:r>
-          </a:p>
-          <a:p>
-            <a:pPr>
-              <a:spcBef>
-                <a:spcPts val="800"/>
-              </a:spcBef>
-              <a:defRPr sz="1400">
-                <a:solidFill>
-                  <a:srgbClr val="2D2D44"/>
-                </a:solidFill>
-              </a:defRPr>
-            </a:pPr>
-            <a:r>
-              <a:t>PRESENT STUDY: First brief MBRP trial in Indian opioid-dependent sample assessing craving, impulsivity, and mindfulness simultaneously</a:t>
+                <a:spcPts val="600"/>
+              </a:spcBef>
+              <a:defRPr sz="1300">
+                <a:solidFill>
+                  <a:srgbClr val="2D2D44"/>
+                </a:solidFill>
+              </a:defRPr>
+            </a:pPr>
+            <a:r>
+              <a:t>1. To assess and compare craving levels (pre vs. post) in Experimental (Brief MBRP + TAU) and Control (Psychoeducation + TAU) groups</a:t>
+            </a:r>
+          </a:p>
+          <a:p>
+            <a:pPr>
+              <a:spcBef>
+                <a:spcPts val="600"/>
+              </a:spcBef>
+              <a:defRPr sz="1300">
+                <a:solidFill>
+                  <a:srgbClr val="2D2D44"/>
+                </a:solidFill>
+              </a:defRPr>
+            </a:pPr>
+            <a:r>
+              <a:t>2. To assess and compare impulsivity levels (pre vs. post) in both groups</a:t>
+            </a:r>
+          </a:p>
+          <a:p>
+            <a:pPr>
+              <a:spcBef>
+                <a:spcPts val="600"/>
+              </a:spcBef>
+              <a:defRPr sz="1300">
+                <a:solidFill>
+                  <a:srgbClr val="2D2D44"/>
+                </a:solidFill>
+              </a:defRPr>
+            </a:pPr>
+            <a:r>
+              <a:t>3. To assess and compare mindfulness levels (pre vs. post) in both groups</a:t>
+            </a:r>
+          </a:p>
+          <a:p>
+            <a:pPr>
+              <a:spcBef>
+                <a:spcPts val="600"/>
+              </a:spcBef>
+              <a:defRPr sz="1300">
+                <a:solidFill>
+                  <a:srgbClr val="2D2D44"/>
+                </a:solidFill>
+              </a:defRPr>
+            </a:pPr>
+            <a:r>
+              <a:t>4. To determine whether Brief MBRP + TAU is significantly more effective than Psychoeducation + TAU in reducing craving</a:t>
+            </a:r>
+          </a:p>
+          <a:p>
+            <a:pPr>
+              <a:spcBef>
+                <a:spcPts val="600"/>
+              </a:spcBef>
+              <a:defRPr sz="1300">
+                <a:solidFill>
+                  <a:srgbClr val="2D2D44"/>
+                </a:solidFill>
+              </a:defRPr>
+            </a:pPr>
+            <a:r>
+              <a:t>5. To determine whether Brief MBRP + TAU is significantly more effective than Psychoeducation + TAU in reducing impulsivity</a:t>
+            </a:r>
+          </a:p>
+          <a:p>
+            <a:pPr>
+              <a:spcBef>
+                <a:spcPts val="600"/>
+              </a:spcBef>
+              <a:defRPr sz="1300">
+                <a:solidFill>
+                  <a:srgbClr val="2D2D44"/>
+                </a:solidFill>
+              </a:defRPr>
+            </a:pPr>
+            <a:r>
+              <a:t>6. To determine whether Brief MBRP + TAU is significantly more effective than Psychoeducation + TAU in enhancing mindfulness</a:t>
             </a:r>
           </a:p>
         </p:txBody>
@@ -4581,7 +4474,7 @@
               </a:defRPr>
             </a:pPr>
             <a:r>
-              <a:t>SLIDE 16: Aim of the Study</a:t>
+              <a:t>Hypotheses (Directional)</a:t>
             </a:r>
           </a:p>
         </p:txBody>
@@ -4610,43 +4503,70 @@
           <a:p>
             <a:pPr>
               <a:spcBef>
-                <a:spcPts val="800"/>
-              </a:spcBef>
-              <a:defRPr sz="1400">
-                <a:solidFill>
-                  <a:srgbClr val="2D2D44"/>
-                </a:solidFill>
-              </a:defRPr>
-            </a:pPr>
-            <a:r>
-              <a:t>To evaluate the efficacy of a Brief Mindfulness-Based Relapse Prevention (MBRP) intervention in reducing craving and impulsivity, and enhancing mindfulness, among substance-dependent patients in an Indian de-addiction setting</a:t>
-            </a:r>
-          </a:p>
-          <a:p>
-            <a:pPr>
-              <a:spcBef>
-                <a:spcPts val="800"/>
-              </a:spcBef>
-              <a:defRPr sz="1400">
-                <a:solidFill>
-                  <a:srgbClr val="2D2D44"/>
-                </a:solidFill>
-              </a:defRPr>
-            </a:pPr>
-          </a:p>
-          <a:p>
-            <a:pPr>
-              <a:spcBef>
-                <a:spcPts val="800"/>
-              </a:spcBef>
-              <a:defRPr sz="1400">
-                <a:solidFill>
-                  <a:srgbClr val="2D2D44"/>
-                </a:solidFill>
-              </a:defRPr>
-            </a:pPr>
-            <a:r>
-              <a:t>Specifically: To compare outcomes between Brief MBRP + TAU (Experimental) and Psychoeducation + TAU (Control) on three dependent variables measured pre- and post-intervention</a:t>
+                <a:spcPts val="600"/>
+              </a:spcBef>
+              <a:defRPr sz="1300">
+                <a:solidFill>
+                  <a:srgbClr val="2D2D44"/>
+                </a:solidFill>
+              </a:defRPr>
+            </a:pPr>
+            <a:r>
+              <a:t>H1: Participants receiving Brief MBRP + TAU will show significantly GREATER REDUCTION in craving scores (HCQ) compared to Psychoeducation + TAU, from pre-test to post-test</a:t>
+            </a:r>
+          </a:p>
+          <a:p>
+            <a:pPr>
+              <a:spcBef>
+                <a:spcPts val="600"/>
+              </a:spcBef>
+              <a:defRPr sz="1300">
+                <a:solidFill>
+                  <a:srgbClr val="2D2D44"/>
+                </a:solidFill>
+              </a:defRPr>
+            </a:pPr>
+          </a:p>
+          <a:p>
+            <a:pPr>
+              <a:spcBef>
+                <a:spcPts val="600"/>
+              </a:spcBef>
+              <a:defRPr sz="1300">
+                <a:solidFill>
+                  <a:srgbClr val="2D2D44"/>
+                </a:solidFill>
+              </a:defRPr>
+            </a:pPr>
+            <a:r>
+              <a:t>H2: Participants receiving Brief MBRP + TAU will show significantly GREATER REDUCTION in impulsivity scores (BIS-11) compared to Psychoeducation + TAU, from pre-test to post-test</a:t>
+            </a:r>
+          </a:p>
+          <a:p>
+            <a:pPr>
+              <a:spcBef>
+                <a:spcPts val="600"/>
+              </a:spcBef>
+              <a:defRPr sz="1300">
+                <a:solidFill>
+                  <a:srgbClr val="2D2D44"/>
+                </a:solidFill>
+              </a:defRPr>
+            </a:pPr>
+          </a:p>
+          <a:p>
+            <a:pPr>
+              <a:spcBef>
+                <a:spcPts val="600"/>
+              </a:spcBef>
+              <a:defRPr sz="1300">
+                <a:solidFill>
+                  <a:srgbClr val="2D2D44"/>
+                </a:solidFill>
+              </a:defRPr>
+            </a:pPr>
+            <a:r>
+              <a:t>H3: Participants receiving Brief MBRP + TAU will show significantly GREATER INCREASE in mindfulness scores (FFMQ) compared to Psychoeducation + TAU, from pre-test to post-test</a:t>
             </a:r>
           </a:p>
         </p:txBody>
@@ -4750,7 +4670,7 @@
               </a:defRPr>
             </a:pPr>
             <a:r>
-              <a:t>SLIDE 17: Objectives</a:t>
+              <a:t>Research Design</a:t>
             </a:r>
           </a:p>
         </p:txBody>
@@ -4763,8 +4683,8 @@
         </p:nvSpPr>
         <p:spPr>
           <a:xfrm>
-            <a:off x="640080" y="1188720"/>
-            <a:ext cx="10881360" cy="5394960"/>
+            <a:off x="640080" y="1097280"/>
+            <a:ext cx="10881360" cy="457200"/>
           </a:xfrm>
           <a:prstGeom prst="rect">
             <a:avLst/>
@@ -4772,6 +4692,41 @@
           <a:noFill/>
         </p:spPr>
         <p:txBody>
+          <a:bodyPr wrap="none">
+            <a:spAutoFit/>
+          </a:bodyPr>
+          <a:lstStyle/>
+          <a:p>
+            <a:pPr>
+              <a:defRPr sz="1400" b="1">
+                <a:solidFill>
+                  <a:srgbClr val="2C5F8A"/>
+                </a:solidFill>
+              </a:defRPr>
+            </a:pPr>
+            <a:r>
+              <a:t>Pre-test Post-test Control Group Design</a:t>
+            </a:r>
+          </a:p>
+        </p:txBody>
+      </p:sp>
+      <p:sp>
+        <p:nvSpPr>
+          <p:cNvPr id="5" name="TextBox 4"/>
+          <p:cNvSpPr txBox="1"/>
+          <p:nvPr/>
+        </p:nvSpPr>
+        <p:spPr>
+          <a:xfrm>
+            <a:off x="640080" y="1554480"/>
+            <a:ext cx="10881360" cy="5029200"/>
+          </a:xfrm>
+          <a:prstGeom prst="rect">
+            <a:avLst/>
+          </a:prstGeom>
+          <a:noFill/>
+        </p:spPr>
+        <p:txBody>
           <a:bodyPr wrap="square">
             <a:spAutoFit/>
           </a:bodyPr>
@@ -4779,91 +4734,142 @@
           <a:p>
             <a:pPr>
               <a:spcBef>
-                <a:spcPts val="800"/>
-              </a:spcBef>
-              <a:defRPr sz="1400">
-                <a:solidFill>
-                  <a:srgbClr val="2D2D44"/>
-                </a:solidFill>
-              </a:defRPr>
-            </a:pPr>
-            <a:r>
-              <a:t>1. To assess and compare craving levels (pre vs. post) in Experimental (Brief MBRP + TAU) and Control (Psychoeducation + TAU) groups</a:t>
-            </a:r>
-          </a:p>
-          <a:p>
-            <a:pPr>
-              <a:spcBef>
-                <a:spcPts val="800"/>
-              </a:spcBef>
-              <a:defRPr sz="1400">
-                <a:solidFill>
-                  <a:srgbClr val="2D2D44"/>
-                </a:solidFill>
-              </a:defRPr>
-            </a:pPr>
-            <a:r>
-              <a:t>2. To assess and compare impulsivity levels (pre vs. post) in both groups</a:t>
-            </a:r>
-          </a:p>
-          <a:p>
-            <a:pPr>
-              <a:spcBef>
-                <a:spcPts val="800"/>
-              </a:spcBef>
-              <a:defRPr sz="1400">
-                <a:solidFill>
-                  <a:srgbClr val="2D2D44"/>
-                </a:solidFill>
-              </a:defRPr>
-            </a:pPr>
-            <a:r>
-              <a:t>3. To assess and compare mindfulness levels (pre vs. post) in both groups</a:t>
-            </a:r>
-          </a:p>
-          <a:p>
-            <a:pPr>
-              <a:spcBef>
-                <a:spcPts val="800"/>
-              </a:spcBef>
-              <a:defRPr sz="1400">
-                <a:solidFill>
-                  <a:srgbClr val="2D2D44"/>
-                </a:solidFill>
-              </a:defRPr>
-            </a:pPr>
-            <a:r>
-              <a:t>4. To determine whether Brief MBRP + TAU is significantly more effective than Psychoeducation + TAU in reducing craving</a:t>
-            </a:r>
-          </a:p>
-          <a:p>
-            <a:pPr>
-              <a:spcBef>
-                <a:spcPts val="800"/>
-              </a:spcBef>
-              <a:defRPr sz="1400">
-                <a:solidFill>
-                  <a:srgbClr val="2D2D44"/>
-                </a:solidFill>
-              </a:defRPr>
-            </a:pPr>
-            <a:r>
-              <a:t>5. To determine whether Brief MBRP + TAU is significantly more effective than Psychoeducation + TAU in reducing impulsivity</a:t>
-            </a:r>
-          </a:p>
-          <a:p>
-            <a:pPr>
-              <a:spcBef>
-                <a:spcPts val="800"/>
-              </a:spcBef>
-              <a:defRPr sz="1400">
-                <a:solidFill>
-                  <a:srgbClr val="2D2D44"/>
-                </a:solidFill>
-              </a:defRPr>
-            </a:pPr>
-            <a:r>
-              <a:t>6. To determine whether Brief MBRP + TAU is significantly more effective than Psychoeducation + TAU in enhancing mindfulness</a:t>
+                <a:spcPts val="600"/>
+              </a:spcBef>
+              <a:defRPr sz="1300">
+                <a:solidFill>
+                  <a:srgbClr val="2D2D44"/>
+                </a:solidFill>
+              </a:defRPr>
+            </a:pPr>
+            <a:r>
+              <a:t>Design: Pre-test Post-test Control Group Experimental Design</a:t>
+            </a:r>
+          </a:p>
+          <a:p>
+            <a:pPr>
+              <a:spcBef>
+                <a:spcPts val="600"/>
+              </a:spcBef>
+              <a:defRPr sz="1300">
+                <a:solidFill>
+                  <a:srgbClr val="2D2D44"/>
+                </a:solidFill>
+              </a:defRPr>
+            </a:pPr>
+          </a:p>
+          <a:p>
+            <a:pPr>
+              <a:spcBef>
+                <a:spcPts val="600"/>
+              </a:spcBef>
+              <a:defRPr sz="1300">
+                <a:solidFill>
+                  <a:srgbClr val="2D2D44"/>
+                </a:solidFill>
+              </a:defRPr>
+            </a:pPr>
+            <a:r>
+              <a:t>R   O1   X1   O2   --&gt;  Experimental Group (Brief MBRP + TAU)</a:t>
+            </a:r>
+          </a:p>
+          <a:p>
+            <a:pPr>
+              <a:spcBef>
+                <a:spcPts val="600"/>
+              </a:spcBef>
+              <a:defRPr sz="1300">
+                <a:solidFill>
+                  <a:srgbClr val="2D2D44"/>
+                </a:solidFill>
+              </a:defRPr>
+            </a:pPr>
+            <a:r>
+              <a:t>R   O1   X2   O2   --&gt;  Control Group (Psychoeducation + TAU)</a:t>
+            </a:r>
+          </a:p>
+          <a:p>
+            <a:pPr>
+              <a:spcBef>
+                <a:spcPts val="600"/>
+              </a:spcBef>
+              <a:defRPr sz="1300">
+                <a:solidFill>
+                  <a:srgbClr val="2D2D44"/>
+                </a:solidFill>
+              </a:defRPr>
+            </a:pPr>
+          </a:p>
+          <a:p>
+            <a:pPr>
+              <a:spcBef>
+                <a:spcPts val="600"/>
+              </a:spcBef>
+              <a:defRPr sz="1300">
+                <a:solidFill>
+                  <a:srgbClr val="2D2D44"/>
+                </a:solidFill>
+              </a:defRPr>
+            </a:pPr>
+            <a:r>
+              <a:t>R = Random assignment | O1 = Pre-test (FFMQ, BIS-11, HCQ, ASSIST)</a:t>
+            </a:r>
+          </a:p>
+          <a:p>
+            <a:pPr>
+              <a:spcBef>
+                <a:spcPts val="600"/>
+              </a:spcBef>
+              <a:defRPr sz="1300">
+                <a:solidFill>
+                  <a:srgbClr val="2D2D44"/>
+                </a:solidFill>
+              </a:defRPr>
+            </a:pPr>
+            <a:r>
+              <a:t>X1 = Brief MBRP (8 sessions) | X2 = Psychoeducation (8 sessions)</a:t>
+            </a:r>
+          </a:p>
+          <a:p>
+            <a:pPr>
+              <a:spcBef>
+                <a:spcPts val="600"/>
+              </a:spcBef>
+              <a:defRPr sz="1300">
+                <a:solidFill>
+                  <a:srgbClr val="2D2D44"/>
+                </a:solidFill>
+              </a:defRPr>
+            </a:pPr>
+            <a:r>
+              <a:t>O2 = Post-test (FFMQ, BIS-11, HCQ)</a:t>
+            </a:r>
+          </a:p>
+          <a:p>
+            <a:pPr>
+              <a:spcBef>
+                <a:spcPts val="600"/>
+              </a:spcBef>
+              <a:defRPr sz="1300">
+                <a:solidFill>
+                  <a:srgbClr val="2D2D44"/>
+                </a:solidFill>
+              </a:defRPr>
+            </a:pPr>
+          </a:p>
+          <a:p>
+            <a:pPr>
+              <a:spcBef>
+                <a:spcPts val="600"/>
+              </a:spcBef>
+              <a:defRPr sz="1300">
+                <a:solidFill>
+                  <a:srgbClr val="2D2D44"/>
+                </a:solidFill>
+              </a:defRPr>
+            </a:pPr>
+            <a:r>
+              <a:t>Features: True experimental design with randomization; Active control for attention effects; TAU maintained in both groups</a:t>
             </a:r>
           </a:p>
         </p:txBody>
@@ -4967,7 +4973,7 @@
               </a:defRPr>
             </a:pPr>
             <a:r>
-              <a:t>SLIDE 18: Hypotheses (Directional)</a:t>
+              <a:t>Sample</a:t>
             </a:r>
           </a:p>
         </p:txBody>
@@ -4996,70 +5002,91 @@
           <a:p>
             <a:pPr>
               <a:spcBef>
-                <a:spcPts val="800"/>
-              </a:spcBef>
-              <a:defRPr sz="1400">
-                <a:solidFill>
-                  <a:srgbClr val="2D2D44"/>
-                </a:solidFill>
-              </a:defRPr>
-            </a:pPr>
-            <a:r>
-              <a:t>H1: Participants receiving Brief MBRP + TAU will show significantly GREATER REDUCTION in craving scores (HCQ) compared to Psychoeducation + TAU, from pre-test to post-test</a:t>
-            </a:r>
-          </a:p>
-          <a:p>
-            <a:pPr>
-              <a:spcBef>
-                <a:spcPts val="800"/>
-              </a:spcBef>
-              <a:defRPr sz="1400">
-                <a:solidFill>
-                  <a:srgbClr val="2D2D44"/>
-                </a:solidFill>
-              </a:defRPr>
-            </a:pPr>
-          </a:p>
-          <a:p>
-            <a:pPr>
-              <a:spcBef>
-                <a:spcPts val="800"/>
-              </a:spcBef>
-              <a:defRPr sz="1400">
-                <a:solidFill>
-                  <a:srgbClr val="2D2D44"/>
-                </a:solidFill>
-              </a:defRPr>
-            </a:pPr>
-            <a:r>
-              <a:t>H2: Participants receiving Brief MBRP + TAU will show significantly GREATER REDUCTION in impulsivity scores (BIS-11) compared to Psychoeducation + TAU, from pre-test to post-test</a:t>
-            </a:r>
-          </a:p>
-          <a:p>
-            <a:pPr>
-              <a:spcBef>
-                <a:spcPts val="800"/>
-              </a:spcBef>
-              <a:defRPr sz="1400">
-                <a:solidFill>
-                  <a:srgbClr val="2D2D44"/>
-                </a:solidFill>
-              </a:defRPr>
-            </a:pPr>
-          </a:p>
-          <a:p>
-            <a:pPr>
-              <a:spcBef>
-                <a:spcPts val="800"/>
-              </a:spcBef>
-              <a:defRPr sz="1400">
-                <a:solidFill>
-                  <a:srgbClr val="2D2D44"/>
-                </a:solidFill>
-              </a:defRPr>
-            </a:pPr>
-            <a:r>
-              <a:t>H3: Participants receiving Brief MBRP + TAU will show significantly GREATER INCREASE in mindfulness scores (FFMQ) compared to Psychoeducation + TAU, from pre-test to post-test</a:t>
+                <a:spcPts val="600"/>
+              </a:spcBef>
+              <a:defRPr sz="1300">
+                <a:solidFill>
+                  <a:srgbClr val="2D2D44"/>
+                </a:solidFill>
+              </a:defRPr>
+            </a:pPr>
+            <a:r>
+              <a:t>Population: Substance-dependent patients (primarily opioid users) admitted to de-addiction centers</a:t>
+            </a:r>
+          </a:p>
+          <a:p>
+            <a:pPr>
+              <a:spcBef>
+                <a:spcPts val="600"/>
+              </a:spcBef>
+              <a:defRPr sz="1300">
+                <a:solidFill>
+                  <a:srgbClr val="2D2D44"/>
+                </a:solidFill>
+              </a:defRPr>
+            </a:pPr>
+            <a:r>
+              <a:t>Sampling Method: Purposive sampling followed by random allocation to groups</a:t>
+            </a:r>
+          </a:p>
+          <a:p>
+            <a:pPr>
+              <a:spcBef>
+                <a:spcPts val="600"/>
+              </a:spcBef>
+              <a:defRPr sz="1300">
+                <a:solidFill>
+                  <a:srgbClr val="2D2D44"/>
+                </a:solidFill>
+              </a:defRPr>
+            </a:pPr>
+            <a:r>
+              <a:t>Sample Size: N = 60 (30 per group)</a:t>
+            </a:r>
+          </a:p>
+          <a:p>
+            <a:pPr>
+              <a:spcBef>
+                <a:spcPts val="600"/>
+              </a:spcBef>
+              <a:defRPr sz="1300">
+                <a:solidFill>
+                  <a:srgbClr val="2D2D44"/>
+                </a:solidFill>
+              </a:defRPr>
+            </a:pPr>
+            <a:r>
+              <a:t>Setting: Government/private de-addiction centers in India</a:t>
+            </a:r>
+          </a:p>
+          <a:p>
+            <a:pPr>
+              <a:spcBef>
+                <a:spcPts val="600"/>
+              </a:spcBef>
+              <a:defRPr sz="1300">
+                <a:solidFill>
+                  <a:srgbClr val="2D2D44"/>
+                </a:solidFill>
+              </a:defRPr>
+            </a:pPr>
+            <a:r>
+              <a:t>Recruitment: Consecutive admissions meeting inclusion criteria over 6-8 months</a:t>
+            </a:r>
+          </a:p>
+          <a:p>
+            <a:pPr>
+              <a:spcBef>
+                <a:spcPts val="600"/>
+              </a:spcBef>
+              <a:defRPr sz="1300">
+                <a:solidFill>
+                  <a:srgbClr val="2D2D44"/>
+                </a:solidFill>
+              </a:defRPr>
+            </a:pPr>
+            <a:r>
+              <a:t>Attrition Consideration: Recruit N = 70 (35 per group) to account for ~15% dropout</a:t>
             </a:r>
           </a:p>
         </p:txBody>
@@ -5163,7 +5190,7 @@
               </a:defRPr>
             </a:pPr>
             <a:r>
-              <a:t>SLIDE 19: Research Design</a:t>
+              <a:t>Sample Size Estimation</a:t>
             </a:r>
           </a:p>
         </p:txBody>
@@ -5176,8 +5203,8 @@
         </p:nvSpPr>
         <p:spPr>
           <a:xfrm>
-            <a:off x="640080" y="1097280"/>
-            <a:ext cx="10881360" cy="457200"/>
+            <a:off x="640080" y="1188720"/>
+            <a:ext cx="10881360" cy="5394960"/>
           </a:xfrm>
           <a:prstGeom prst="rect">
             <a:avLst/>
@@ -5185,41 +5212,6 @@
           <a:noFill/>
         </p:spPr>
         <p:txBody>
-          <a:bodyPr wrap="none">
-            <a:spAutoFit/>
-          </a:bodyPr>
-          <a:lstStyle/>
-          <a:p>
-            <a:pPr>
-              <a:defRPr sz="1400" b="1">
-                <a:solidFill>
-                  <a:srgbClr val="2C5F8A"/>
-                </a:solidFill>
-              </a:defRPr>
-            </a:pPr>
-            <a:r>
-              <a:t>Pre-test Post-test Control Group Design</a:t>
-            </a:r>
-          </a:p>
-        </p:txBody>
-      </p:sp>
-      <p:sp>
-        <p:nvSpPr>
-          <p:cNvPr id="5" name="TextBox 4"/>
-          <p:cNvSpPr txBox="1"/>
-          <p:nvPr/>
-        </p:nvSpPr>
-        <p:spPr>
-          <a:xfrm>
-            <a:off x="640080" y="1554480"/>
-            <a:ext cx="10881360" cy="5029200"/>
-          </a:xfrm>
-          <a:prstGeom prst="rect">
-            <a:avLst/>
-          </a:prstGeom>
-          <a:noFill/>
-        </p:spPr>
-        <p:txBody>
           <a:bodyPr wrap="square">
             <a:spAutoFit/>
           </a:bodyPr>
@@ -5227,112 +5219,106 @@
           <a:p>
             <a:pPr>
               <a:spcBef>
-                <a:spcPts val="800"/>
-              </a:spcBef>
-              <a:defRPr sz="1400">
-                <a:solidFill>
-                  <a:srgbClr val="2D2D44"/>
-                </a:solidFill>
-              </a:defRPr>
-            </a:pPr>
-            <a:r>
-              <a:t>Design: Pre-test Post-test Control Group Experimental Design</a:t>
-            </a:r>
-          </a:p>
-          <a:p>
-            <a:pPr>
-              <a:spcBef>
-                <a:spcPts val="800"/>
-              </a:spcBef>
-              <a:defRPr sz="1400">
-                <a:solidFill>
-                  <a:srgbClr val="2D2D44"/>
-                </a:solidFill>
-              </a:defRPr>
-            </a:pPr>
-          </a:p>
-          <a:p>
-            <a:pPr>
-              <a:spcBef>
-                <a:spcPts val="800"/>
-              </a:spcBef>
-              <a:defRPr sz="1400">
-                <a:solidFill>
-                  <a:srgbClr val="2D2D44"/>
-                </a:solidFill>
-              </a:defRPr>
-            </a:pPr>
-            <a:r>
-              <a:t>R   O1   X1   O2   -&gt;  Experimental Group (Brief MBRP + TAU)</a:t>
-            </a:r>
-          </a:p>
-          <a:p>
-            <a:pPr>
-              <a:spcBef>
-                <a:spcPts val="800"/>
-              </a:spcBef>
-              <a:defRPr sz="1400">
-                <a:solidFill>
-                  <a:srgbClr val="2D2D44"/>
-                </a:solidFill>
-              </a:defRPr>
-            </a:pPr>
-            <a:r>
-              <a:t>R   O1   X2   O2   -&gt;  Control Group (Psychoeducation + TAU)</a:t>
-            </a:r>
-          </a:p>
-          <a:p>
-            <a:pPr>
-              <a:spcBef>
-                <a:spcPts val="800"/>
-              </a:spcBef>
-              <a:defRPr sz="1400">
-                <a:solidFill>
-                  <a:srgbClr val="2D2D44"/>
-                </a:solidFill>
-              </a:defRPr>
-            </a:pPr>
-          </a:p>
-          <a:p>
-            <a:pPr>
-              <a:spcBef>
-                <a:spcPts val="800"/>
-              </a:spcBef>
-              <a:defRPr sz="1400">
-                <a:solidFill>
-                  <a:srgbClr val="2D2D44"/>
-                </a:solidFill>
-              </a:defRPr>
-            </a:pPr>
-            <a:r>
-              <a:t>R = Random assignment | O1 = Pre-test (FFMQ, BIS-11, HCQ, ASSIST) | X1 = Brief MBRP | X2 = Psychoeducation | O2 = Post-test (FFMQ, BIS-11, HCQ)</a:t>
-            </a:r>
-          </a:p>
-          <a:p>
-            <a:pPr>
-              <a:spcBef>
-                <a:spcPts val="800"/>
-              </a:spcBef>
-              <a:defRPr sz="1400">
-                <a:solidFill>
-                  <a:srgbClr val="2D2D44"/>
-                </a:solidFill>
-              </a:defRPr>
-            </a:pPr>
-          </a:p>
-          <a:p>
-            <a:pPr>
-              <a:spcBef>
-                <a:spcPts val="800"/>
-              </a:spcBef>
-              <a:defRPr sz="1400">
-                <a:solidFill>
-                  <a:srgbClr val="2D2D44"/>
-                </a:solidFill>
-              </a:defRPr>
-            </a:pPr>
-            <a:r>
-              <a:t>Features: True experimental design with randomization; Active control (Psychoeducation) for attention/contact effects; TAU maintained in both groups</a:t>
+                <a:spcPts val="600"/>
+              </a:spcBef>
+              <a:defRPr sz="1300">
+                <a:solidFill>
+                  <a:srgbClr val="2D2D44"/>
+                </a:solidFill>
+              </a:defRPr>
+            </a:pPr>
+            <a:r>
+              <a:t>Formula: n = [(Za/2 + Zb)^2 x 2 x sigma^2] / d^2</a:t>
+            </a:r>
+          </a:p>
+          <a:p>
+            <a:pPr>
+              <a:spcBef>
+                <a:spcPts val="600"/>
+              </a:spcBef>
+              <a:defRPr sz="1300">
+                <a:solidFill>
+                  <a:srgbClr val="2D2D44"/>
+                </a:solidFill>
+              </a:defRPr>
+            </a:pPr>
+            <a:r>
+              <a:t>Parameters: Effect size (d) = 0.50 (medium; Li et al., 2017: d = 0.33-0.68) | Power = 0.80 -&gt; Zb = 0.84 | Alpha = 0.05 -&gt; Za/2 = 1.96</a:t>
+            </a:r>
+          </a:p>
+          <a:p>
+            <a:pPr>
+              <a:spcBef>
+                <a:spcPts val="600"/>
+              </a:spcBef>
+              <a:defRPr sz="1300">
+                <a:solidFill>
+                  <a:srgbClr val="2D2D44"/>
+                </a:solidFill>
+              </a:defRPr>
+            </a:pPr>
+            <a:r>
+              <a:t>Calculation: n = [(1.96 + 0.84)^2 x 2 x 1] / (0.50)^2 = [7.84 x 2] / 0.25 = 62.72 ~ 63 total (~32/group)</a:t>
+            </a:r>
+          </a:p>
+          <a:p>
+            <a:pPr>
+              <a:spcBef>
+                <a:spcPts val="600"/>
+              </a:spcBef>
+              <a:defRPr sz="1300">
+                <a:solidFill>
+                  <a:srgbClr val="2D2D44"/>
+                </a:solidFill>
+              </a:defRPr>
+            </a:pPr>
+            <a:r>
+              <a:t>G*Power Verification: Independent t-test: d=0.50, a=0.05, power=0.80 -&gt; n=64 total; ANCOVA with covariate -&gt; n=34/group</a:t>
+            </a:r>
+          </a:p>
+          <a:p>
+            <a:pPr>
+              <a:spcBef>
+                <a:spcPts val="600"/>
+              </a:spcBef>
+              <a:defRPr sz="1300">
+                <a:solidFill>
+                  <a:srgbClr val="2D2D44"/>
+                </a:solidFill>
+              </a:defRPr>
+            </a:pPr>
+            <a:r>
+              <a:t>FINAL DECISION: N = 60 (30 per group) - justified by ANCOVA as primary analysis</a:t>
+            </a:r>
+          </a:p>
+          <a:p>
+            <a:pPr>
+              <a:spcBef>
+                <a:spcPts val="600"/>
+              </a:spcBef>
+              <a:defRPr sz="1300">
+                <a:solidFill>
+                  <a:srgbClr val="2D2D44"/>
+                </a:solidFill>
+              </a:defRPr>
+            </a:pPr>
+            <a:r>
+              <a:t>Recruit 70 total (35/group) to account for ~15% attrition</a:t>
+            </a:r>
+          </a:p>
+          <a:p>
+            <a:pPr>
+              <a:spcBef>
+                <a:spcPts val="600"/>
+              </a:spcBef>
+              <a:defRPr sz="1300">
+                <a:solidFill>
+                  <a:srgbClr val="2D2D44"/>
+                </a:solidFill>
+              </a:defRPr>
+            </a:pPr>
+            <a:r>
+              <a:t>Consistent with: Bowen et al. (2009), Glasner-Edwards et al. (2017)</a:t>
             </a:r>
           </a:p>
         </p:txBody>
@@ -5436,7 +5422,7 @@
               </a:defRPr>
             </a:pPr>
             <a:r>
-              <a:t>SLIDE 2: Introduction &amp; Background (1/3)</a:t>
+              <a:t>Introduction &amp; Background (1/3)</a:t>
             </a:r>
           </a:p>
         </p:txBody>
@@ -5500,9 +5486,9 @@
           <a:p>
             <a:pPr>
               <a:spcBef>
-                <a:spcPts val="800"/>
-              </a:spcBef>
-              <a:defRPr sz="1400">
+                <a:spcPts val="600"/>
+              </a:spcBef>
+              <a:defRPr sz="1300">
                 <a:solidFill>
                   <a:srgbClr val="2D2D44"/>
                 </a:solidFill>
@@ -5515,9 +5501,9 @@
           <a:p>
             <a:pPr>
               <a:spcBef>
-                <a:spcPts val="800"/>
-              </a:spcBef>
-              <a:defRPr sz="1400">
+                <a:spcPts val="600"/>
+              </a:spcBef>
+              <a:defRPr sz="1300">
                 <a:solidFill>
                   <a:srgbClr val="2D2D44"/>
                 </a:solidFill>
@@ -5530,9 +5516,9 @@
           <a:p>
             <a:pPr>
               <a:spcBef>
-                <a:spcPts val="800"/>
-              </a:spcBef>
-              <a:defRPr sz="1400">
+                <a:spcPts val="600"/>
+              </a:spcBef>
+              <a:defRPr sz="1300">
                 <a:solidFill>
                   <a:srgbClr val="2D2D44"/>
                 </a:solidFill>
@@ -5545,9 +5531,9 @@
           <a:p>
             <a:pPr>
               <a:spcBef>
-                <a:spcPts val="800"/>
-              </a:spcBef>
-              <a:defRPr sz="1400">
+                <a:spcPts val="600"/>
+              </a:spcBef>
+              <a:defRPr sz="1300">
                 <a:solidFill>
                   <a:srgbClr val="2D2D44"/>
                 </a:solidFill>
@@ -5560,9 +5546,9 @@
           <a:p>
             <a:pPr>
               <a:spcBef>
-                <a:spcPts val="800"/>
-              </a:spcBef>
-              <a:defRPr sz="1400">
+                <a:spcPts val="600"/>
+              </a:spcBef>
+              <a:defRPr sz="1300">
                 <a:solidFill>
                   <a:srgbClr val="2D2D44"/>
                 </a:solidFill>
@@ -5575,9 +5561,9 @@
           <a:p>
             <a:pPr>
               <a:spcBef>
-                <a:spcPts val="800"/>
-              </a:spcBef>
-              <a:defRPr sz="1400">
+                <a:spcPts val="600"/>
+              </a:spcBef>
+              <a:defRPr sz="1300">
                 <a:solidFill>
                   <a:srgbClr val="2D2D44"/>
                 </a:solidFill>
@@ -5590,9 +5576,9 @@
           <a:p>
             <a:pPr>
               <a:spcBef>
-                <a:spcPts val="800"/>
-              </a:spcBef>
-              <a:defRPr sz="1400">
+                <a:spcPts val="600"/>
+              </a:spcBef>
+              <a:defRPr sz="1300">
                 <a:solidFill>
                   <a:srgbClr val="2D2D44"/>
                 </a:solidFill>
@@ -5703,7 +5689,7 @@
               </a:defRPr>
             </a:pPr>
             <a:r>
-              <a:t>SLIDE 20: Sample</a:t>
+              <a:t>Inclusion Criteria</a:t>
             </a:r>
           </a:p>
         </p:txBody>
@@ -5732,91 +5718,121 @@
           <a:p>
             <a:pPr>
               <a:spcBef>
-                <a:spcPts val="800"/>
-              </a:spcBef>
-              <a:defRPr sz="1400">
-                <a:solidFill>
-                  <a:srgbClr val="2D2D44"/>
-                </a:solidFill>
-              </a:defRPr>
-            </a:pPr>
-            <a:r>
-              <a:t>Population: Substance-dependent patients (primarily opioid users) admitted to de-addiction/rehabilitation centers</a:t>
-            </a:r>
-          </a:p>
-          <a:p>
-            <a:pPr>
-              <a:spcBef>
-                <a:spcPts val="800"/>
-              </a:spcBef>
-              <a:defRPr sz="1400">
-                <a:solidFill>
-                  <a:srgbClr val="2D2D44"/>
-                </a:solidFill>
-              </a:defRPr>
-            </a:pPr>
-            <a:r>
-              <a:t>Sampling Method: Purposive sampling followed by random allocation to groups</a:t>
-            </a:r>
-          </a:p>
-          <a:p>
-            <a:pPr>
-              <a:spcBef>
-                <a:spcPts val="800"/>
-              </a:spcBef>
-              <a:defRPr sz="1400">
-                <a:solidFill>
-                  <a:srgbClr val="2D2D44"/>
-                </a:solidFill>
-              </a:defRPr>
-            </a:pPr>
-            <a:r>
-              <a:t>Sample Size: N = 60 (30 per group)</a:t>
-            </a:r>
-          </a:p>
-          <a:p>
-            <a:pPr>
-              <a:spcBef>
-                <a:spcPts val="800"/>
-              </a:spcBef>
-              <a:defRPr sz="1400">
-                <a:solidFill>
-                  <a:srgbClr val="2D2D44"/>
-                </a:solidFill>
-              </a:defRPr>
-            </a:pPr>
-            <a:r>
-              <a:t>Setting: Government/private de-addiction centers in India</a:t>
-            </a:r>
-          </a:p>
-          <a:p>
-            <a:pPr>
-              <a:spcBef>
-                <a:spcPts val="800"/>
-              </a:spcBef>
-              <a:defRPr sz="1400">
-                <a:solidFill>
-                  <a:srgbClr val="2D2D44"/>
-                </a:solidFill>
-              </a:defRPr>
-            </a:pPr>
-            <a:r>
-              <a:t>Recruitment: Consecutive admissions meeting inclusion criteria over 6-8 months</a:t>
-            </a:r>
-          </a:p>
-          <a:p>
-            <a:pPr>
-              <a:spcBef>
-                <a:spcPts val="800"/>
-              </a:spcBef>
-              <a:defRPr sz="1400">
-                <a:solidFill>
-                  <a:srgbClr val="2D2D44"/>
-                </a:solidFill>
-              </a:defRPr>
-            </a:pPr>
-            <a:r>
-              <a:t>Attrition Consideration: Recruit N = 70 (35 per group) to account for ~15% dropout</a:t>
+                <a:spcPts val="600"/>
+              </a:spcBef>
+              <a:defRPr sz="1300">
+                <a:solidFill>
+                  <a:srgbClr val="2D2D44"/>
+                </a:solidFill>
+              </a:defRPr>
+            </a:pPr>
+            <a:r>
+              <a:t>1. Diagnosis of Substance Dependence as per ICD-10 (F10-F19) / ICD-11 criteria</a:t>
+            </a:r>
+          </a:p>
+          <a:p>
+            <a:pPr>
+              <a:spcBef>
+                <a:spcPts val="600"/>
+              </a:spcBef>
+              <a:defRPr sz="1300">
+                <a:solidFill>
+                  <a:srgbClr val="2D2D44"/>
+                </a:solidFill>
+              </a:defRPr>
+            </a:pPr>
+            <a:r>
+              <a:t>2. Primary substance: Opioids (heroin, pharmaceutical opioids); polysubstance with primary opioid dependence included</a:t>
+            </a:r>
+          </a:p>
+          <a:p>
+            <a:pPr>
+              <a:spcBef>
+                <a:spcPts val="600"/>
+              </a:spcBef>
+              <a:defRPr sz="1300">
+                <a:solidFill>
+                  <a:srgbClr val="2D2D44"/>
+                </a:solidFill>
+              </a:defRPr>
+            </a:pPr>
+            <a:r>
+              <a:t>3. Age: 18-50 years (male participants)</a:t>
+            </a:r>
+          </a:p>
+          <a:p>
+            <a:pPr>
+              <a:spcBef>
+                <a:spcPts val="600"/>
+              </a:spcBef>
+              <a:defRPr sz="1300">
+                <a:solidFill>
+                  <a:srgbClr val="2D2D44"/>
+                </a:solidFill>
+              </a:defRPr>
+            </a:pPr>
+            <a:r>
+              <a:t>4. Completed detoxification phase (minimum 7 days post-withdrawal)</a:t>
+            </a:r>
+          </a:p>
+          <a:p>
+            <a:pPr>
+              <a:spcBef>
+                <a:spcPts val="600"/>
+              </a:spcBef>
+              <a:defRPr sz="1300">
+                <a:solidFill>
+                  <a:srgbClr val="2D2D44"/>
+                </a:solidFill>
+              </a:defRPr>
+            </a:pPr>
+            <a:r>
+              <a:t>5. Currently admitted in de-addiction/rehabilitation center</a:t>
+            </a:r>
+          </a:p>
+          <a:p>
+            <a:pPr>
+              <a:spcBef>
+                <a:spcPts val="600"/>
+              </a:spcBef>
+              <a:defRPr sz="1300">
+                <a:solidFill>
+                  <a:srgbClr val="2D2D44"/>
+                </a:solidFill>
+              </a:defRPr>
+            </a:pPr>
+            <a:r>
+              <a:t>6. Minimum education: 5th standard (ability to comprehend psychometric tools)</a:t>
+            </a:r>
+          </a:p>
+          <a:p>
+            <a:pPr>
+              <a:spcBef>
+                <a:spcPts val="600"/>
+              </a:spcBef>
+              <a:defRPr sz="1300">
+                <a:solidFill>
+                  <a:srgbClr val="2D2D44"/>
+                </a:solidFill>
+              </a:defRPr>
+            </a:pPr>
+            <a:r>
+              <a:t>7. Willingness to provide written informed consent</a:t>
+            </a:r>
+          </a:p>
+          <a:p>
+            <a:pPr>
+              <a:spcBef>
+                <a:spcPts val="600"/>
+              </a:spcBef>
+              <a:defRPr sz="1300">
+                <a:solidFill>
+                  <a:srgbClr val="2D2D44"/>
+                </a:solidFill>
+              </a:defRPr>
+            </a:pPr>
+            <a:r>
+              <a:t>8. Able to attend all intervention sessions during admission</a:t>
             </a:r>
           </a:p>
         </p:txBody>
@@ -5920,7 +5936,7 @@
               </a:defRPr>
             </a:pPr>
             <a:r>
-              <a:t>SLIDE 21: Sample Size Estimation</a:t>
+              <a:t>Exclusion Criteria</a:t>
             </a:r>
           </a:p>
         </p:txBody>
@@ -5949,106 +5965,106 @@
           <a:p>
             <a:pPr>
               <a:spcBef>
-                <a:spcPts val="800"/>
-              </a:spcBef>
-              <a:defRPr sz="1400">
-                <a:solidFill>
-                  <a:srgbClr val="2D2D44"/>
-                </a:solidFill>
-              </a:defRPr>
-            </a:pPr>
-            <a:r>
-              <a:t>Formula: n = [(Za/2 + Zb)^2 x 2s^2] / d^2</a:t>
-            </a:r>
-          </a:p>
-          <a:p>
-            <a:pPr>
-              <a:spcBef>
-                <a:spcPts val="800"/>
-              </a:spcBef>
-              <a:defRPr sz="1400">
-                <a:solidFill>
-                  <a:srgbClr val="2D2D44"/>
-                </a:solidFill>
-              </a:defRPr>
-            </a:pPr>
-            <a:r>
-              <a:t>Parameters: Effect size (d) = 0.50 (medium; Li et al., 2017 meta-analysis: d = 0.33-0.68) | Power (1-b) = 0.80 -&gt; Zb = 0.84 | Alpha = 0.05 (two-tailed) -&gt; Za/2 = 1.96</a:t>
-            </a:r>
-          </a:p>
-          <a:p>
-            <a:pPr>
-              <a:spcBef>
-                <a:spcPts val="800"/>
-              </a:spcBef>
-              <a:defRPr sz="1400">
-                <a:solidFill>
-                  <a:srgbClr val="2D2D44"/>
-                </a:solidFill>
-              </a:defRPr>
-            </a:pPr>
-            <a:r>
-              <a:t>Calculation: n = [(1.96 + 0.84)^2 x 2 x 1] / (0.50)^2 = [7.84 x 2] / 0.25 = 15.68 / 0.25 = 62.72 ~ 63 total (~32 per group)</a:t>
-            </a:r>
-          </a:p>
-          <a:p>
-            <a:pPr>
-              <a:spcBef>
-                <a:spcPts val="800"/>
-              </a:spcBef>
-              <a:defRPr sz="1400">
-                <a:solidFill>
-                  <a:srgbClr val="2D2D44"/>
-                </a:solidFill>
-              </a:defRPr>
-            </a:pPr>
-            <a:r>
-              <a:t>G*Power Verification: Independent t-test (two-tailed): d=0.50, a=0.05, power=0.80 -&gt; n=64 total; ANCOVA with 1 covariate -&gt; n=34 per group</a:t>
-            </a:r>
-          </a:p>
-          <a:p>
-            <a:pPr>
-              <a:spcBef>
-                <a:spcPts val="800"/>
-              </a:spcBef>
-              <a:defRPr sz="1400">
-                <a:solidFill>
-                  <a:srgbClr val="2D2D44"/>
-                </a:solidFill>
-              </a:defRPr>
-            </a:pPr>
-            <a:r>
-              <a:t>FINAL DECISION: N = 60 (30 per group) - justified by ANCOVA as primary analysis (reduces required n)</a:t>
-            </a:r>
-          </a:p>
-          <a:p>
-            <a:pPr>
-              <a:spcBef>
-                <a:spcPts val="800"/>
-              </a:spcBef>
-              <a:defRPr sz="1400">
-                <a:solidFill>
-                  <a:srgbClr val="2D2D44"/>
-                </a:solidFill>
-              </a:defRPr>
-            </a:pPr>
-            <a:r>
-              <a:t>Recruit 70 total (35/group) to account for attrition (~15%)</a:t>
-            </a:r>
-          </a:p>
-          <a:p>
-            <a:pPr>
-              <a:spcBef>
-                <a:spcPts val="800"/>
-              </a:spcBef>
-              <a:defRPr sz="1400">
-                <a:solidFill>
-                  <a:srgbClr val="2D2D44"/>
-                </a:solidFill>
-              </a:defRPr>
-            </a:pPr>
-            <a:r>
-              <a:t>Consistent with similar studies: Bowen et al. (2009), Glasner-Edwards et al. (2017)</a:t>
+                <a:spcPts val="600"/>
+              </a:spcBef>
+              <a:defRPr sz="1300">
+                <a:solidFill>
+                  <a:srgbClr val="2D2D44"/>
+                </a:solidFill>
+              </a:defRPr>
+            </a:pPr>
+            <a:r>
+              <a:t>1. Severe psychiatric comorbidity: Psychotic disorders, Bipolar I with psychotic features, severe MDE with suicidality</a:t>
+            </a:r>
+          </a:p>
+          <a:p>
+            <a:pPr>
+              <a:spcBef>
+                <a:spcPts val="600"/>
+              </a:spcBef>
+              <a:defRPr sz="1300">
+                <a:solidFill>
+                  <a:srgbClr val="2D2D44"/>
+                </a:solidFill>
+              </a:defRPr>
+            </a:pPr>
+            <a:r>
+              <a:t>2. Significant cognitive impairment (MMSE &lt; 24) or intellectual disability</a:t>
+            </a:r>
+          </a:p>
+          <a:p>
+            <a:pPr>
+              <a:spcBef>
+                <a:spcPts val="600"/>
+              </a:spcBef>
+              <a:defRPr sz="1300">
+                <a:solidFill>
+                  <a:srgbClr val="2D2D44"/>
+                </a:solidFill>
+              </a:defRPr>
+            </a:pPr>
+            <a:r>
+              <a:t>3. Active withdrawal symptoms (COWS score &gt; 12)</a:t>
+            </a:r>
+          </a:p>
+          <a:p>
+            <a:pPr>
+              <a:spcBef>
+                <a:spcPts val="600"/>
+              </a:spcBef>
+              <a:defRPr sz="1300">
+                <a:solidFill>
+                  <a:srgbClr val="2D2D44"/>
+                </a:solidFill>
+              </a:defRPr>
+            </a:pPr>
+            <a:r>
+              <a:t>4. History of traumatic brain injury with LOC &gt; 30 minutes</a:t>
+            </a:r>
+          </a:p>
+          <a:p>
+            <a:pPr>
+              <a:spcBef>
+                <a:spcPts val="600"/>
+              </a:spcBef>
+              <a:defRPr sz="1300">
+                <a:solidFill>
+                  <a:srgbClr val="2D2D44"/>
+                </a:solidFill>
+              </a:defRPr>
+            </a:pPr>
+            <a:r>
+              <a:t>5. Current participation in another structured psychological intervention study</a:t>
+            </a:r>
+          </a:p>
+          <a:p>
+            <a:pPr>
+              <a:spcBef>
+                <a:spcPts val="600"/>
+              </a:spcBef>
+              <a:defRPr sz="1300">
+                <a:solidFill>
+                  <a:srgbClr val="2D2D44"/>
+                </a:solidFill>
+              </a:defRPr>
+            </a:pPr>
+            <a:r>
+              <a:t>6. Medical instability requiring acute care</a:t>
+            </a:r>
+          </a:p>
+          <a:p>
+            <a:pPr>
+              <a:spcBef>
+                <a:spcPts val="600"/>
+              </a:spcBef>
+              <a:defRPr sz="1300">
+                <a:solidFill>
+                  <a:srgbClr val="2D2D44"/>
+                </a:solidFill>
+              </a:defRPr>
+            </a:pPr>
+            <a:r>
+              <a:t>7. History of prior formal mindfulness/meditation training (&gt; 1 month)</a:t>
             </a:r>
           </a:p>
         </p:txBody>
@@ -6152,7 +6168,7 @@
               </a:defRPr>
             </a:pPr>
             <a:r>
-              <a:t>SLIDE 22: Inclusion Criteria</a:t>
+              <a:t>Variables</a:t>
             </a:r>
           </a:p>
         </p:txBody>
@@ -6181,121 +6197,130 @@
           <a:p>
             <a:pPr>
               <a:spcBef>
-                <a:spcPts val="800"/>
-              </a:spcBef>
-              <a:defRPr sz="1400">
-                <a:solidFill>
-                  <a:srgbClr val="2D2D44"/>
-                </a:solidFill>
-              </a:defRPr>
-            </a:pPr>
-            <a:r>
-              <a:t>1. Diagnosis of Substance Dependence as per ICD-10 (F10-F19) / ICD-11 criteria</a:t>
-            </a:r>
-          </a:p>
-          <a:p>
-            <a:pPr>
-              <a:spcBef>
-                <a:spcPts val="800"/>
-              </a:spcBef>
-              <a:defRPr sz="1400">
-                <a:solidFill>
-                  <a:srgbClr val="2D2D44"/>
-                </a:solidFill>
-              </a:defRPr>
-            </a:pPr>
-            <a:r>
-              <a:t>2. Primary substance: Opioids (heroin, pharmaceutical opioids); polysubstance users with primary opioid dependence included</a:t>
-            </a:r>
-          </a:p>
-          <a:p>
-            <a:pPr>
-              <a:spcBef>
-                <a:spcPts val="800"/>
-              </a:spcBef>
-              <a:defRPr sz="1400">
-                <a:solidFill>
-                  <a:srgbClr val="2D2D44"/>
-                </a:solidFill>
-              </a:defRPr>
-            </a:pPr>
-            <a:r>
-              <a:t>3. Age: 18-50 years (male participants)</a:t>
-            </a:r>
-          </a:p>
-          <a:p>
-            <a:pPr>
-              <a:spcBef>
-                <a:spcPts val="800"/>
-              </a:spcBef>
-              <a:defRPr sz="1400">
-                <a:solidFill>
-                  <a:srgbClr val="2D2D44"/>
-                </a:solidFill>
-              </a:defRPr>
-            </a:pPr>
-            <a:r>
-              <a:t>4. Completed detoxification phase (minimum 7 days post-withdrawal)</a:t>
-            </a:r>
-          </a:p>
-          <a:p>
-            <a:pPr>
-              <a:spcBef>
-                <a:spcPts val="800"/>
-              </a:spcBef>
-              <a:defRPr sz="1400">
-                <a:solidFill>
-                  <a:srgbClr val="2D2D44"/>
-                </a:solidFill>
-              </a:defRPr>
-            </a:pPr>
-            <a:r>
-              <a:t>5. Currently admitted in de-addiction/rehabilitation center</a:t>
-            </a:r>
-          </a:p>
-          <a:p>
-            <a:pPr>
-              <a:spcBef>
-                <a:spcPts val="800"/>
-              </a:spcBef>
-              <a:defRPr sz="1400">
-                <a:solidFill>
-                  <a:srgbClr val="2D2D44"/>
-                </a:solidFill>
-              </a:defRPr>
-            </a:pPr>
-            <a:r>
-              <a:t>6. Minimum education: 5th standard (ability to comprehend psychometric tools)</a:t>
-            </a:r>
-          </a:p>
-          <a:p>
-            <a:pPr>
-              <a:spcBef>
-                <a:spcPts val="800"/>
-              </a:spcBef>
-              <a:defRPr sz="1400">
-                <a:solidFill>
-                  <a:srgbClr val="2D2D44"/>
-                </a:solidFill>
-              </a:defRPr>
-            </a:pPr>
-            <a:r>
-              <a:t>7. Willingness to provide written informed consent</a:t>
-            </a:r>
-          </a:p>
-          <a:p>
-            <a:pPr>
-              <a:spcBef>
-                <a:spcPts val="800"/>
-              </a:spcBef>
-              <a:defRPr sz="1400">
-                <a:solidFill>
-                  <a:srgbClr val="2D2D44"/>
-                </a:solidFill>
-              </a:defRPr>
-            </a:pPr>
-            <a:r>
-              <a:t>8. Able to attend all intervention sessions during admission</a:t>
+                <a:spcPts val="600"/>
+              </a:spcBef>
+              <a:defRPr sz="1300">
+                <a:solidFill>
+                  <a:srgbClr val="2D2D44"/>
+                </a:solidFill>
+              </a:defRPr>
+            </a:pPr>
+            <a:r>
+              <a:t>INDEPENDENT VARIABLE (IV):</a:t>
+            </a:r>
+          </a:p>
+          <a:p>
+            <a:pPr>
+              <a:spcBef>
+                <a:spcPts val="600"/>
+              </a:spcBef>
+              <a:defRPr sz="1300">
+                <a:solidFill>
+                  <a:srgbClr val="2D2D44"/>
+                </a:solidFill>
+              </a:defRPr>
+            </a:pPr>
+            <a:r>
+              <a:t>  Type of Intervention: Level 1 = Brief MBRP + TAU (Experimental) | Level 2 = Psychoeducation + TAU (Control)</a:t>
+            </a:r>
+          </a:p>
+          <a:p>
+            <a:pPr>
+              <a:spcBef>
+                <a:spcPts val="600"/>
+              </a:spcBef>
+              <a:defRPr sz="1300">
+                <a:solidFill>
+                  <a:srgbClr val="2D2D44"/>
+                </a:solidFill>
+              </a:defRPr>
+            </a:pPr>
+          </a:p>
+          <a:p>
+            <a:pPr>
+              <a:spcBef>
+                <a:spcPts val="600"/>
+              </a:spcBef>
+              <a:defRPr sz="1300">
+                <a:solidFill>
+                  <a:srgbClr val="2D2D44"/>
+                </a:solidFill>
+              </a:defRPr>
+            </a:pPr>
+            <a:r>
+              <a:t>DEPENDENT VARIABLES (DVs):</a:t>
+            </a:r>
+          </a:p>
+          <a:p>
+            <a:pPr>
+              <a:spcBef>
+                <a:spcPts val="600"/>
+              </a:spcBef>
+              <a:defRPr sz="1300">
+                <a:solidFill>
+                  <a:srgbClr val="2D2D44"/>
+                </a:solidFill>
+              </a:defRPr>
+            </a:pPr>
+            <a:r>
+              <a:t>  1. Craving - measured by Heroin Craving Questionnaire (HCQ)</a:t>
+            </a:r>
+          </a:p>
+          <a:p>
+            <a:pPr>
+              <a:spcBef>
+                <a:spcPts val="600"/>
+              </a:spcBef>
+              <a:defRPr sz="1300">
+                <a:solidFill>
+                  <a:srgbClr val="2D2D44"/>
+                </a:solidFill>
+              </a:defRPr>
+            </a:pPr>
+            <a:r>
+              <a:t>  2. Impulsivity - measured by Barratt Impulsiveness Scale (BIS-11)</a:t>
+            </a:r>
+          </a:p>
+          <a:p>
+            <a:pPr>
+              <a:spcBef>
+                <a:spcPts val="600"/>
+              </a:spcBef>
+              <a:defRPr sz="1300">
+                <a:solidFill>
+                  <a:srgbClr val="2D2D44"/>
+                </a:solidFill>
+              </a:defRPr>
+            </a:pPr>
+            <a:r>
+              <a:t>  3. Mindfulness - measured by Five Facet Mindfulness Questionnaire (FFMQ)</a:t>
+            </a:r>
+          </a:p>
+          <a:p>
+            <a:pPr>
+              <a:spcBef>
+                <a:spcPts val="600"/>
+              </a:spcBef>
+              <a:defRPr sz="1300">
+                <a:solidFill>
+                  <a:srgbClr val="2D2D44"/>
+                </a:solidFill>
+              </a:defRPr>
+            </a:pPr>
+          </a:p>
+          <a:p>
+            <a:pPr>
+              <a:spcBef>
+                <a:spcPts val="600"/>
+              </a:spcBef>
+              <a:defRPr sz="1300">
+                <a:solidFill>
+                  <a:srgbClr val="2D2D44"/>
+                </a:solidFill>
+              </a:defRPr>
+            </a:pPr>
+            <a:r>
+              <a:t>CONTROLLED VARIABLES: Age, education, duration of use, severity (ASSIST), TAU constant, session duration equalized</a:t>
             </a:r>
           </a:p>
         </p:txBody>
@@ -6399,7 +6424,7 @@
               </a:defRPr>
             </a:pPr>
             <a:r>
-              <a:t>SLIDE 23: Exclusion Criteria</a:t>
+              <a:t>Tools: Mindfulness &amp; Impulsivity Measures</a:t>
             </a:r>
           </a:p>
         </p:txBody>
@@ -6428,106 +6453,118 @@
           <a:p>
             <a:pPr>
               <a:spcBef>
-                <a:spcPts val="800"/>
-              </a:spcBef>
-              <a:defRPr sz="1400">
-                <a:solidFill>
-                  <a:srgbClr val="2D2D44"/>
-                </a:solidFill>
-              </a:defRPr>
-            </a:pPr>
-            <a:r>
-              <a:t>1. Severe psychiatric comorbidity: Psychotic disorders, Bipolar I with psychotic features, severe MDE with suicidality</a:t>
-            </a:r>
-          </a:p>
-          <a:p>
-            <a:pPr>
-              <a:spcBef>
-                <a:spcPts val="800"/>
-              </a:spcBef>
-              <a:defRPr sz="1400">
-                <a:solidFill>
-                  <a:srgbClr val="2D2D44"/>
-                </a:solidFill>
-              </a:defRPr>
-            </a:pPr>
-            <a:r>
-              <a:t>2. Significant cognitive impairment (MMSE &lt; 24) or intellectual disability</a:t>
-            </a:r>
-          </a:p>
-          <a:p>
-            <a:pPr>
-              <a:spcBef>
-                <a:spcPts val="800"/>
-              </a:spcBef>
-              <a:defRPr sz="1400">
-                <a:solidFill>
-                  <a:srgbClr val="2D2D44"/>
-                </a:solidFill>
-              </a:defRPr>
-            </a:pPr>
-            <a:r>
-              <a:t>3. Active withdrawal symptoms (COWS score &gt; 12)</a:t>
-            </a:r>
-          </a:p>
-          <a:p>
-            <a:pPr>
-              <a:spcBef>
-                <a:spcPts val="800"/>
-              </a:spcBef>
-              <a:defRPr sz="1400">
-                <a:solidFill>
-                  <a:srgbClr val="2D2D44"/>
-                </a:solidFill>
-              </a:defRPr>
-            </a:pPr>
-            <a:r>
-              <a:t>4. History of traumatic brain injury with LOC &gt; 30 minutes</a:t>
-            </a:r>
-          </a:p>
-          <a:p>
-            <a:pPr>
-              <a:spcBef>
-                <a:spcPts val="800"/>
-              </a:spcBef>
-              <a:defRPr sz="1400">
-                <a:solidFill>
-                  <a:srgbClr val="2D2D44"/>
-                </a:solidFill>
-              </a:defRPr>
-            </a:pPr>
-            <a:r>
-              <a:t>5. Current participation in another structured psychological intervention study</a:t>
-            </a:r>
-          </a:p>
-          <a:p>
-            <a:pPr>
-              <a:spcBef>
-                <a:spcPts val="800"/>
-              </a:spcBef>
-              <a:defRPr sz="1400">
-                <a:solidFill>
-                  <a:srgbClr val="2D2D44"/>
-                </a:solidFill>
-              </a:defRPr>
-            </a:pPr>
-            <a:r>
-              <a:t>6. Medical instability requiring acute care</a:t>
-            </a:r>
-          </a:p>
-          <a:p>
-            <a:pPr>
-              <a:spcBef>
-                <a:spcPts val="800"/>
-              </a:spcBef>
-              <a:defRPr sz="1400">
-                <a:solidFill>
-                  <a:srgbClr val="2D2D44"/>
-                </a:solidFill>
-              </a:defRPr>
-            </a:pPr>
-            <a:r>
-              <a:t>7. History of prior formal mindfulness/meditation training (&gt; 1 month)</a:t>
+                <a:spcPts val="600"/>
+              </a:spcBef>
+              <a:defRPr sz="1300">
+                <a:solidFill>
+                  <a:srgbClr val="2D2D44"/>
+                </a:solidFill>
+              </a:defRPr>
+            </a:pPr>
+            <a:r>
+              <a:t>1. FIVE FACET MINDFULNESS QUESTIONNAIRE (FFMQ) - Baer et al. (2006)</a:t>
+            </a:r>
+          </a:p>
+          <a:p>
+            <a:pPr>
+              <a:spcBef>
+                <a:spcPts val="600"/>
+              </a:spcBef>
+              <a:defRPr sz="1300">
+                <a:solidFill>
+                  <a:srgbClr val="2D2D44"/>
+                </a:solidFill>
+              </a:defRPr>
+            </a:pPr>
+            <a:r>
+              <a:t>   39 items | 5 facets: Observing, Describing, Acting with Awareness, Non-Judging, Non-Reactivity</a:t>
+            </a:r>
+          </a:p>
+          <a:p>
+            <a:pPr>
+              <a:spcBef>
+                <a:spcPts val="600"/>
+              </a:spcBef>
+              <a:defRPr sz="1300">
+                <a:solidFill>
+                  <a:srgbClr val="2D2D44"/>
+                </a:solidFill>
+              </a:defRPr>
+            </a:pPr>
+            <a:r>
+              <a:t>   5-point Likert (1-5) | Higher = greater mindfulness | Reliability: a = 0.75-0.91 | Hindi adaptation available</a:t>
+            </a:r>
+          </a:p>
+          <a:p>
+            <a:pPr>
+              <a:spcBef>
+                <a:spcPts val="600"/>
+              </a:spcBef>
+              <a:defRPr sz="1300">
+                <a:solidFill>
+                  <a:srgbClr val="2D2D44"/>
+                </a:solidFill>
+              </a:defRPr>
+            </a:pPr>
+          </a:p>
+          <a:p>
+            <a:pPr>
+              <a:spcBef>
+                <a:spcPts val="600"/>
+              </a:spcBef>
+              <a:defRPr sz="1300">
+                <a:solidFill>
+                  <a:srgbClr val="2D2D44"/>
+                </a:solidFill>
+              </a:defRPr>
+            </a:pPr>
+            <a:r>
+              <a:t>2. BARRATT IMPULSIVENESS SCALE (BIS-11) - Patton, Stanford, &amp; Barratt (1995)</a:t>
+            </a:r>
+          </a:p>
+          <a:p>
+            <a:pPr>
+              <a:spcBef>
+                <a:spcPts val="600"/>
+              </a:spcBef>
+              <a:defRPr sz="1300">
+                <a:solidFill>
+                  <a:srgbClr val="2D2D44"/>
+                </a:solidFill>
+              </a:defRPr>
+            </a:pPr>
+            <a:r>
+              <a:t>   30 items | 3 factors: Attentional, Motor, Non-Planning Impulsivity</a:t>
+            </a:r>
+          </a:p>
+          <a:p>
+            <a:pPr>
+              <a:spcBef>
+                <a:spcPts val="600"/>
+              </a:spcBef>
+              <a:defRPr sz="1300">
+                <a:solidFill>
+                  <a:srgbClr val="2D2D44"/>
+                </a:solidFill>
+              </a:defRPr>
+            </a:pPr>
+            <a:r>
+              <a:t>   4-point scale (1-4) | Higher = greater impulsivity | Reliability: a = 0.79-0.83; test-retest r = 0.83</a:t>
+            </a:r>
+          </a:p>
+          <a:p>
+            <a:pPr>
+              <a:spcBef>
+                <a:spcPts val="600"/>
+              </a:spcBef>
+              <a:defRPr sz="1300">
+                <a:solidFill>
+                  <a:srgbClr val="2D2D44"/>
+                </a:solidFill>
+              </a:defRPr>
+            </a:pPr>
+            <a:r>
+              <a:t>   Discriminates substance users from controls | Hindi version validated (Mathew et al., 2014)</a:t>
             </a:r>
           </a:p>
         </p:txBody>
@@ -6631,7 +6668,7 @@
               </a:defRPr>
             </a:pPr>
             <a:r>
-              <a:t>SLIDE 24: Variables</a:t>
+              <a:t>Tools: Craving Assessment</a:t>
             </a:r>
           </a:p>
         </p:txBody>
@@ -6660,130 +6697,118 @@
           <a:p>
             <a:pPr>
               <a:spcBef>
-                <a:spcPts val="800"/>
-              </a:spcBef>
-              <a:defRPr sz="1400">
-                <a:solidFill>
-                  <a:srgbClr val="2D2D44"/>
-                </a:solidFill>
-              </a:defRPr>
-            </a:pPr>
-            <a:r>
-              <a:t>INDEPENDENT VARIABLE (IV):</a:t>
-            </a:r>
-          </a:p>
-          <a:p>
-            <a:pPr>
-              <a:spcBef>
-                <a:spcPts val="800"/>
-              </a:spcBef>
-              <a:defRPr sz="1400">
-                <a:solidFill>
-                  <a:srgbClr val="2D2D44"/>
-                </a:solidFill>
-              </a:defRPr>
-            </a:pPr>
-            <a:r>
-              <a:t>  Type of Intervention: Level 1 = Brief MBRP + TAU (Experimental) | Level 2 = Psychoeducation + TAU (Control)</a:t>
-            </a:r>
-          </a:p>
-          <a:p>
-            <a:pPr>
-              <a:spcBef>
-                <a:spcPts val="800"/>
-              </a:spcBef>
-              <a:defRPr sz="1400">
-                <a:solidFill>
-                  <a:srgbClr val="2D2D44"/>
-                </a:solidFill>
-              </a:defRPr>
-            </a:pPr>
-          </a:p>
-          <a:p>
-            <a:pPr>
-              <a:spcBef>
-                <a:spcPts val="800"/>
-              </a:spcBef>
-              <a:defRPr sz="1400">
-                <a:solidFill>
-                  <a:srgbClr val="2D2D44"/>
-                </a:solidFill>
-              </a:defRPr>
-            </a:pPr>
-            <a:r>
-              <a:t>DEPENDENT VARIABLES (DVs):</a:t>
-            </a:r>
-          </a:p>
-          <a:p>
-            <a:pPr>
-              <a:spcBef>
-                <a:spcPts val="800"/>
-              </a:spcBef>
-              <a:defRPr sz="1400">
-                <a:solidFill>
-                  <a:srgbClr val="2D2D44"/>
-                </a:solidFill>
-              </a:defRPr>
-            </a:pPr>
-            <a:r>
-              <a:t>  1. Craving - measured by Heroin Craving Questionnaire (HCQ)</a:t>
-            </a:r>
-          </a:p>
-          <a:p>
-            <a:pPr>
-              <a:spcBef>
-                <a:spcPts val="800"/>
-              </a:spcBef>
-              <a:defRPr sz="1400">
-                <a:solidFill>
-                  <a:srgbClr val="2D2D44"/>
-                </a:solidFill>
-              </a:defRPr>
-            </a:pPr>
-            <a:r>
-              <a:t>  2. Impulsivity - measured by Barratt Impulsiveness Scale (BIS-11)</a:t>
-            </a:r>
-          </a:p>
-          <a:p>
-            <a:pPr>
-              <a:spcBef>
-                <a:spcPts val="800"/>
-              </a:spcBef>
-              <a:defRPr sz="1400">
-                <a:solidFill>
-                  <a:srgbClr val="2D2D44"/>
-                </a:solidFill>
-              </a:defRPr>
-            </a:pPr>
-            <a:r>
-              <a:t>  3. Mindfulness - measured by Five Facet Mindfulness Questionnaire (FFMQ)</a:t>
-            </a:r>
-          </a:p>
-          <a:p>
-            <a:pPr>
-              <a:spcBef>
-                <a:spcPts val="800"/>
-              </a:spcBef>
-              <a:defRPr sz="1400">
-                <a:solidFill>
-                  <a:srgbClr val="2D2D44"/>
-                </a:solidFill>
-              </a:defRPr>
-            </a:pPr>
-          </a:p>
-          <a:p>
-            <a:pPr>
-              <a:spcBef>
-                <a:spcPts val="800"/>
-              </a:spcBef>
-              <a:defRPr sz="1400">
-                <a:solidFill>
-                  <a:srgbClr val="2D2D44"/>
-                </a:solidFill>
-              </a:defRPr>
-            </a:pPr>
-            <a:r>
-              <a:t>CONTROLLED VARIABLES: Age, education, duration of substance use, severity (ASSIST baseline), TAU components constant, session duration/frequency equalized</a:t>
+                <a:spcPts val="600"/>
+              </a:spcBef>
+              <a:defRPr sz="1300">
+                <a:solidFill>
+                  <a:srgbClr val="2D2D44"/>
+                </a:solidFill>
+              </a:defRPr>
+            </a:pPr>
+            <a:r>
+              <a:t>OPTIONS: HCQ (opioid-specific, 14-item) | OCDUS (generic, 12-item) | VAS (single-item 0-100mm)</a:t>
+            </a:r>
+          </a:p>
+          <a:p>
+            <a:pPr>
+              <a:spcBef>
+                <a:spcPts val="600"/>
+              </a:spcBef>
+              <a:defRPr sz="1300">
+                <a:solidFill>
+                  <a:srgbClr val="2D2D44"/>
+                </a:solidFill>
+              </a:defRPr>
+            </a:pPr>
+          </a:p>
+          <a:p>
+            <a:pPr>
+              <a:spcBef>
+                <a:spcPts val="600"/>
+              </a:spcBef>
+              <a:defRPr sz="1300">
+                <a:solidFill>
+                  <a:srgbClr val="2D2D44"/>
+                </a:solidFill>
+              </a:defRPr>
+            </a:pPr>
+            <a:r>
+              <a:t>RECOMMENDED: HEROIN CRAVING QUESTIONNAIRE (HCQ-Brief, 14 items) - Tiffany et al. (2000)</a:t>
+            </a:r>
+          </a:p>
+          <a:p>
+            <a:pPr>
+              <a:spcBef>
+                <a:spcPts val="600"/>
+              </a:spcBef>
+              <a:defRPr sz="1300">
+                <a:solidFill>
+                  <a:srgbClr val="2D2D44"/>
+                </a:solidFill>
+              </a:defRPr>
+            </a:pPr>
+            <a:r>
+              <a:t>   Assesses: desire to use, intention, anticipation of positive outcome, relief from withdrawal, lack of control</a:t>
+            </a:r>
+          </a:p>
+          <a:p>
+            <a:pPr>
+              <a:spcBef>
+                <a:spcPts val="600"/>
+              </a:spcBef>
+              <a:defRPr sz="1300">
+                <a:solidFill>
+                  <a:srgbClr val="2D2D44"/>
+                </a:solidFill>
+              </a:defRPr>
+            </a:pPr>
+            <a:r>
+              <a:t>   Scoring: 7-point Likert | Reliability: a = 0.87-0.93</a:t>
+            </a:r>
+          </a:p>
+          <a:p>
+            <a:pPr>
+              <a:spcBef>
+                <a:spcPts val="600"/>
+              </a:spcBef>
+              <a:defRPr sz="1300">
+                <a:solidFill>
+                  <a:srgbClr val="2D2D44"/>
+                </a:solidFill>
+              </a:defRPr>
+            </a:pPr>
+            <a:r>
+              <a:t>   Validity: Convergent with VAS; sensitive to intervention effects</a:t>
+            </a:r>
+          </a:p>
+          <a:p>
+            <a:pPr>
+              <a:spcBef>
+                <a:spcPts val="600"/>
+              </a:spcBef>
+              <a:defRPr sz="1300">
+                <a:solidFill>
+                  <a:srgbClr val="2D2D44"/>
+                </a:solidFill>
+              </a:defRPr>
+            </a:pPr>
+            <a:r>
+              <a:t>   Indian usability: Applicable to Indian opioid users; translation feasible</a:t>
+            </a:r>
+          </a:p>
+          <a:p>
+            <a:pPr>
+              <a:spcBef>
+                <a:spcPts val="600"/>
+              </a:spcBef>
+              <a:defRPr sz="1300">
+                <a:solidFill>
+                  <a:srgbClr val="2D2D44"/>
+                </a:solidFill>
+              </a:defRPr>
+            </a:pPr>
+            <a:r>
+              <a:t>   JUSTIFICATION: Substance-specific measurement preferred for opioid populations (EMCDDA guidelines)</a:t>
             </a:r>
           </a:p>
         </p:txBody>
@@ -6887,7 +6912,7 @@
               </a:defRPr>
             </a:pPr>
             <a:r>
-              <a:t>SLIDE 25: Tools - Mindfulness &amp; Impulsivity Measures</a:t>
+              <a:t>Tools: Severity Assessment (Pre-Test Only)</a:t>
             </a:r>
           </a:p>
         </p:txBody>
@@ -6916,103 +6941,133 @@
           <a:p>
             <a:pPr>
               <a:spcBef>
-                <a:spcPts val="800"/>
-              </a:spcBef>
-              <a:defRPr sz="1400">
-                <a:solidFill>
-                  <a:srgbClr val="2D2D44"/>
-                </a:solidFill>
-              </a:defRPr>
-            </a:pPr>
-            <a:r>
-              <a:t>1. FIVE FACET MINDFULNESS QUESTIONNAIRE (FFMQ) - Baer et al. (2006)</a:t>
-            </a:r>
-          </a:p>
-          <a:p>
-            <a:pPr>
-              <a:spcBef>
-                <a:spcPts val="800"/>
-              </a:spcBef>
-              <a:defRPr sz="1400">
-                <a:solidFill>
-                  <a:srgbClr val="2D2D44"/>
-                </a:solidFill>
-              </a:defRPr>
-            </a:pPr>
-            <a:r>
-              <a:t>   39 items | 5 facets: Observing, Describing, Acting with Awareness, Non-Judging, Non-Reactivity | 5-point Likert | Higher = greater mindfulness</a:t>
-            </a:r>
-          </a:p>
-          <a:p>
-            <a:pPr>
-              <a:spcBef>
-                <a:spcPts val="800"/>
-              </a:spcBef>
-              <a:defRPr sz="1400">
-                <a:solidFill>
-                  <a:srgbClr val="2D2D44"/>
-                </a:solidFill>
-              </a:defRPr>
-            </a:pPr>
-            <a:r>
-              <a:t>   Reliability: a = 0.75-0.91 across facets | Validity: Convergent + discriminant established | Indian: Hindi adaptation available</a:t>
-            </a:r>
-          </a:p>
-          <a:p>
-            <a:pPr>
-              <a:spcBef>
-                <a:spcPts val="800"/>
-              </a:spcBef>
-              <a:defRPr sz="1400">
-                <a:solidFill>
-                  <a:srgbClr val="2D2D44"/>
-                </a:solidFill>
-              </a:defRPr>
-            </a:pPr>
-          </a:p>
-          <a:p>
-            <a:pPr>
-              <a:spcBef>
-                <a:spcPts val="800"/>
-              </a:spcBef>
-              <a:defRPr sz="1400">
-                <a:solidFill>
-                  <a:srgbClr val="2D2D44"/>
-                </a:solidFill>
-              </a:defRPr>
-            </a:pPr>
-            <a:r>
-              <a:t>2. BARRATT IMPULSIVENESS SCALE (BIS-11) - Patton, Stanford, &amp; Barratt (1995)</a:t>
-            </a:r>
-          </a:p>
-          <a:p>
-            <a:pPr>
-              <a:spcBef>
-                <a:spcPts val="800"/>
-              </a:spcBef>
-              <a:defRPr sz="1400">
-                <a:solidFill>
-                  <a:srgbClr val="2D2D44"/>
-                </a:solidFill>
-              </a:defRPr>
-            </a:pPr>
-            <a:r>
-              <a:t>   30 items | 3 factors: Attentional, Motor, Non-Planning Impulsivity | 4-point scale | Higher = greater impulsivity</a:t>
-            </a:r>
-          </a:p>
-          <a:p>
-            <a:pPr>
-              <a:spcBef>
-                <a:spcPts val="800"/>
-              </a:spcBef>
-              <a:defRPr sz="1400">
-                <a:solidFill>
-                  <a:srgbClr val="2D2D44"/>
-                </a:solidFill>
-              </a:defRPr>
-            </a:pPr>
-            <a:r>
-              <a:t>   Reliability: a = 0.79-0.83; test-retest r = 0.83 | Validity: Discriminates substance users from controls | Indian: Hindi version validated (Mathew et al., 2014)</a:t>
+                <a:spcPts val="600"/>
+              </a:spcBef>
+              <a:defRPr sz="1300">
+                <a:solidFill>
+                  <a:srgbClr val="2D2D44"/>
+                </a:solidFill>
+              </a:defRPr>
+            </a:pPr>
+            <a:r>
+              <a:t>OPTIONS: ASSIST-WHO (multi-substance, 8-item) | DAST-20 (drug-specific) | AUDIT (alcohol-specific)</a:t>
+            </a:r>
+          </a:p>
+          <a:p>
+            <a:pPr>
+              <a:spcBef>
+                <a:spcPts val="600"/>
+              </a:spcBef>
+              <a:defRPr sz="1300">
+                <a:solidFill>
+                  <a:srgbClr val="2D2D44"/>
+                </a:solidFill>
+              </a:defRPr>
+            </a:pPr>
+          </a:p>
+          <a:p>
+            <a:pPr>
+              <a:spcBef>
+                <a:spcPts val="600"/>
+              </a:spcBef>
+              <a:defRPr sz="1300">
+                <a:solidFill>
+                  <a:srgbClr val="2D2D44"/>
+                </a:solidFill>
+              </a:defRPr>
+            </a:pPr>
+            <a:r>
+              <a:t>RECOMMENDED: ASSIST - WHO ASSIST Working Group (2002); Humeniuk et al.</a:t>
+            </a:r>
+          </a:p>
+          <a:p>
+            <a:pPr>
+              <a:spcBef>
+                <a:spcPts val="600"/>
+              </a:spcBef>
+              <a:defRPr sz="1300">
+                <a:solidFill>
+                  <a:srgbClr val="2D2D44"/>
+                </a:solidFill>
+              </a:defRPr>
+            </a:pPr>
+            <a:r>
+              <a:t>   8-item screening | 10 substance categories | Risk levels: Low (0-3), Moderate (4-26), High (27+)</a:t>
+            </a:r>
+          </a:p>
+          <a:p>
+            <a:pPr>
+              <a:spcBef>
+                <a:spcPts val="600"/>
+              </a:spcBef>
+              <a:defRPr sz="1300">
+                <a:solidFill>
+                  <a:srgbClr val="2D2D44"/>
+                </a:solidFill>
+              </a:defRPr>
+            </a:pPr>
+            <a:r>
+              <a:t>   Reliability: Test-retest r = 0.58-0.90; a = 0.77-0.94</a:t>
+            </a:r>
+          </a:p>
+          <a:p>
+            <a:pPr>
+              <a:spcBef>
+                <a:spcPts val="600"/>
+              </a:spcBef>
+              <a:defRPr sz="1300">
+                <a:solidFill>
+                  <a:srgbClr val="2D2D44"/>
+                </a:solidFill>
+              </a:defRPr>
+            </a:pPr>
+            <a:r>
+              <a:t>   Validity: Sensitivity 0.80, Specificity 0.71 for substance dependence</a:t>
+            </a:r>
+          </a:p>
+          <a:p>
+            <a:pPr>
+              <a:spcBef>
+                <a:spcPts val="600"/>
+              </a:spcBef>
+              <a:defRPr sz="1300">
+                <a:solidFill>
+                  <a:srgbClr val="2D2D44"/>
+                </a:solidFill>
+              </a:defRPr>
+            </a:pPr>
+            <a:r>
+              <a:t>   Indian: WHO-validated; Hindi version available; used in NDDTC studies; 5-10 min administration</a:t>
+            </a:r>
+          </a:p>
+          <a:p>
+            <a:pPr>
+              <a:spcBef>
+                <a:spcPts val="600"/>
+              </a:spcBef>
+              <a:defRPr sz="1300">
+                <a:solidFill>
+                  <a:srgbClr val="2D2D44"/>
+                </a:solidFill>
+              </a:defRPr>
+            </a:pPr>
+            <a:r>
+              <a:t>   PURPOSE: Used at PRE-TEST ONLY for baseline severity and group equivalence (NOT an outcome measure)</a:t>
+            </a:r>
+          </a:p>
+          <a:p>
+            <a:pPr>
+              <a:spcBef>
+                <a:spcPts val="600"/>
+              </a:spcBef>
+              <a:defRPr sz="1300">
+                <a:solidFill>
+                  <a:srgbClr val="2D2D44"/>
+                </a:solidFill>
+              </a:defRPr>
+            </a:pPr>
+            <a:r>
+              <a:t>   JUSTIFICATION: Multi-substance coverage captures polysubstance patterns; WHO credibility; free to use</a:t>
             </a:r>
           </a:p>
         </p:txBody>
@@ -7116,7 +7171,7 @@
               </a:defRPr>
             </a:pPr>
             <a:r>
-              <a:t>SLIDE 26: Tools - Craving Assessment</a:t>
+              <a:t>Procedure</a:t>
             </a:r>
           </a:p>
         </p:txBody>
@@ -7129,8 +7184,8 @@
         </p:nvSpPr>
         <p:spPr>
           <a:xfrm>
-            <a:off x="640080" y="1188720"/>
-            <a:ext cx="10881360" cy="5394960"/>
+            <a:off x="640080" y="1097280"/>
+            <a:ext cx="10881360" cy="457200"/>
           </a:xfrm>
           <a:prstGeom prst="rect">
             <a:avLst/>
@@ -7138,6 +7193,41 @@
           <a:noFill/>
         </p:spPr>
         <p:txBody>
+          <a:bodyPr wrap="none">
+            <a:spAutoFit/>
+          </a:bodyPr>
+          <a:lstStyle/>
+          <a:p>
+            <a:pPr>
+              <a:defRPr sz="1400" b="1">
+                <a:solidFill>
+                  <a:srgbClr val="2C5F8A"/>
+                </a:solidFill>
+              </a:defRPr>
+            </a:pPr>
+            <a:r>
+              <a:t>Stepwise Research Flow</a:t>
+            </a:r>
+          </a:p>
+        </p:txBody>
+      </p:sp>
+      <p:sp>
+        <p:nvSpPr>
+          <p:cNvPr id="5" name="TextBox 4"/>
+          <p:cNvSpPr txBox="1"/>
+          <p:nvPr/>
+        </p:nvSpPr>
+        <p:spPr>
+          <a:xfrm>
+            <a:off x="640080" y="1554480"/>
+            <a:ext cx="10881360" cy="5029200"/>
+          </a:xfrm>
+          <a:prstGeom prst="rect">
+            <a:avLst/>
+          </a:prstGeom>
+          <a:noFill/>
+        </p:spPr>
+        <p:txBody>
           <a:bodyPr wrap="square">
             <a:spAutoFit/>
           </a:bodyPr>
@@ -7145,133 +7235,121 @@
           <a:p>
             <a:pPr>
               <a:spcBef>
-                <a:spcPts val="800"/>
-              </a:spcBef>
-              <a:defRPr sz="1400">
-                <a:solidFill>
-                  <a:srgbClr val="2D2D44"/>
-                </a:solidFill>
-              </a:defRPr>
-            </a:pPr>
-            <a:r>
-              <a:t>CRAVING SCALE OPTIONS COMPARISON:</a:t>
-            </a:r>
-          </a:p>
-          <a:p>
-            <a:pPr>
-              <a:spcBef>
-                <a:spcPts val="800"/>
-              </a:spcBef>
-              <a:defRPr sz="1400">
-                <a:solidFill>
-                  <a:srgbClr val="2D2D44"/>
-                </a:solidFill>
-              </a:defRPr>
-            </a:pPr>
-            <a:r>
-              <a:t>  Heroin Craving Questionnaire (HCQ): 45-item (brief: 14-item), opioid-specific, multidimensional | HIGHLY SUITABLE</a:t>
-            </a:r>
-          </a:p>
-          <a:p>
-            <a:pPr>
-              <a:spcBef>
-                <a:spcPts val="800"/>
-              </a:spcBef>
-              <a:defRPr sz="1400">
-                <a:solidFill>
-                  <a:srgbClr val="2D2D44"/>
-                </a:solidFill>
-              </a:defRPr>
-            </a:pPr>
-            <a:r>
-              <a:t>  Obsessive Compulsive Drug Use Scale (OCDUS): 12-item, obsessive thoughts + compulsive urges | Moderate (generic)</a:t>
-            </a:r>
-          </a:p>
-          <a:p>
-            <a:pPr>
-              <a:spcBef>
-                <a:spcPts val="800"/>
-              </a:spcBef>
-              <a:defRPr sz="1400">
-                <a:solidFill>
-                  <a:srgbClr val="2D2D44"/>
-                </a:solidFill>
-              </a:defRPr>
-            </a:pPr>
-            <a:r>
-              <a:t>  Visual Analog Scale (VAS): Single-item 0-100mm rating | Limited (unidimensional)</a:t>
-            </a:r>
-          </a:p>
-          <a:p>
-            <a:pPr>
-              <a:spcBef>
-                <a:spcPts val="800"/>
-              </a:spcBef>
-              <a:defRPr sz="1400">
-                <a:solidFill>
-                  <a:srgbClr val="2D2D44"/>
-                </a:solidFill>
-              </a:defRPr>
-            </a:pPr>
-          </a:p>
-          <a:p>
-            <a:pPr>
-              <a:spcBef>
-                <a:spcPts val="800"/>
-              </a:spcBef>
-              <a:defRPr sz="1400">
-                <a:solidFill>
-                  <a:srgbClr val="2D2D44"/>
-                </a:solidFill>
-              </a:defRPr>
-            </a:pPr>
-            <a:r>
-              <a:t>RECOMMENDED: HCQ-Brief (14 items) - Tiffany, Fields, Singleton, et al. (2000)</a:t>
-            </a:r>
-          </a:p>
-          <a:p>
-            <a:pPr>
-              <a:spcBef>
-                <a:spcPts val="800"/>
-              </a:spcBef>
-              <a:defRPr sz="1400">
-                <a:solidFill>
-                  <a:srgbClr val="2D2D44"/>
-                </a:solidFill>
-              </a:defRPr>
-            </a:pPr>
-            <a:r>
-              <a:t>  Assesses: desire to use, intention, anticipation of positive outcome, relief from withdrawal, lack of control</a:t>
-            </a:r>
-          </a:p>
-          <a:p>
-            <a:pPr>
-              <a:spcBef>
-                <a:spcPts val="800"/>
-              </a:spcBef>
-              <a:defRPr sz="1400">
-                <a:solidFill>
-                  <a:srgbClr val="2D2D44"/>
-                </a:solidFill>
-              </a:defRPr>
-            </a:pPr>
-            <a:r>
-              <a:t>  Scoring: 7-point Likert | Reliability: a = 0.87-0.93 | Validity: Convergent with VAS, sensitive to intervention</a:t>
-            </a:r>
-          </a:p>
-          <a:p>
-            <a:pPr>
-              <a:spcBef>
-                <a:spcPts val="800"/>
-              </a:spcBef>
-              <a:defRPr sz="1400">
-                <a:solidFill>
-                  <a:srgbClr val="2D2D44"/>
-                </a:solidFill>
-              </a:defRPr>
-            </a:pPr>
-            <a:r>
-              <a:t>  JUSTIFICATION: Substance-specific measurement preferred for opioid-dependent populations (EMCDDA guidelines)</a:t>
+                <a:spcPts val="600"/>
+              </a:spcBef>
+              <a:defRPr sz="1300">
+                <a:solidFill>
+                  <a:srgbClr val="2D2D44"/>
+                </a:solidFill>
+              </a:defRPr>
+            </a:pPr>
+            <a:r>
+              <a:t>Step 1: SCREENING - Identify eligible patients (ICD-10 diagnosis, detoxified, consent-capable)</a:t>
+            </a:r>
+          </a:p>
+          <a:p>
+            <a:pPr>
+              <a:spcBef>
+                <a:spcPts val="600"/>
+              </a:spcBef>
+              <a:defRPr sz="1300">
+                <a:solidFill>
+                  <a:srgbClr val="2D2D44"/>
+                </a:solidFill>
+              </a:defRPr>
+            </a:pPr>
+            <a:r>
+              <a:t>Step 2: INFORMED CONSENT - Explain purpose, procedures, confidentiality, right to withdraw</a:t>
+            </a:r>
+          </a:p>
+          <a:p>
+            <a:pPr>
+              <a:spcBef>
+                <a:spcPts val="600"/>
+              </a:spcBef>
+              <a:defRPr sz="1300">
+                <a:solidFill>
+                  <a:srgbClr val="2D2D44"/>
+                </a:solidFill>
+              </a:defRPr>
+            </a:pPr>
+            <a:r>
+              <a:t>Step 3: PRE-TEST - Administer ASSIST + HCQ + BIS-11 + FFMQ</a:t>
+            </a:r>
+          </a:p>
+          <a:p>
+            <a:pPr>
+              <a:spcBef>
+                <a:spcPts val="600"/>
+              </a:spcBef>
+              <a:defRPr sz="1300">
+                <a:solidFill>
+                  <a:srgbClr val="2D2D44"/>
+                </a:solidFill>
+              </a:defRPr>
+            </a:pPr>
+            <a:r>
+              <a:t>Step 4: RANDOM ALLOCATION - Computer-generated randomization -&gt; Experimental vs. Control</a:t>
+            </a:r>
+          </a:p>
+          <a:p>
+            <a:pPr>
+              <a:spcBef>
+                <a:spcPts val="600"/>
+              </a:spcBef>
+              <a:defRPr sz="1300">
+                <a:solidFill>
+                  <a:srgbClr val="2D2D44"/>
+                </a:solidFill>
+              </a:defRPr>
+            </a:pPr>
+            <a:r>
+              <a:t>Step 5: INTERVENTION - Experimental: Brief MBRP (8 x 60 min, 4 weeks) | Control: Psychoeducation (8 x 60 min, 4 weeks)</a:t>
+            </a:r>
+          </a:p>
+          <a:p>
+            <a:pPr>
+              <a:spcBef>
+                <a:spcPts val="600"/>
+              </a:spcBef>
+              <a:defRPr sz="1300">
+                <a:solidFill>
+                  <a:srgbClr val="2D2D44"/>
+                </a:solidFill>
+              </a:defRPr>
+            </a:pPr>
+            <a:r>
+              <a:t>Step 6: POST-TEST - Administer HCQ + BIS-11 + FFMQ (within 1 week of completion)</a:t>
+            </a:r>
+          </a:p>
+          <a:p>
+            <a:pPr>
+              <a:spcBef>
+                <a:spcPts val="600"/>
+              </a:spcBef>
+              <a:defRPr sz="1300">
+                <a:solidFill>
+                  <a:srgbClr val="2D2D44"/>
+                </a:solidFill>
+              </a:defRPr>
+            </a:pPr>
+            <a:r>
+              <a:t>Step 7: DATA COMPILATION &amp; ANALYSIS</a:t>
+            </a:r>
+          </a:p>
+          <a:p>
+            <a:pPr>
+              <a:spcBef>
+                <a:spcPts val="600"/>
+              </a:spcBef>
+              <a:defRPr sz="1300">
+                <a:solidFill>
+                  <a:srgbClr val="2D2D44"/>
+                </a:solidFill>
+              </a:defRPr>
+            </a:pPr>
+            <a:r>
+              <a:t>NOTE: Both groups receive TAU throughout | Assessments by blinded RA | Intervention by MPhil Clinical Psychologist</a:t>
             </a:r>
           </a:p>
         </p:txBody>
@@ -7375,7 +7453,7 @@
               </a:defRPr>
             </a:pPr>
             <a:r>
-              <a:t>SLIDE 27: Tools - Severity Assessment (Pre-Test Only)</a:t>
+              <a:t>Intervention Plan: Experimental Group (Brief MBRP + TAU)</a:t>
             </a:r>
           </a:p>
         </p:txBody>
@@ -7404,148 +7482,136 @@
           <a:p>
             <a:pPr>
               <a:spcBef>
-                <a:spcPts val="800"/>
-              </a:spcBef>
-              <a:defRPr sz="1400">
-                <a:solidFill>
-                  <a:srgbClr val="2D2D44"/>
-                </a:solidFill>
-              </a:defRPr>
-            </a:pPr>
-            <a:r>
-              <a:t>SEVERITY SCALE OPTIONS:</a:t>
-            </a:r>
-          </a:p>
-          <a:p>
-            <a:pPr>
-              <a:spcBef>
-                <a:spcPts val="800"/>
-              </a:spcBef>
-              <a:defRPr sz="1400">
-                <a:solidFill>
-                  <a:srgbClr val="2D2D44"/>
-                </a:solidFill>
-              </a:defRPr>
-            </a:pPr>
-            <a:r>
-              <a:t>  ASSIST (WHO): 8-item, risk level for 10 substance categories | BEST CHOICE</a:t>
-            </a:r>
-          </a:p>
-          <a:p>
-            <a:pPr>
-              <a:spcBef>
-                <a:spcPts val="800"/>
-              </a:spcBef>
-              <a:defRPr sz="1400">
-                <a:solidFill>
-                  <a:srgbClr val="2D2D44"/>
-                </a:solidFill>
-              </a:defRPr>
-            </a:pPr>
-            <a:r>
-              <a:t>  DAST-20: 20-item, drug abuse screening (yes/no) | Good but less comprehensive</a:t>
-            </a:r>
-          </a:p>
-          <a:p>
-            <a:pPr>
-              <a:spcBef>
-                <a:spcPts val="800"/>
-              </a:spcBef>
-              <a:defRPr sz="1400">
-                <a:solidFill>
-                  <a:srgbClr val="2D2D44"/>
-                </a:solidFill>
-              </a:defRPr>
-            </a:pPr>
-            <a:r>
-              <a:t>  AUDIT: 10-item, alcohol-specific | Only if alcohol subgroup</a:t>
-            </a:r>
-          </a:p>
-          <a:p>
-            <a:pPr>
-              <a:spcBef>
-                <a:spcPts val="800"/>
-              </a:spcBef>
-              <a:defRPr sz="1400">
-                <a:solidFill>
-                  <a:srgbClr val="2D2D44"/>
-                </a:solidFill>
-              </a:defRPr>
-            </a:pPr>
-          </a:p>
-          <a:p>
-            <a:pPr>
-              <a:spcBef>
-                <a:spcPts val="800"/>
-              </a:spcBef>
-              <a:defRPr sz="1400">
-                <a:solidFill>
-                  <a:srgbClr val="2D2D44"/>
-                </a:solidFill>
-              </a:defRPr>
-            </a:pPr>
-            <a:r>
-              <a:t>RECOMMENDED: ASSIST - WHO ASSIST Working Group (2002); Humeniuk et al.</a:t>
-            </a:r>
-          </a:p>
-          <a:p>
-            <a:pPr>
-              <a:spcBef>
-                <a:spcPts val="800"/>
-              </a:spcBef>
-              <a:defRPr sz="1400">
-                <a:solidFill>
-                  <a:srgbClr val="2D2D44"/>
-                </a:solidFill>
-              </a:defRPr>
-            </a:pPr>
-            <a:r>
-              <a:t>  Scoring: Substance-specific risk: Low (0-3), Moderate (4-26), High (27+)</a:t>
-            </a:r>
-          </a:p>
-          <a:p>
-            <a:pPr>
-              <a:spcBef>
-                <a:spcPts val="800"/>
-              </a:spcBef>
-              <a:defRPr sz="1400">
-                <a:solidFill>
-                  <a:srgbClr val="2D2D44"/>
-                </a:solidFill>
-              </a:defRPr>
-            </a:pPr>
-            <a:r>
-              <a:t>  Reliability: Test-retest r = 0.58-0.90; a = 0.77-0.94 | Validity: Sensitivity 0.80, Specificity 0.71</a:t>
-            </a:r>
-          </a:p>
-          <a:p>
-            <a:pPr>
-              <a:spcBef>
-                <a:spcPts val="800"/>
-              </a:spcBef>
-              <a:defRPr sz="1400">
-                <a:solidFill>
-                  <a:srgbClr val="2D2D44"/>
-                </a:solidFill>
-              </a:defRPr>
-            </a:pPr>
-            <a:r>
-              <a:t>  Indian: WHO-validated; Hindi version available; NDDTC studies; culturally appropriate; 5-10 min</a:t>
-            </a:r>
-          </a:p>
-          <a:p>
-            <a:pPr>
-              <a:spcBef>
-                <a:spcPts val="800"/>
-              </a:spcBef>
-              <a:defRPr sz="1400">
-                <a:solidFill>
-                  <a:srgbClr val="2D2D44"/>
-                </a:solidFill>
-              </a:defRPr>
-            </a:pPr>
-            <a:r>
-              <a:t>  PURPOSE: Used at PRE-TEST ONLY to establish baseline severity and ensure group equivalence</a:t>
+                <a:spcPts val="600"/>
+              </a:spcBef>
+              <a:defRPr sz="1300">
+                <a:solidFill>
+                  <a:srgbClr val="2D2D44"/>
+                </a:solidFill>
+              </a:defRPr>
+            </a:pPr>
+            <a:r>
+              <a:t>8 Sessions x 60 min x 4 weeks (Twice weekly) | Group format (6-8 participants)</a:t>
+            </a:r>
+          </a:p>
+          <a:p>
+            <a:pPr>
+              <a:spcBef>
+                <a:spcPts val="600"/>
+              </a:spcBef>
+              <a:defRPr sz="1300">
+                <a:solidFill>
+                  <a:srgbClr val="2D2D44"/>
+                </a:solidFill>
+              </a:defRPr>
+            </a:pPr>
+            <a:r>
+              <a:t>S1: Introduction to MBRP &amp; Autopilot - Raisin exercise; identifying automatic patterns</a:t>
+            </a:r>
+          </a:p>
+          <a:p>
+            <a:pPr>
+              <a:spcBef>
+                <a:spcPts val="600"/>
+              </a:spcBef>
+              <a:defRPr sz="1300">
+                <a:solidFill>
+                  <a:srgbClr val="2D2D44"/>
+                </a:solidFill>
+              </a:defRPr>
+            </a:pPr>
+            <a:r>
+              <a:t>S2: Awareness of Triggers - Body scan meditation; mapping personal triggers</a:t>
+            </a:r>
+          </a:p>
+          <a:p>
+            <a:pPr>
+              <a:spcBef>
+                <a:spcPts val="600"/>
+              </a:spcBef>
+              <a:defRPr sz="1300">
+                <a:solidFill>
+                  <a:srgbClr val="2D2D44"/>
+                </a:solidFill>
+              </a:defRPr>
+            </a:pPr>
+            <a:r>
+              <a:t>S3: Mindfulness in Daily Life - Sitting meditation (breath); SOBER breathing space</a:t>
+            </a:r>
+          </a:p>
+          <a:p>
+            <a:pPr>
+              <a:spcBef>
+                <a:spcPts val="600"/>
+              </a:spcBef>
+              <a:defRPr sz="1300">
+                <a:solidFill>
+                  <a:srgbClr val="2D2D44"/>
+                </a:solidFill>
+              </a:defRPr>
+            </a:pPr>
+            <a:r>
+              <a:t>S4: Mindfulness in High-Risk Situations - Urge surfing; role-play; cognitive decentering</a:t>
+            </a:r>
+          </a:p>
+          <a:p>
+            <a:pPr>
+              <a:spcBef>
+                <a:spcPts val="600"/>
+              </a:spcBef>
+              <a:defRPr sz="1300">
+                <a:solidFill>
+                  <a:srgbClr val="2D2D44"/>
+                </a:solidFill>
+              </a:defRPr>
+            </a:pPr>
+            <a:r>
+              <a:t>S5: Acceptance &amp; Skillful Action - Non-judgmental awareness; mindful decision-making</a:t>
+            </a:r>
+          </a:p>
+          <a:p>
+            <a:pPr>
+              <a:spcBef>
+                <a:spcPts val="600"/>
+              </a:spcBef>
+              <a:defRPr sz="1300">
+                <a:solidFill>
+                  <a:srgbClr val="2D2D44"/>
+                </a:solidFill>
+              </a:defRPr>
+            </a:pPr>
+            <a:r>
+              <a:t>S6: Seeing Thoughts as Thoughts - 'Thoughts are not facts'; mountain meditation</a:t>
+            </a:r>
+          </a:p>
+          <a:p>
+            <a:pPr>
+              <a:spcBef>
+                <a:spcPts val="600"/>
+              </a:spcBef>
+              <a:defRPr sz="1300">
+                <a:solidFill>
+                  <a:srgbClr val="2D2D44"/>
+                </a:solidFill>
+              </a:defRPr>
+            </a:pPr>
+            <a:r>
+              <a:t>S7: Self-Care &amp; Lifestyle Balance - Loving-kindness; activity scheduling; warning signs</a:t>
+            </a:r>
+          </a:p>
+          <a:p>
+            <a:pPr>
+              <a:spcBef>
+                <a:spcPts val="600"/>
+              </a:spcBef>
+              <a:defRPr sz="1300">
+                <a:solidFill>
+                  <a:srgbClr val="2D2D44"/>
+                </a:solidFill>
+              </a:defRPr>
+            </a:pPr>
+            <a:r>
+              <a:t>S8: Social Support &amp; Maintenance - Review practices; relapse prevention plan; practice commitment</a:t>
             </a:r>
           </a:p>
         </p:txBody>
@@ -7649,7 +7715,7 @@
               </a:defRPr>
             </a:pPr>
             <a:r>
-              <a:t>SLIDE 28: Procedure</a:t>
+              <a:t>Intervention Plan: Control Group (Psychoeducation + TAU)</a:t>
             </a:r>
           </a:p>
         </p:txBody>
@@ -7662,8 +7728,8 @@
         </p:nvSpPr>
         <p:spPr>
           <a:xfrm>
-            <a:off x="640080" y="1097280"/>
-            <a:ext cx="10881360" cy="457200"/>
+            <a:off x="640080" y="1188720"/>
+            <a:ext cx="10881360" cy="5394960"/>
           </a:xfrm>
           <a:prstGeom prst="rect">
             <a:avLst/>
@@ -7671,41 +7737,6 @@
           <a:noFill/>
         </p:spPr>
         <p:txBody>
-          <a:bodyPr wrap="none">
-            <a:spAutoFit/>
-          </a:bodyPr>
-          <a:lstStyle/>
-          <a:p>
-            <a:pPr>
-              <a:defRPr sz="1400" b="1">
-                <a:solidFill>
-                  <a:srgbClr val="2C5F8A"/>
-                </a:solidFill>
-              </a:defRPr>
-            </a:pPr>
-            <a:r>
-              <a:t>Stepwise Research Flow</a:t>
-            </a:r>
-          </a:p>
-        </p:txBody>
-      </p:sp>
-      <p:sp>
-        <p:nvSpPr>
-          <p:cNvPr id="5" name="TextBox 4"/>
-          <p:cNvSpPr txBox="1"/>
-          <p:nvPr/>
-        </p:nvSpPr>
-        <p:spPr>
-          <a:xfrm>
-            <a:off x="640080" y="1554480"/>
-            <a:ext cx="10881360" cy="5029200"/>
-          </a:xfrm>
-          <a:prstGeom prst="rect">
-            <a:avLst/>
-          </a:prstGeom>
-          <a:noFill/>
-        </p:spPr>
-        <p:txBody>
           <a:bodyPr wrap="square">
             <a:spAutoFit/>
           </a:bodyPr>
@@ -7713,133 +7744,151 @@
           <a:p>
             <a:pPr>
               <a:spcBef>
-                <a:spcPts val="800"/>
-              </a:spcBef>
-              <a:defRPr sz="1400">
-                <a:solidFill>
-                  <a:srgbClr val="2D2D44"/>
-                </a:solidFill>
-              </a:defRPr>
-            </a:pPr>
-            <a:r>
-              <a:t>Step 1: SCREENING - Identify eligible patients (ICD-10 diagnosis, detoxified, consent-capable)</a:t>
-            </a:r>
-          </a:p>
-          <a:p>
-            <a:pPr>
-              <a:spcBef>
-                <a:spcPts val="800"/>
-              </a:spcBef>
-              <a:defRPr sz="1400">
-                <a:solidFill>
-                  <a:srgbClr val="2D2D44"/>
-                </a:solidFill>
-              </a:defRPr>
-            </a:pPr>
-            <a:r>
-              <a:t>Step 2: INFORMED CONSENT - Explain study purpose, procedures, confidentiality, right to withdraw</a:t>
-            </a:r>
-          </a:p>
-          <a:p>
-            <a:pPr>
-              <a:spcBef>
-                <a:spcPts val="800"/>
-              </a:spcBef>
-              <a:defRPr sz="1400">
-                <a:solidFill>
-                  <a:srgbClr val="2D2D44"/>
-                </a:solidFill>
-              </a:defRPr>
-            </a:pPr>
-            <a:r>
-              <a:t>Step 3: PRE-TEST ASSESSMENT - Administer: ASSIST + HCQ + BIS-11 + FFMQ</a:t>
-            </a:r>
-          </a:p>
-          <a:p>
-            <a:pPr>
-              <a:spcBef>
-                <a:spcPts val="800"/>
-              </a:spcBef>
-              <a:defRPr sz="1400">
-                <a:solidFill>
-                  <a:srgbClr val="2D2D44"/>
-                </a:solidFill>
-              </a:defRPr>
-            </a:pPr>
-            <a:r>
-              <a:t>Step 4: RANDOM ALLOCATION - Computer-generated randomization -&gt; Experimental vs. Control</a:t>
-            </a:r>
-          </a:p>
-          <a:p>
-            <a:pPr>
-              <a:spcBef>
-                <a:spcPts val="800"/>
-              </a:spcBef>
-              <a:defRPr sz="1400">
-                <a:solidFill>
-                  <a:srgbClr val="2D2D44"/>
-                </a:solidFill>
-              </a:defRPr>
-            </a:pPr>
-            <a:r>
-              <a:t>Step 5: INTERVENTION DELIVERY - Experimental: Brief MBRP (8 sessions x 60 min x 4 weeks) | Control: Psychoeducation (8 sessions x 60 min x 4 weeks)</a:t>
-            </a:r>
-          </a:p>
-          <a:p>
-            <a:pPr>
-              <a:spcBef>
-                <a:spcPts val="800"/>
-              </a:spcBef>
-              <a:defRPr sz="1400">
-                <a:solidFill>
-                  <a:srgbClr val="2D2D44"/>
-                </a:solidFill>
-              </a:defRPr>
-            </a:pPr>
-            <a:r>
-              <a:t>Step 6: POST-TEST ASSESSMENT - Administer: HCQ + BIS-11 + FFMQ (within 1 week of completion)</a:t>
-            </a:r>
-          </a:p>
-          <a:p>
-            <a:pPr>
-              <a:spcBef>
-                <a:spcPts val="800"/>
-              </a:spcBef>
-              <a:defRPr sz="1400">
-                <a:solidFill>
-                  <a:srgbClr val="2D2D44"/>
-                </a:solidFill>
-              </a:defRPr>
-            </a:pPr>
-            <a:r>
-              <a:t>Step 7: DATA COMPILATION &amp; ANALYSIS</a:t>
-            </a:r>
-          </a:p>
-          <a:p>
-            <a:pPr>
-              <a:spcBef>
-                <a:spcPts val="800"/>
-              </a:spcBef>
-              <a:defRPr sz="1400">
-                <a:solidFill>
-                  <a:srgbClr val="2D2D44"/>
-                </a:solidFill>
-              </a:defRPr>
-            </a:pPr>
-          </a:p>
-          <a:p>
-            <a:pPr>
-              <a:spcBef>
-                <a:spcPts val="800"/>
-              </a:spcBef>
-              <a:defRPr sz="1400">
-                <a:solidFill>
-                  <a:srgbClr val="2D2D44"/>
-                </a:solidFill>
-              </a:defRPr>
-            </a:pPr>
-            <a:r>
-              <a:t>Both groups receive TAU throughout | Assessments by blinded research assistant | Intervention by trained MPhil Clinical Psychologist</a:t>
+                <a:spcPts val="600"/>
+              </a:spcBef>
+              <a:defRPr sz="1300">
+                <a:solidFill>
+                  <a:srgbClr val="2D2D44"/>
+                </a:solidFill>
+              </a:defRPr>
+            </a:pPr>
+            <a:r>
+              <a:t>8 Sessions x 60 min x 4 weeks (Twice weekly) | Group format (6-8 participants)</a:t>
+            </a:r>
+          </a:p>
+          <a:p>
+            <a:pPr>
+              <a:spcBef>
+                <a:spcPts val="600"/>
+              </a:spcBef>
+              <a:defRPr sz="1300">
+                <a:solidFill>
+                  <a:srgbClr val="2D2D44"/>
+                </a:solidFill>
+              </a:defRPr>
+            </a:pPr>
+            <a:r>
+              <a:t>S1: Understanding Addiction - Nature of dependence; brain changes; disease model</a:t>
+            </a:r>
+          </a:p>
+          <a:p>
+            <a:pPr>
+              <a:spcBef>
+                <a:spcPts val="600"/>
+              </a:spcBef>
+              <a:defRPr sz="1300">
+                <a:solidFill>
+                  <a:srgbClr val="2D2D44"/>
+                </a:solidFill>
+              </a:defRPr>
+            </a:pPr>
+            <a:r>
+              <a:t>S2: Effects of Opioids - Short/long-term physical and psychological consequences</a:t>
+            </a:r>
+          </a:p>
+          <a:p>
+            <a:pPr>
+              <a:spcBef>
+                <a:spcPts val="600"/>
+              </a:spcBef>
+              <a:defRPr sz="1300">
+                <a:solidFill>
+                  <a:srgbClr val="2D2D44"/>
+                </a:solidFill>
+              </a:defRPr>
+            </a:pPr>
+            <a:r>
+              <a:t>S3: Understanding Relapse - Relapse process; warning signs; high-risk situations</a:t>
+            </a:r>
+          </a:p>
+          <a:p>
+            <a:pPr>
+              <a:spcBef>
+                <a:spcPts val="600"/>
+              </a:spcBef>
+              <a:defRPr sz="1300">
+                <a:solidFill>
+                  <a:srgbClr val="2D2D44"/>
+                </a:solidFill>
+              </a:defRPr>
+            </a:pPr>
+            <a:r>
+              <a:t>S4: Coping with Cravings - General strategies (distraction, social support); NO mindfulness</a:t>
+            </a:r>
+          </a:p>
+          <a:p>
+            <a:pPr>
+              <a:spcBef>
+                <a:spcPts val="600"/>
+              </a:spcBef>
+              <a:defRPr sz="1300">
+                <a:solidFill>
+                  <a:srgbClr val="2D2D44"/>
+                </a:solidFill>
+              </a:defRPr>
+            </a:pPr>
+            <a:r>
+              <a:t>S5: Health &amp; Nutrition - Physical recovery; nutrition; sleep hygiene</a:t>
+            </a:r>
+          </a:p>
+          <a:p>
+            <a:pPr>
+              <a:spcBef>
+                <a:spcPts val="600"/>
+              </a:spcBef>
+              <a:defRPr sz="1300">
+                <a:solidFill>
+                  <a:srgbClr val="2D2D44"/>
+                </a:solidFill>
+              </a:defRPr>
+            </a:pPr>
+            <a:r>
+              <a:t>S6: Social Consequences - Family impact; legal issues; stigma; rehabilitation</a:t>
+            </a:r>
+          </a:p>
+          <a:p>
+            <a:pPr>
+              <a:spcBef>
+                <a:spcPts val="600"/>
+              </a:spcBef>
+              <a:defRPr sz="1300">
+                <a:solidFill>
+                  <a:srgbClr val="2D2D44"/>
+                </a:solidFill>
+              </a:defRPr>
+            </a:pPr>
+            <a:r>
+              <a:t>S7: Motivation &amp; Goal Setting - Stages of change; personal goals; motivation enhancement</a:t>
+            </a:r>
+          </a:p>
+          <a:p>
+            <a:pPr>
+              <a:spcBef>
+                <a:spcPts val="600"/>
+              </a:spcBef>
+              <a:defRPr sz="1300">
+                <a:solidFill>
+                  <a:srgbClr val="2D2D44"/>
+                </a:solidFill>
+              </a:defRPr>
+            </a:pPr>
+            <a:r>
+              <a:t>S8: Lifestyle Changes &amp; Summary - Long-term planning; support systems; review</a:t>
+            </a:r>
+          </a:p>
+          <a:p>
+            <a:pPr>
+              <a:spcBef>
+                <a:spcPts val="600"/>
+              </a:spcBef>
+              <a:defRPr sz="1300">
+                <a:solidFill>
+                  <a:srgbClr val="2D2D44"/>
+                </a:solidFill>
+              </a:defRPr>
+            </a:pPr>
+            <a:r>
+              <a:t>NOTE: Matched for contact time, format, and attention to control non-specific factors</a:t>
             </a:r>
           </a:p>
         </p:txBody>
@@ -7943,7 +7992,7 @@
               </a:defRPr>
             </a:pPr>
             <a:r>
-              <a:t>SLIDE 29: Intervention Plan - Experimental Group</a:t>
+              <a:t>Data Analysis</a:t>
             </a:r>
           </a:p>
         </p:txBody>
@@ -7956,8 +8005,8 @@
         </p:nvSpPr>
         <p:spPr>
           <a:xfrm>
-            <a:off x="640080" y="1097280"/>
-            <a:ext cx="10881360" cy="457200"/>
+            <a:off x="640080" y="1188720"/>
+            <a:ext cx="10881360" cy="5394960"/>
           </a:xfrm>
           <a:prstGeom prst="rect">
             <a:avLst/>
@@ -7965,41 +8014,6 @@
           <a:noFill/>
         </p:spPr>
         <p:txBody>
-          <a:bodyPr wrap="none">
-            <a:spAutoFit/>
-          </a:bodyPr>
-          <a:lstStyle/>
-          <a:p>
-            <a:pPr>
-              <a:defRPr sz="1400" b="1">
-                <a:solidFill>
-                  <a:srgbClr val="2C5F8A"/>
-                </a:solidFill>
-              </a:defRPr>
-            </a:pPr>
-            <a:r>
-              <a:t>Brief MBRP (8 Sessions) + TAU</a:t>
-            </a:r>
-          </a:p>
-        </p:txBody>
-      </p:sp>
-      <p:sp>
-        <p:nvSpPr>
-          <p:cNvPr id="5" name="TextBox 4"/>
-          <p:cNvSpPr txBox="1"/>
-          <p:nvPr/>
-        </p:nvSpPr>
-        <p:spPr>
-          <a:xfrm>
-            <a:off x="640080" y="1554480"/>
-            <a:ext cx="10881360" cy="5029200"/>
-          </a:xfrm>
-          <a:prstGeom prst="rect">
-            <a:avLst/>
-          </a:prstGeom>
-          <a:noFill/>
-        </p:spPr>
-        <p:txBody>
           <a:bodyPr wrap="square">
             <a:spAutoFit/>
           </a:bodyPr>
@@ -8007,136 +8021,121 @@
           <a:p>
             <a:pPr>
               <a:spcBef>
-                <a:spcPts val="800"/>
-              </a:spcBef>
-              <a:defRPr sz="1400">
-                <a:solidFill>
-                  <a:srgbClr val="2D2D44"/>
-                </a:solidFill>
-              </a:defRPr>
-            </a:pPr>
-            <a:r>
-              <a:t>BRIEF MBRP PROTOCOL: 8 Sessions x 60 min x 4 weeks (Twice weekly)</a:t>
-            </a:r>
-          </a:p>
-          <a:p>
-            <a:pPr>
-              <a:spcBef>
-                <a:spcPts val="800"/>
-              </a:spcBef>
-              <a:defRPr sz="1400">
-                <a:solidFill>
-                  <a:srgbClr val="2D2D44"/>
-                </a:solidFill>
-              </a:defRPr>
-            </a:pPr>
-            <a:r>
-              <a:t>Session 1: Introduction to MBRP &amp; Autopilot - Raisin exercise; identifying automatic patterns</a:t>
-            </a:r>
-          </a:p>
-          <a:p>
-            <a:pPr>
-              <a:spcBef>
-                <a:spcPts val="800"/>
-              </a:spcBef>
-              <a:defRPr sz="1400">
-                <a:solidFill>
-                  <a:srgbClr val="2D2D44"/>
-                </a:solidFill>
-              </a:defRPr>
-            </a:pPr>
-            <a:r>
-              <a:t>Session 2: Awareness of Triggers - Body scan meditation; mapping personal triggers</a:t>
-            </a:r>
-          </a:p>
-          <a:p>
-            <a:pPr>
-              <a:spcBef>
-                <a:spcPts val="800"/>
-              </a:spcBef>
-              <a:defRPr sz="1400">
-                <a:solidFill>
-                  <a:srgbClr val="2D2D44"/>
-                </a:solidFill>
-              </a:defRPr>
-            </a:pPr>
-            <a:r>
-              <a:t>Session 3: Mindfulness in Daily Life - Sitting meditation (breath); SOBER breathing space</a:t>
-            </a:r>
-          </a:p>
-          <a:p>
-            <a:pPr>
-              <a:spcBef>
-                <a:spcPts val="800"/>
-              </a:spcBef>
-              <a:defRPr sz="1400">
-                <a:solidFill>
-                  <a:srgbClr val="2D2D44"/>
-                </a:solidFill>
-              </a:defRPr>
-            </a:pPr>
-            <a:r>
-              <a:t>Session 4: Mindfulness in High-Risk Situations - Urge surfing; role-play; cognitive decentering</a:t>
-            </a:r>
-          </a:p>
-          <a:p>
-            <a:pPr>
-              <a:spcBef>
-                <a:spcPts val="800"/>
-              </a:spcBef>
-              <a:defRPr sz="1400">
-                <a:solidFill>
-                  <a:srgbClr val="2D2D44"/>
-                </a:solidFill>
-              </a:defRPr>
-            </a:pPr>
-            <a:r>
-              <a:t>Session 5: Acceptance &amp; Skillful Action - Non-judgmental awareness; mindful decision-making</a:t>
-            </a:r>
-          </a:p>
-          <a:p>
-            <a:pPr>
-              <a:spcBef>
-                <a:spcPts val="800"/>
-              </a:spcBef>
-              <a:defRPr sz="1400">
-                <a:solidFill>
-                  <a:srgbClr val="2D2D44"/>
-                </a:solidFill>
-              </a:defRPr>
-            </a:pPr>
-            <a:r>
-              <a:t>Session 6: Seeing Thoughts as Thoughts - 'Thoughts are not facts'; mountain meditation</a:t>
-            </a:r>
-          </a:p>
-          <a:p>
-            <a:pPr>
-              <a:spcBef>
-                <a:spcPts val="800"/>
-              </a:spcBef>
-              <a:defRPr sz="1400">
-                <a:solidFill>
-                  <a:srgbClr val="2D2D44"/>
-                </a:solidFill>
-              </a:defRPr>
-            </a:pPr>
-            <a:r>
-              <a:t>Session 7: Self-Care &amp; Lifestyle Balance - Loving-kindness; activity scheduling; warning signs</a:t>
-            </a:r>
-          </a:p>
-          <a:p>
-            <a:pPr>
-              <a:spcBef>
-                <a:spcPts val="800"/>
-              </a:spcBef>
-              <a:defRPr sz="1400">
-                <a:solidFill>
-                  <a:srgbClr val="2D2D44"/>
-                </a:solidFill>
-              </a:defRPr>
-            </a:pPr>
-            <a:r>
-              <a:t>Session 8: Social Support &amp; Maintenance - Review; relapse prevention plan; practice commitment</a:t>
+                <a:spcPts val="600"/>
+              </a:spcBef>
+              <a:defRPr sz="1300">
+                <a:solidFill>
+                  <a:srgbClr val="2D2D44"/>
+                </a:solidFill>
+              </a:defRPr>
+            </a:pPr>
+            <a:r>
+              <a:t>Descriptive Statistics: Mean, SD, frequency, percentages for sociodemographic and clinical variables</a:t>
+            </a:r>
+          </a:p>
+          <a:p>
+            <a:pPr>
+              <a:spcBef>
+                <a:spcPts val="600"/>
+              </a:spcBef>
+              <a:defRPr sz="1300">
+                <a:solidFill>
+                  <a:srgbClr val="2D2D44"/>
+                </a:solidFill>
+              </a:defRPr>
+            </a:pPr>
+            <a:r>
+              <a:t>Normality Testing: Shapiro-Wilk test for distribution of outcome variables</a:t>
+            </a:r>
+          </a:p>
+          <a:p>
+            <a:pPr>
+              <a:spcBef>
+                <a:spcPts val="600"/>
+              </a:spcBef>
+              <a:defRPr sz="1300">
+                <a:solidFill>
+                  <a:srgbClr val="2D2D44"/>
+                </a:solidFill>
+              </a:defRPr>
+            </a:pPr>
+            <a:r>
+              <a:t>Within-Group: Paired samples t-test (pre vs. post); Wilcoxon Signed-Rank for non-normal data</a:t>
+            </a:r>
+          </a:p>
+          <a:p>
+            <a:pPr>
+              <a:spcBef>
+                <a:spcPts val="600"/>
+              </a:spcBef>
+              <a:defRPr sz="1300">
+                <a:solidFill>
+                  <a:srgbClr val="2D2D44"/>
+                </a:solidFill>
+              </a:defRPr>
+            </a:pPr>
+            <a:r>
+              <a:t>Between-Group: Independent samples t-test (post-test); Mann-Whitney U for non-normal data</a:t>
+            </a:r>
+          </a:p>
+          <a:p>
+            <a:pPr>
+              <a:spcBef>
+                <a:spcPts val="600"/>
+              </a:spcBef>
+              <a:defRPr sz="1300">
+                <a:solidFill>
+                  <a:srgbClr val="2D2D44"/>
+                </a:solidFill>
+              </a:defRPr>
+            </a:pPr>
+            <a:r>
+              <a:t>PRIMARY: ANCOVA with post-test as DV, Group as IV, pre-test as covariate (controls baseline, increases power)</a:t>
+            </a:r>
+          </a:p>
+          <a:p>
+            <a:pPr>
+              <a:spcBef>
+                <a:spcPts val="600"/>
+              </a:spcBef>
+              <a:defRPr sz="1300">
+                <a:solidFill>
+                  <a:srgbClr val="2D2D44"/>
+                </a:solidFill>
+              </a:defRPr>
+            </a:pPr>
+            <a:r>
+              <a:t>Effect Size: Cohen's d for between-group differences</a:t>
+            </a:r>
+          </a:p>
+          <a:p>
+            <a:pPr>
+              <a:spcBef>
+                <a:spcPts val="600"/>
+              </a:spcBef>
+              <a:defRPr sz="1300">
+                <a:solidFill>
+                  <a:srgbClr val="2D2D44"/>
+                </a:solidFill>
+              </a:defRPr>
+            </a:pPr>
+            <a:r>
+              <a:t>Significance Level: alpha = 0.05 (two-tailed) | Software: SPSS 26.0 / JASP</a:t>
+            </a:r>
+          </a:p>
+          <a:p>
+            <a:pPr>
+              <a:spcBef>
+                <a:spcPts val="600"/>
+              </a:spcBef>
+              <a:defRPr sz="1300">
+                <a:solidFill>
+                  <a:srgbClr val="2D2D44"/>
+                </a:solidFill>
+              </a:defRPr>
+            </a:pPr>
+            <a:r>
+              <a:t>ITT Analysis: Last Observation Carried Forward (LOCF) for dropouts</a:t>
             </a:r>
           </a:p>
         </p:txBody>
@@ -8240,7 +8239,7 @@
               </a:defRPr>
             </a:pPr>
             <a:r>
-              <a:t>SLIDE 3: Introduction &amp; Background (2/3)</a:t>
+              <a:t>Introduction &amp; Background (2/3)</a:t>
             </a:r>
           </a:p>
         </p:txBody>
@@ -8304,9 +8303,9 @@
           <a:p>
             <a:pPr>
               <a:spcBef>
-                <a:spcPts val="800"/>
-              </a:spcBef>
-              <a:defRPr sz="1400">
+                <a:spcPts val="600"/>
+              </a:spcBef>
+              <a:defRPr sz="1300">
                 <a:solidFill>
                   <a:srgbClr val="2D2D44"/>
                 </a:solidFill>
@@ -8319,9 +8318,9 @@
           <a:p>
             <a:pPr>
               <a:spcBef>
-                <a:spcPts val="800"/>
-              </a:spcBef>
-              <a:defRPr sz="1400">
+                <a:spcPts val="600"/>
+              </a:spcBef>
+              <a:defRPr sz="1300">
                 <a:solidFill>
                   <a:srgbClr val="2D2D44"/>
                 </a:solidFill>
@@ -8334,9 +8333,9 @@
           <a:p>
             <a:pPr>
               <a:spcBef>
-                <a:spcPts val="800"/>
-              </a:spcBef>
-              <a:defRPr sz="1400">
+                <a:spcPts val="600"/>
+              </a:spcBef>
+              <a:defRPr sz="1300">
                 <a:solidFill>
                   <a:srgbClr val="2D2D44"/>
                 </a:solidFill>
@@ -8349,9 +8348,9 @@
           <a:p>
             <a:pPr>
               <a:spcBef>
-                <a:spcPts val="800"/>
-              </a:spcBef>
-              <a:defRPr sz="1400">
+                <a:spcPts val="600"/>
+              </a:spcBef>
+              <a:defRPr sz="1300">
                 <a:solidFill>
                   <a:srgbClr val="2D2D44"/>
                 </a:solidFill>
@@ -8364,24 +8363,24 @@
           <a:p>
             <a:pPr>
               <a:spcBef>
-                <a:spcPts val="800"/>
-              </a:spcBef>
-              <a:defRPr sz="1400">
-                <a:solidFill>
-                  <a:srgbClr val="2D2D44"/>
-                </a:solidFill>
-              </a:defRPr>
-            </a:pPr>
-            <a:r>
-              <a:t>Automatic cognitive-behavioral patterns (e.g., 'apparently irrelevant decisions') perpetuate relapse cycles</a:t>
-            </a:r>
-          </a:p>
-          <a:p>
-            <a:pPr>
-              <a:spcBef>
-                <a:spcPts val="800"/>
-              </a:spcBef>
-              <a:defRPr sz="1400">
+                <a:spcPts val="600"/>
+              </a:spcBef>
+              <a:defRPr sz="1300">
+                <a:solidFill>
+                  <a:srgbClr val="2D2D44"/>
+                </a:solidFill>
+              </a:defRPr>
+            </a:pPr>
+            <a:r>
+              <a:t>Automatic cognitive-behavioral patterns perpetuate relapse cycles</a:t>
+            </a:r>
+          </a:p>
+          <a:p>
+            <a:pPr>
+              <a:spcBef>
+                <a:spcPts val="600"/>
+              </a:spcBef>
+              <a:defRPr sz="1300">
                 <a:solidFill>
                   <a:srgbClr val="2D2D44"/>
                 </a:solidFill>
@@ -8394,9 +8393,9 @@
           <a:p>
             <a:pPr>
               <a:spcBef>
-                <a:spcPts val="800"/>
-              </a:spcBef>
-              <a:defRPr sz="1400">
+                <a:spcPts val="600"/>
+              </a:spcBef>
+              <a:defRPr sz="1300">
                 <a:solidFill>
                   <a:srgbClr val="2D2D44"/>
                 </a:solidFill>
@@ -8507,7 +8506,7 @@
               </a:defRPr>
             </a:pPr>
             <a:r>
-              <a:t>SLIDE 30: Intervention Plan - Control Group</a:t>
+              <a:t>Ethical Considerations</a:t>
             </a:r>
           </a:p>
         </p:txBody>
@@ -8520,8 +8519,8 @@
         </p:nvSpPr>
         <p:spPr>
           <a:xfrm>
-            <a:off x="640080" y="1097280"/>
-            <a:ext cx="10881360" cy="457200"/>
+            <a:off x="640080" y="1188720"/>
+            <a:ext cx="10881360" cy="5394960"/>
           </a:xfrm>
           <a:prstGeom prst="rect">
             <a:avLst/>
@@ -8529,41 +8528,6 @@
           <a:noFill/>
         </p:spPr>
         <p:txBody>
-          <a:bodyPr wrap="none">
-            <a:spAutoFit/>
-          </a:bodyPr>
-          <a:lstStyle/>
-          <a:p>
-            <a:pPr>
-              <a:defRPr sz="1400" b="1">
-                <a:solidFill>
-                  <a:srgbClr val="2C5F8A"/>
-                </a:solidFill>
-              </a:defRPr>
-            </a:pPr>
-            <a:r>
-              <a:t>Psychoeducation (8 Sessions) + TAU</a:t>
-            </a:r>
-          </a:p>
-        </p:txBody>
-      </p:sp>
-      <p:sp>
-        <p:nvSpPr>
-          <p:cNvPr id="5" name="TextBox 4"/>
-          <p:cNvSpPr txBox="1"/>
-          <p:nvPr/>
-        </p:nvSpPr>
-        <p:spPr>
-          <a:xfrm>
-            <a:off x="640080" y="1554480"/>
-            <a:ext cx="10881360" cy="5029200"/>
-          </a:xfrm>
-          <a:prstGeom prst="rect">
-            <a:avLst/>
-          </a:prstGeom>
-          <a:noFill/>
-        </p:spPr>
-        <p:txBody>
           <a:bodyPr wrap="square">
             <a:spAutoFit/>
           </a:bodyPr>
@@ -8571,151 +8535,106 @@
           <a:p>
             <a:pPr>
               <a:spcBef>
-                <a:spcPts val="800"/>
-              </a:spcBef>
-              <a:defRPr sz="1400">
-                <a:solidFill>
-                  <a:srgbClr val="2D2D44"/>
-                </a:solidFill>
-              </a:defRPr>
-            </a:pPr>
-            <a:r>
-              <a:t>PSYCHOEDUCATION PROTOCOL: 8 Sessions x 60 min x 4 weeks (Twice weekly)</a:t>
-            </a:r>
-          </a:p>
-          <a:p>
-            <a:pPr>
-              <a:spcBef>
-                <a:spcPts val="800"/>
-              </a:spcBef>
-              <a:defRPr sz="1400">
-                <a:solidFill>
-                  <a:srgbClr val="2D2D44"/>
-                </a:solidFill>
-              </a:defRPr>
-            </a:pPr>
-            <a:r>
-              <a:t>Session 1: Understanding Addiction - Nature of dependence; brain changes; disease model</a:t>
-            </a:r>
-          </a:p>
-          <a:p>
-            <a:pPr>
-              <a:spcBef>
-                <a:spcPts val="800"/>
-              </a:spcBef>
-              <a:defRPr sz="1400">
-                <a:solidFill>
-                  <a:srgbClr val="2D2D44"/>
-                </a:solidFill>
-              </a:defRPr>
-            </a:pPr>
-            <a:r>
-              <a:t>Session 2: Effects of Opioids - Short/long-term physical and psychological consequences</a:t>
-            </a:r>
-          </a:p>
-          <a:p>
-            <a:pPr>
-              <a:spcBef>
-                <a:spcPts val="800"/>
-              </a:spcBef>
-              <a:defRPr sz="1400">
-                <a:solidFill>
-                  <a:srgbClr val="2D2D44"/>
-                </a:solidFill>
-              </a:defRPr>
-            </a:pPr>
-            <a:r>
-              <a:t>Session 3: Understanding Relapse - Relapse process; warning signs; high-risk situations</a:t>
-            </a:r>
-          </a:p>
-          <a:p>
-            <a:pPr>
-              <a:spcBef>
-                <a:spcPts val="800"/>
-              </a:spcBef>
-              <a:defRPr sz="1400">
-                <a:solidFill>
-                  <a:srgbClr val="2D2D44"/>
-                </a:solidFill>
-              </a:defRPr>
-            </a:pPr>
-            <a:r>
-              <a:t>Session 4: Coping with Cravings - General strategies (distraction, social support); NO mindfulness</a:t>
-            </a:r>
-          </a:p>
-          <a:p>
-            <a:pPr>
-              <a:spcBef>
-                <a:spcPts val="800"/>
-              </a:spcBef>
-              <a:defRPr sz="1400">
-                <a:solidFill>
-                  <a:srgbClr val="2D2D44"/>
-                </a:solidFill>
-              </a:defRPr>
-            </a:pPr>
-            <a:r>
-              <a:t>Session 5: Health &amp; Nutrition - Physical recovery; nutrition; sleep hygiene</a:t>
-            </a:r>
-          </a:p>
-          <a:p>
-            <a:pPr>
-              <a:spcBef>
-                <a:spcPts val="800"/>
-              </a:spcBef>
-              <a:defRPr sz="1400">
-                <a:solidFill>
-                  <a:srgbClr val="2D2D44"/>
-                </a:solidFill>
-              </a:defRPr>
-            </a:pPr>
-            <a:r>
-              <a:t>Session 6: Social Consequences - Family impact; legal issues; stigma; rehabilitation</a:t>
-            </a:r>
-          </a:p>
-          <a:p>
-            <a:pPr>
-              <a:spcBef>
-                <a:spcPts val="800"/>
-              </a:spcBef>
-              <a:defRPr sz="1400">
-                <a:solidFill>
-                  <a:srgbClr val="2D2D44"/>
-                </a:solidFill>
-              </a:defRPr>
-            </a:pPr>
-            <a:r>
-              <a:t>Session 7: Motivation &amp; Goal Setting - Stages of change; personal goals; motivation enhancement</a:t>
-            </a:r>
-          </a:p>
-          <a:p>
-            <a:pPr>
-              <a:spcBef>
-                <a:spcPts val="800"/>
-              </a:spcBef>
-              <a:defRPr sz="1400">
-                <a:solidFill>
-                  <a:srgbClr val="2D2D44"/>
-                </a:solidFill>
-              </a:defRPr>
-            </a:pPr>
-            <a:r>
-              <a:t>Session 8: Lifestyle Changes &amp; Summary - Long-term planning; support systems; review</a:t>
-            </a:r>
-          </a:p>
-          <a:p>
-            <a:pPr>
-              <a:spcBef>
-                <a:spcPts val="800"/>
-              </a:spcBef>
-              <a:defRPr sz="1400">
-                <a:solidFill>
-                  <a:srgbClr val="2D2D44"/>
-                </a:solidFill>
-              </a:defRPr>
-            </a:pPr>
-            <a:r>
-              <a:t>NOTE: Matched for contact time, group format, therapist attention to control non-specific factors</a:t>
+                <a:spcPts val="600"/>
+              </a:spcBef>
+              <a:defRPr sz="1300">
+                <a:solidFill>
+                  <a:srgbClr val="2D2D44"/>
+                </a:solidFill>
+              </a:defRPr>
+            </a:pPr>
+            <a:r>
+              <a:t>Informed Consent: Written consent in Hindi/regional language; participants informed of purpose, procedures, risks, benefits</a:t>
+            </a:r>
+          </a:p>
+          <a:p>
+            <a:pPr>
+              <a:spcBef>
+                <a:spcPts val="600"/>
+              </a:spcBef>
+              <a:defRPr sz="1300">
+                <a:solidFill>
+                  <a:srgbClr val="2D2D44"/>
+                </a:solidFill>
+              </a:defRPr>
+            </a:pPr>
+            <a:r>
+              <a:t>Voluntary Participation: Right to withdraw at any time without penalty or impact on treatment</a:t>
+            </a:r>
+          </a:p>
+          <a:p>
+            <a:pPr>
+              <a:spcBef>
+                <a:spcPts val="600"/>
+              </a:spcBef>
+              <a:defRPr sz="1300">
+                <a:solidFill>
+                  <a:srgbClr val="2D2D44"/>
+                </a:solidFill>
+              </a:defRPr>
+            </a:pPr>
+            <a:r>
+              <a:t>Confidentiality: Data coded with IDs; no identifying information in publications; secure storage</a:t>
+            </a:r>
+          </a:p>
+          <a:p>
+            <a:pPr>
+              <a:spcBef>
+                <a:spcPts val="600"/>
+              </a:spcBef>
+              <a:defRPr sz="1300">
+                <a:solidFill>
+                  <a:srgbClr val="2D2D44"/>
+                </a:solidFill>
+              </a:defRPr>
+            </a:pPr>
+            <a:r>
+              <a:t>Non-Maleficence: Control receives active psychoeducation (not waitlist); TAU continued for all</a:t>
+            </a:r>
+          </a:p>
+          <a:p>
+            <a:pPr>
+              <a:spcBef>
+                <a:spcPts val="600"/>
+              </a:spcBef>
+              <a:defRPr sz="1300">
+                <a:solidFill>
+                  <a:srgbClr val="2D2D44"/>
+                </a:solidFill>
+              </a:defRPr>
+            </a:pPr>
+            <a:r>
+              <a:t>Institutional Approval: Ethical clearance from Institutional Ethics Committee (IEC) prior to study</a:t>
+            </a:r>
+          </a:p>
+          <a:p>
+            <a:pPr>
+              <a:spcBef>
+                <a:spcPts val="600"/>
+              </a:spcBef>
+              <a:defRPr sz="1300">
+                <a:solidFill>
+                  <a:srgbClr val="2D2D44"/>
+                </a:solidFill>
+              </a:defRPr>
+            </a:pPr>
+            <a:r>
+              <a:t>Debriefing: Control group offered MBRP orientation post-study if desired</a:t>
+            </a:r>
+          </a:p>
+          <a:p>
+            <a:pPr>
+              <a:spcBef>
+                <a:spcPts val="600"/>
+              </a:spcBef>
+              <a:defRPr sz="1300">
+                <a:solidFill>
+                  <a:srgbClr val="2D2D44"/>
+                </a:solidFill>
+              </a:defRPr>
+            </a:pPr>
+            <a:r>
+              <a:t>Compliance: ICMR (2017) National Ethical Guidelines for Biomedical and Health Research</a:t>
             </a:r>
           </a:p>
         </p:txBody>
@@ -8819,7 +8738,7 @@
               </a:defRPr>
             </a:pPr>
             <a:r>
-              <a:t>SLIDE 31: Data Analysis</a:t>
+              <a:t>Expected Results</a:t>
             </a:r>
           </a:p>
         </p:txBody>
@@ -8848,121 +8767,142 @@
           <a:p>
             <a:pPr>
               <a:spcBef>
-                <a:spcPts val="800"/>
-              </a:spcBef>
-              <a:defRPr sz="1400">
-                <a:solidFill>
-                  <a:srgbClr val="2D2D44"/>
-                </a:solidFill>
-              </a:defRPr>
-            </a:pPr>
-            <a:r>
-              <a:t>Descriptive Statistics: Mean, SD, frequency, percentages for sociodemographic and clinical variables</a:t>
-            </a:r>
-          </a:p>
-          <a:p>
-            <a:pPr>
-              <a:spcBef>
-                <a:spcPts val="800"/>
-              </a:spcBef>
-              <a:defRPr sz="1400">
-                <a:solidFill>
-                  <a:srgbClr val="2D2D44"/>
-                </a:solidFill>
-              </a:defRPr>
-            </a:pPr>
-            <a:r>
-              <a:t>Normality Testing: Shapiro-Wilk test for distribution of outcome variables</a:t>
-            </a:r>
-          </a:p>
-          <a:p>
-            <a:pPr>
-              <a:spcBef>
-                <a:spcPts val="800"/>
-              </a:spcBef>
-              <a:defRPr sz="1400">
-                <a:solidFill>
-                  <a:srgbClr val="2D2D44"/>
-                </a:solidFill>
-              </a:defRPr>
-            </a:pPr>
-            <a:r>
-              <a:t>Within-Group: Paired samples t-test (pre vs. post within each group); Wilcoxon for non-normal data</a:t>
-            </a:r>
-          </a:p>
-          <a:p>
-            <a:pPr>
-              <a:spcBef>
-                <a:spcPts val="800"/>
-              </a:spcBef>
-              <a:defRPr sz="1400">
-                <a:solidFill>
-                  <a:srgbClr val="2D2D44"/>
-                </a:solidFill>
-              </a:defRPr>
-            </a:pPr>
-            <a:r>
-              <a:t>Between-Group: Independent samples t-test (post-test between groups); Mann-Whitney U for non-normal</a:t>
-            </a:r>
-          </a:p>
-          <a:p>
-            <a:pPr>
-              <a:spcBef>
-                <a:spcPts val="800"/>
-              </a:spcBef>
-              <a:defRPr sz="1400">
-                <a:solidFill>
-                  <a:srgbClr val="2D2D44"/>
-                </a:solidFill>
-              </a:defRPr>
-            </a:pPr>
-            <a:r>
-              <a:t>PRIMARY ANALYSIS: ANCOVA - Post-test scores as DV, Group as IV, Pre-test scores as covariate (controls baseline differences, increases power)</a:t>
-            </a:r>
-          </a:p>
-          <a:p>
-            <a:pPr>
-              <a:spcBef>
-                <a:spcPts val="800"/>
-              </a:spcBef>
-              <a:defRPr sz="1400">
-                <a:solidFill>
-                  <a:srgbClr val="2D2D44"/>
-                </a:solidFill>
-              </a:defRPr>
-            </a:pPr>
-            <a:r>
-              <a:t>Effect Size: Cohen's d for between-group differences</a:t>
-            </a:r>
-          </a:p>
-          <a:p>
-            <a:pPr>
-              <a:spcBef>
-                <a:spcPts val="800"/>
-              </a:spcBef>
-              <a:defRPr sz="1400">
-                <a:solidFill>
-                  <a:srgbClr val="2D2D44"/>
-                </a:solidFill>
-              </a:defRPr>
-            </a:pPr>
-            <a:r>
-              <a:t>Significance Level: alpha = 0.05 (two-tailed) | Software: SPSS 26.0 / JASP</a:t>
-            </a:r>
-          </a:p>
-          <a:p>
-            <a:pPr>
-              <a:spcBef>
-                <a:spcPts val="800"/>
-              </a:spcBef>
-              <a:defRPr sz="1400">
-                <a:solidFill>
-                  <a:srgbClr val="2D2D44"/>
-                </a:solidFill>
-              </a:defRPr>
-            </a:pPr>
-            <a:r>
-              <a:t>Intent-to-Treat (ITT): Last Observation Carried Forward (LOCF) for dropouts</a:t>
+                <a:spcPts val="600"/>
+              </a:spcBef>
+              <a:defRPr sz="1300">
+                <a:solidFill>
+                  <a:srgbClr val="2D2D44"/>
+                </a:solidFill>
+              </a:defRPr>
+            </a:pPr>
+            <a:r>
+              <a:t>CRAVING (HCQ):</a:t>
+            </a:r>
+          </a:p>
+          <a:p>
+            <a:pPr>
+              <a:spcBef>
+                <a:spcPts val="600"/>
+              </a:spcBef>
+              <a:defRPr sz="1300">
+                <a:solidFill>
+                  <a:srgbClr val="2D2D44"/>
+                </a:solidFill>
+              </a:defRPr>
+            </a:pPr>
+            <a:r>
+              <a:t>  Significant REDUCTION in Experimental group vs. Control | Mechanism: Urge surfing reduces automatic craving reactivity</a:t>
+            </a:r>
+          </a:p>
+          <a:p>
+            <a:pPr>
+              <a:spcBef>
+                <a:spcPts val="600"/>
+              </a:spcBef>
+              <a:defRPr sz="1300">
+                <a:solidFill>
+                  <a:srgbClr val="2D2D44"/>
+                </a:solidFill>
+              </a:defRPr>
+            </a:pPr>
+          </a:p>
+          <a:p>
+            <a:pPr>
+              <a:spcBef>
+                <a:spcPts val="600"/>
+              </a:spcBef>
+              <a:defRPr sz="1300">
+                <a:solidFill>
+                  <a:srgbClr val="2D2D44"/>
+                </a:solidFill>
+              </a:defRPr>
+            </a:pPr>
+            <a:r>
+              <a:t>IMPULSIVITY (BIS-11):</a:t>
+            </a:r>
+          </a:p>
+          <a:p>
+            <a:pPr>
+              <a:spcBef>
+                <a:spcPts val="600"/>
+              </a:spcBef>
+              <a:defRPr sz="1300">
+                <a:solidFill>
+                  <a:srgbClr val="2D2D44"/>
+                </a:solidFill>
+              </a:defRPr>
+            </a:pPr>
+            <a:r>
+              <a:t>  Significant REDUCTION (Motor + Attentional) in Experimental group | Mechanism: Mindfulness enhances prefrontal inhibitory control</a:t>
+            </a:r>
+          </a:p>
+          <a:p>
+            <a:pPr>
+              <a:spcBef>
+                <a:spcPts val="600"/>
+              </a:spcBef>
+              <a:defRPr sz="1300">
+                <a:solidFill>
+                  <a:srgbClr val="2D2D44"/>
+                </a:solidFill>
+              </a:defRPr>
+            </a:pPr>
+          </a:p>
+          <a:p>
+            <a:pPr>
+              <a:spcBef>
+                <a:spcPts val="600"/>
+              </a:spcBef>
+              <a:defRPr sz="1300">
+                <a:solidFill>
+                  <a:srgbClr val="2D2D44"/>
+                </a:solidFill>
+              </a:defRPr>
+            </a:pPr>
+            <a:r>
+              <a:t>MINDFULNESS (FFMQ):</a:t>
+            </a:r>
+          </a:p>
+          <a:p>
+            <a:pPr>
+              <a:spcBef>
+                <a:spcPts val="600"/>
+              </a:spcBef>
+              <a:defRPr sz="1300">
+                <a:solidFill>
+                  <a:srgbClr val="2D2D44"/>
+                </a:solidFill>
+              </a:defRPr>
+            </a:pPr>
+            <a:r>
+              <a:t>  Significant INCREASE (Acting with Awareness + Non-Reactivity) in Experimental group | Mechanism: Structured meditation cultivates mindfulness</a:t>
+            </a:r>
+          </a:p>
+          <a:p>
+            <a:pPr>
+              <a:spcBef>
+                <a:spcPts val="600"/>
+              </a:spcBef>
+              <a:defRPr sz="1300">
+                <a:solidFill>
+                  <a:srgbClr val="2D2D44"/>
+                </a:solidFill>
+              </a:defRPr>
+            </a:pPr>
+          </a:p>
+          <a:p>
+            <a:pPr>
+              <a:spcBef>
+                <a:spcPts val="600"/>
+              </a:spcBef>
+              <a:defRPr sz="1300">
+                <a:solidFill>
+                  <a:srgbClr val="2D2D44"/>
+                </a:solidFill>
+              </a:defRPr>
+            </a:pPr>
+            <a:r>
+              <a:t>Overall: Brief MBRP + TAU expected to demonstrate superior outcomes across all three DVs vs. Psychoeducation + TAU</a:t>
             </a:r>
           </a:p>
         </p:txBody>
@@ -9066,7 +9006,7 @@
               </a:defRPr>
             </a:pPr>
             <a:r>
-              <a:t>SLIDE 32: Ethical Considerations</a:t>
+              <a:t>Clinical Implications</a:t>
             </a:r>
           </a:p>
         </p:txBody>
@@ -9095,106 +9035,106 @@
           <a:p>
             <a:pPr>
               <a:spcBef>
-                <a:spcPts val="800"/>
-              </a:spcBef>
-              <a:defRPr sz="1400">
-                <a:solidFill>
-                  <a:srgbClr val="2D2D44"/>
-                </a:solidFill>
-              </a:defRPr>
-            </a:pPr>
-            <a:r>
-              <a:t>Informed Consent: Written consent in Hindi/regional language; participants informed of purpose, procedures, risks, benefits</a:t>
-            </a:r>
-          </a:p>
-          <a:p>
-            <a:pPr>
-              <a:spcBef>
-                <a:spcPts val="800"/>
-              </a:spcBef>
-              <a:defRPr sz="1400">
-                <a:solidFill>
-                  <a:srgbClr val="2D2D44"/>
-                </a:solidFill>
-              </a:defRPr>
-            </a:pPr>
-            <a:r>
-              <a:t>Voluntary Participation: Right to withdraw at any time without penalty or impact on ongoing treatment</a:t>
-            </a:r>
-          </a:p>
-          <a:p>
-            <a:pPr>
-              <a:spcBef>
-                <a:spcPts val="800"/>
-              </a:spcBef>
-              <a:defRPr sz="1400">
-                <a:solidFill>
-                  <a:srgbClr val="2D2D44"/>
-                </a:solidFill>
-              </a:defRPr>
-            </a:pPr>
-            <a:r>
-              <a:t>Confidentiality: Data coded with participant IDs; no identifying information in publications; secure storage</a:t>
-            </a:r>
-          </a:p>
-          <a:p>
-            <a:pPr>
-              <a:spcBef>
-                <a:spcPts val="800"/>
-              </a:spcBef>
-              <a:defRPr sz="1400">
-                <a:solidFill>
-                  <a:srgbClr val="2D2D44"/>
-                </a:solidFill>
-              </a:defRPr>
-            </a:pPr>
-            <a:r>
-              <a:t>Non-Maleficence: No harmful procedures; control receives active psychoeducation (not waitlist); TAU continued for all</a:t>
-            </a:r>
-          </a:p>
-          <a:p>
-            <a:pPr>
-              <a:spcBef>
-                <a:spcPts val="800"/>
-              </a:spcBef>
-              <a:defRPr sz="1400">
-                <a:solidFill>
-                  <a:srgbClr val="2D2D44"/>
-                </a:solidFill>
-              </a:defRPr>
-            </a:pPr>
-            <a:r>
-              <a:t>Institutional Approval: Ethical clearance from Institutional Ethics Committee (IEC) prior to data collection</a:t>
-            </a:r>
-          </a:p>
-          <a:p>
-            <a:pPr>
-              <a:spcBef>
-                <a:spcPts val="800"/>
-              </a:spcBef>
-              <a:defRPr sz="1400">
-                <a:solidFill>
-                  <a:srgbClr val="2D2D44"/>
-                </a:solidFill>
-              </a:defRPr>
-            </a:pPr>
-            <a:r>
-              <a:t>Debriefing: Control group offered MBRP orientation post-study if desired</a:t>
-            </a:r>
-          </a:p>
-          <a:p>
-            <a:pPr>
-              <a:spcBef>
-                <a:spcPts val="800"/>
-              </a:spcBef>
-              <a:defRPr sz="1400">
-                <a:solidFill>
-                  <a:srgbClr val="2D2D44"/>
-                </a:solidFill>
-              </a:defRPr>
-            </a:pPr>
-            <a:r>
-              <a:t>Compliance: ICMR (2017) National Ethical Guidelines for Biomedical and Health Research</a:t>
+                <a:spcPts val="600"/>
+              </a:spcBef>
+              <a:defRPr sz="1300">
+                <a:solidFill>
+                  <a:srgbClr val="2D2D44"/>
+                </a:solidFill>
+              </a:defRPr>
+            </a:pPr>
+            <a:r>
+              <a:t>Validates a brief, structured MBRP model feasible for Indian de-addiction settings with time-limited admissions</a:t>
+            </a:r>
+          </a:p>
+          <a:p>
+            <a:pPr>
+              <a:spcBef>
+                <a:spcPts val="600"/>
+              </a:spcBef>
+              <a:defRPr sz="1300">
+                <a:solidFill>
+                  <a:srgbClr val="2D2D44"/>
+                </a:solidFill>
+              </a:defRPr>
+            </a:pPr>
+            <a:r>
+              <a:t>Provides evidence-based psychological intervention to complement pharmacotherapy (OST, naltrexone)</a:t>
+            </a:r>
+          </a:p>
+          <a:p>
+            <a:pPr>
+              <a:spcBef>
+                <a:spcPts val="600"/>
+              </a:spcBef>
+              <a:defRPr sz="1300">
+                <a:solidFill>
+                  <a:srgbClr val="2D2D44"/>
+                </a:solidFill>
+              </a:defRPr>
+            </a:pPr>
+            <a:r>
+              <a:t>Demonstrates mindfulness-based approaches are culturally compatible with Indian populations</a:t>
+            </a:r>
+          </a:p>
+          <a:p>
+            <a:pPr>
+              <a:spcBef>
+                <a:spcPts val="600"/>
+              </a:spcBef>
+              <a:defRPr sz="1300">
+                <a:solidFill>
+                  <a:srgbClr val="2D2D44"/>
+                </a:solidFill>
+              </a:defRPr>
+            </a:pPr>
+            <a:r>
+              <a:t>Addresses multiple relapse risk factors simultaneously through single integrated protocol</a:t>
+            </a:r>
+          </a:p>
+          <a:p>
+            <a:pPr>
+              <a:spcBef>
+                <a:spcPts val="600"/>
+              </a:spcBef>
+              <a:defRPr sz="1300">
+                <a:solidFill>
+                  <a:srgbClr val="2D2D44"/>
+                </a:solidFill>
+              </a:defRPr>
+            </a:pPr>
+            <a:r>
+              <a:t>Supports task-shifting: Brief MBRP deliverable by MPhil-trained Clinical Psychologists</a:t>
+            </a:r>
+          </a:p>
+          <a:p>
+            <a:pPr>
+              <a:spcBef>
+                <a:spcPts val="600"/>
+              </a:spcBef>
+              <a:defRPr sz="1300">
+                <a:solidFill>
+                  <a:srgbClr val="2D2D44"/>
+                </a:solidFill>
+              </a:defRPr>
+            </a:pPr>
+            <a:r>
+              <a:t>Informs national treatment policy (NIMHANS, NDDTC, State Mental Health Authorities)</a:t>
+            </a:r>
+          </a:p>
+          <a:p>
+            <a:pPr>
+              <a:spcBef>
+                <a:spcPts val="600"/>
+              </a:spcBef>
+              <a:defRPr sz="1300">
+                <a:solidFill>
+                  <a:srgbClr val="2D2D44"/>
+                </a:solidFill>
+              </a:defRPr>
+            </a:pPr>
+            <a:r>
+              <a:t>Contributes to RCI-recognized intervention repertoire for clinical psychology practice in India</a:t>
             </a:r>
           </a:p>
         </p:txBody>
@@ -9298,7 +9238,7 @@
               </a:defRPr>
             </a:pPr>
             <a:r>
-              <a:t>SLIDE 33: Expected Results</a:t>
+              <a:t>Limitations</a:t>
             </a:r>
           </a:p>
         </p:txBody>
@@ -9327,160 +9267,106 @@
           <a:p>
             <a:pPr>
               <a:spcBef>
-                <a:spcPts val="800"/>
-              </a:spcBef>
-              <a:defRPr sz="1400">
-                <a:solidFill>
-                  <a:srgbClr val="2D2D44"/>
-                </a:solidFill>
-              </a:defRPr>
-            </a:pPr>
-            <a:r>
-              <a:t>CRAVING (HCQ):</a:t>
-            </a:r>
-          </a:p>
-          <a:p>
-            <a:pPr>
-              <a:spcBef>
-                <a:spcPts val="800"/>
-              </a:spcBef>
-              <a:defRPr sz="1400">
-                <a:solidFill>
-                  <a:srgbClr val="2D2D44"/>
-                </a:solidFill>
-              </a:defRPr>
-            </a:pPr>
-            <a:r>
-              <a:t>  Significant REDUCTION in craving scores in Experimental group vs. Control group</a:t>
-            </a:r>
-          </a:p>
-          <a:p>
-            <a:pPr>
-              <a:spcBef>
-                <a:spcPts val="800"/>
-              </a:spcBef>
-              <a:defRPr sz="1400">
-                <a:solidFill>
-                  <a:srgbClr val="2D2D44"/>
-                </a:solidFill>
-              </a:defRPr>
-            </a:pPr>
-            <a:r>
-              <a:t>  Mechanism: Urge surfing and mindfulness exposure reduce automatic craving reactivity</a:t>
-            </a:r>
-          </a:p>
-          <a:p>
-            <a:pPr>
-              <a:spcBef>
-                <a:spcPts val="800"/>
-              </a:spcBef>
-              <a:defRPr sz="1400">
-                <a:solidFill>
-                  <a:srgbClr val="2D2D44"/>
-                </a:solidFill>
-              </a:defRPr>
-            </a:pPr>
-          </a:p>
-          <a:p>
-            <a:pPr>
-              <a:spcBef>
-                <a:spcPts val="800"/>
-              </a:spcBef>
-              <a:defRPr sz="1400">
-                <a:solidFill>
-                  <a:srgbClr val="2D2D44"/>
-                </a:solidFill>
-              </a:defRPr>
-            </a:pPr>
-            <a:r>
-              <a:t>IMPULSIVITY (BIS-11):</a:t>
-            </a:r>
-          </a:p>
-          <a:p>
-            <a:pPr>
-              <a:spcBef>
-                <a:spcPts val="800"/>
-              </a:spcBef>
-              <a:defRPr sz="1400">
-                <a:solidFill>
-                  <a:srgbClr val="2D2D44"/>
-                </a:solidFill>
-              </a:defRPr>
-            </a:pPr>
-            <a:r>
-              <a:t>  Significant REDUCTION in impulsivity (Motor + Attentional subscales) in Experimental group</a:t>
-            </a:r>
-          </a:p>
-          <a:p>
-            <a:pPr>
-              <a:spcBef>
-                <a:spcPts val="800"/>
-              </a:spcBef>
-              <a:defRPr sz="1400">
-                <a:solidFill>
-                  <a:srgbClr val="2D2D44"/>
-                </a:solidFill>
-              </a:defRPr>
-            </a:pPr>
-            <a:r>
-              <a:t>  Mechanism: Mindfulness enhances prefrontal inhibitory control and response awareness</a:t>
-            </a:r>
-          </a:p>
-          <a:p>
-            <a:pPr>
-              <a:spcBef>
-                <a:spcPts val="800"/>
-              </a:spcBef>
-              <a:defRPr sz="1400">
-                <a:solidFill>
-                  <a:srgbClr val="2D2D44"/>
-                </a:solidFill>
-              </a:defRPr>
-            </a:pPr>
-          </a:p>
-          <a:p>
-            <a:pPr>
-              <a:spcBef>
-                <a:spcPts val="800"/>
-              </a:spcBef>
-              <a:defRPr sz="1400">
-                <a:solidFill>
-                  <a:srgbClr val="2D2D44"/>
-                </a:solidFill>
-              </a:defRPr>
-            </a:pPr>
-            <a:r>
-              <a:t>MINDFULNESS (FFMQ):</a:t>
-            </a:r>
-          </a:p>
-          <a:p>
-            <a:pPr>
-              <a:spcBef>
-                <a:spcPts val="800"/>
-              </a:spcBef>
-              <a:defRPr sz="1400">
-                <a:solidFill>
-                  <a:srgbClr val="2D2D44"/>
-                </a:solidFill>
-              </a:defRPr>
-            </a:pPr>
-            <a:r>
-              <a:t>  Significant INCREASE in mindfulness (Acting with Awareness + Non-Reactivity) in Experimental group</a:t>
-            </a:r>
-          </a:p>
-          <a:p>
-            <a:pPr>
-              <a:spcBef>
-                <a:spcPts val="800"/>
-              </a:spcBef>
-              <a:defRPr sz="1400">
-                <a:solidFill>
-                  <a:srgbClr val="2D2D44"/>
-                </a:solidFill>
-              </a:defRPr>
-            </a:pPr>
-            <a:r>
-              <a:t>  Mechanism: Structured meditation practice cultivates dispositional mindfulness</a:t>
+                <a:spcPts val="600"/>
+              </a:spcBef>
+              <a:defRPr sz="1300">
+                <a:solidFill>
+                  <a:srgbClr val="2D2D44"/>
+                </a:solidFill>
+              </a:defRPr>
+            </a:pPr>
+            <a:r>
+              <a:t>Sample specificity: Male opioid-dependent patients from single center; limits generalizability</a:t>
+            </a:r>
+          </a:p>
+          <a:p>
+            <a:pPr>
+              <a:spcBef>
+                <a:spcPts val="600"/>
+              </a:spcBef>
+              <a:defRPr sz="1300">
+                <a:solidFill>
+                  <a:srgbClr val="2D2D44"/>
+                </a:solidFill>
+              </a:defRPr>
+            </a:pPr>
+            <a:r>
+              <a:t>Short-term assessment: Post-test immediately after intervention; no long-term follow-up</a:t>
+            </a:r>
+          </a:p>
+          <a:p>
+            <a:pPr>
+              <a:spcBef>
+                <a:spcPts val="600"/>
+              </a:spcBef>
+              <a:defRPr sz="1300">
+                <a:solidFill>
+                  <a:srgbClr val="2D2D44"/>
+                </a:solidFill>
+              </a:defRPr>
+            </a:pPr>
+            <a:r>
+              <a:t>Self-report measures: HCQ, BIS-11, FFMQ susceptible to social desirability bias</a:t>
+            </a:r>
+          </a:p>
+          <a:p>
+            <a:pPr>
+              <a:spcBef>
+                <a:spcPts val="600"/>
+              </a:spcBef>
+              <a:defRPr sz="1300">
+                <a:solidFill>
+                  <a:srgbClr val="2D2D44"/>
+                </a:solidFill>
+              </a:defRPr>
+            </a:pPr>
+            <a:r>
+              <a:t>No biological markers: Craving measured subjectively; no physiological corroboration</a:t>
+            </a:r>
+          </a:p>
+          <a:p>
+            <a:pPr>
+              <a:spcBef>
+                <a:spcPts val="600"/>
+              </a:spcBef>
+              <a:defRPr sz="1300">
+                <a:solidFill>
+                  <a:srgbClr val="2D2D44"/>
+                </a:solidFill>
+              </a:defRPr>
+            </a:pPr>
+            <a:r>
+              <a:t>Therapist effects: Single therapist delivery may introduce confounds</a:t>
+            </a:r>
+          </a:p>
+          <a:p>
+            <a:pPr>
+              <a:spcBef>
+                <a:spcPts val="600"/>
+              </a:spcBef>
+              <a:defRPr sz="1300">
+                <a:solidFill>
+                  <a:srgbClr val="2D2D44"/>
+                </a:solidFill>
+              </a:defRPr>
+            </a:pPr>
+            <a:r>
+              <a:t>Attention control: Psychoeducation controls for contact but not specific mindfulness mechanisms</a:t>
+            </a:r>
+          </a:p>
+          <a:p>
+            <a:pPr>
+              <a:spcBef>
+                <a:spcPts val="600"/>
+              </a:spcBef>
+              <a:defRPr sz="1300">
+                <a:solidFill>
+                  <a:srgbClr val="2D2D44"/>
+                </a:solidFill>
+              </a:defRPr>
+            </a:pPr>
+            <a:r>
+              <a:t>Attrition: Substance-dependent population may show higher dropout rates</a:t>
             </a:r>
           </a:p>
         </p:txBody>
@@ -9584,7 +9470,7 @@
               </a:defRPr>
             </a:pPr>
             <a:r>
-              <a:t>SLIDE 34: Clinical Implications</a:t>
+              <a:t>Future Directions</a:t>
             </a:r>
           </a:p>
         </p:txBody>
@@ -9613,106 +9499,121 @@
           <a:p>
             <a:pPr>
               <a:spcBef>
-                <a:spcPts val="800"/>
-              </a:spcBef>
-              <a:defRPr sz="1400">
-                <a:solidFill>
-                  <a:srgbClr val="2D2D44"/>
-                </a:solidFill>
-              </a:defRPr>
-            </a:pPr>
-            <a:r>
-              <a:t>Validates a brief, structured MBRP model feasible for Indian de-addiction settings with time-limited admissions</a:t>
-            </a:r>
-          </a:p>
-          <a:p>
-            <a:pPr>
-              <a:spcBef>
-                <a:spcPts val="800"/>
-              </a:spcBef>
-              <a:defRPr sz="1400">
-                <a:solidFill>
-                  <a:srgbClr val="2D2D44"/>
-                </a:solidFill>
-              </a:defRPr>
-            </a:pPr>
-            <a:r>
-              <a:t>Provides evidence-based psychological intervention to complement existing pharmacotherapy (OST, naltrexone)</a:t>
-            </a:r>
-          </a:p>
-          <a:p>
-            <a:pPr>
-              <a:spcBef>
-                <a:spcPts val="800"/>
-              </a:spcBef>
-              <a:defRPr sz="1400">
-                <a:solidFill>
-                  <a:srgbClr val="2D2D44"/>
-                </a:solidFill>
-              </a:defRPr>
-            </a:pPr>
-            <a:r>
-              <a:t>Demonstrates mindfulness-based approaches are culturally compatible with Indian populations (meditative traditions)</a:t>
-            </a:r>
-          </a:p>
-          <a:p>
-            <a:pPr>
-              <a:spcBef>
-                <a:spcPts val="800"/>
-              </a:spcBef>
-              <a:defRPr sz="1400">
-                <a:solidFill>
-                  <a:srgbClr val="2D2D44"/>
-                </a:solidFill>
-              </a:defRPr>
-            </a:pPr>
-            <a:r>
-              <a:t>Addresses multiple relapse risk factors simultaneously (craving + impulsivity + mindfulness) via single protocol</a:t>
-            </a:r>
-          </a:p>
-          <a:p>
-            <a:pPr>
-              <a:spcBef>
-                <a:spcPts val="800"/>
-              </a:spcBef>
-              <a:defRPr sz="1400">
-                <a:solidFill>
-                  <a:srgbClr val="2D2D44"/>
-                </a:solidFill>
-              </a:defRPr>
-            </a:pPr>
-            <a:r>
-              <a:t>Supports task-shifting: Brief MBRP can be delivered by MPhil-trained Clinical Psychologists in resource-limited settings</a:t>
-            </a:r>
-          </a:p>
-          <a:p>
-            <a:pPr>
-              <a:spcBef>
-                <a:spcPts val="800"/>
-              </a:spcBef>
-              <a:defRPr sz="1400">
-                <a:solidFill>
-                  <a:srgbClr val="2D2D44"/>
-                </a:solidFill>
-              </a:defRPr>
-            </a:pPr>
-            <a:r>
-              <a:t>Informs treatment policy at national level (NIMHANS, NDDTC, State Mental Health Authorities)</a:t>
-            </a:r>
-          </a:p>
-          <a:p>
-            <a:pPr>
-              <a:spcBef>
-                <a:spcPts val="800"/>
-              </a:spcBef>
-              <a:defRPr sz="1400">
-                <a:solidFill>
-                  <a:srgbClr val="2D2D44"/>
-                </a:solidFill>
-              </a:defRPr>
-            </a:pPr>
-            <a:r>
-              <a:t>Contributes to RCI-recognized intervention repertoire for clinical psychology training in India</a:t>
+                <a:spcPts val="600"/>
+              </a:spcBef>
+              <a:defRPr sz="1300">
+                <a:solidFill>
+                  <a:srgbClr val="2D2D44"/>
+                </a:solidFill>
+              </a:defRPr>
+            </a:pPr>
+            <a:r>
+              <a:t>Follow-up: 3-month and 6-month assessments for sustained MBRP effects</a:t>
+            </a:r>
+          </a:p>
+          <a:p>
+            <a:pPr>
+              <a:spcBef>
+                <a:spcPts val="600"/>
+              </a:spcBef>
+              <a:defRPr sz="1300">
+                <a:solidFill>
+                  <a:srgbClr val="2D2D44"/>
+                </a:solidFill>
+              </a:defRPr>
+            </a:pPr>
+            <a:r>
+              <a:t>Multi-site RCTs across multiple Indian de-addiction centers for generalizability</a:t>
+            </a:r>
+          </a:p>
+          <a:p>
+            <a:pPr>
+              <a:spcBef>
+                <a:spcPts val="600"/>
+              </a:spcBef>
+              <a:defRPr sz="1300">
+                <a:solidFill>
+                  <a:srgbClr val="2D2D44"/>
+                </a:solidFill>
+              </a:defRPr>
+            </a:pPr>
+            <a:r>
+              <a:t>Include female participants to examine gender-specific effects</a:t>
+            </a:r>
+          </a:p>
+          <a:p>
+            <a:pPr>
+              <a:spcBef>
+                <a:spcPts val="600"/>
+              </a:spcBef>
+              <a:defRPr sz="1300">
+                <a:solidFill>
+                  <a:srgbClr val="2D2D44"/>
+                </a:solidFill>
+              </a:defRPr>
+            </a:pPr>
+            <a:r>
+              <a:t>Neuroimaging (fMRI/EEG) to examine neural mechanisms of MBRP on craving circuits</a:t>
+            </a:r>
+          </a:p>
+          <a:p>
+            <a:pPr>
+              <a:spcBef>
+                <a:spcPts val="600"/>
+              </a:spcBef>
+              <a:defRPr sz="1300">
+                <a:solidFill>
+                  <a:srgbClr val="2D2D44"/>
+                </a:solidFill>
+              </a:defRPr>
+            </a:pPr>
+            <a:r>
+              <a:t>Dose-response: Compare 6 vs. 8 vs. full 8-week MBRP for optimal dosage</a:t>
+            </a:r>
+          </a:p>
+          <a:p>
+            <a:pPr>
+              <a:spcBef>
+                <a:spcPts val="600"/>
+              </a:spcBef>
+              <a:defRPr sz="1300">
+                <a:solidFill>
+                  <a:srgbClr val="2D2D44"/>
+                </a:solidFill>
+              </a:defRPr>
+            </a:pPr>
+            <a:r>
+              <a:t>Mediator analysis: Whether mindfulness mediates craving/impulsivity reduction</a:t>
+            </a:r>
+          </a:p>
+          <a:p>
+            <a:pPr>
+              <a:spcBef>
+                <a:spcPts val="600"/>
+              </a:spcBef>
+              <a:defRPr sz="1300">
+                <a:solidFill>
+                  <a:srgbClr val="2D2D44"/>
+                </a:solidFill>
+              </a:defRPr>
+            </a:pPr>
+            <a:r>
+              <a:t>Technology-assisted: App-based/digital MBRP for post-discharge and rural access</a:t>
+            </a:r>
+          </a:p>
+          <a:p>
+            <a:pPr>
+              <a:spcBef>
+                <a:spcPts val="600"/>
+              </a:spcBef>
+              <a:defRPr sz="1300">
+                <a:solidFill>
+                  <a:srgbClr val="2D2D44"/>
+                </a:solidFill>
+              </a:defRPr>
+            </a:pPr>
+            <a:r>
+              <a:t>Comparative effectiveness: MBRP vs. CBT vs. ACT in Indian samples</a:t>
             </a:r>
           </a:p>
         </p:txBody>
@@ -9816,7 +9717,7 @@
               </a:defRPr>
             </a:pPr>
             <a:r>
-              <a:t>SLIDE 35: Limitations</a:t>
+              <a:t>References (1/4)</a:t>
             </a:r>
           </a:p>
         </p:txBody>
@@ -9845,106 +9746,91 @@
           <a:p>
             <a:pPr>
               <a:spcBef>
-                <a:spcPts val="800"/>
-              </a:spcBef>
-              <a:defRPr sz="1400">
-                <a:solidFill>
-                  <a:srgbClr val="2D2D44"/>
-                </a:solidFill>
-              </a:defRPr>
-            </a:pPr>
-            <a:r>
-              <a:t>Sample specificity: Male opioid-dependent patients from single center; limits generalizability to females, other substances</a:t>
-            </a:r>
-          </a:p>
-          <a:p>
-            <a:pPr>
-              <a:spcBef>
-                <a:spcPts val="800"/>
-              </a:spcBef>
-              <a:defRPr sz="1400">
-                <a:solidFill>
-                  <a:srgbClr val="2D2D44"/>
-                </a:solidFill>
-              </a:defRPr>
-            </a:pPr>
-            <a:r>
-              <a:t>Short-term assessment: Post-test immediately after intervention; no long-term follow-up for maintenance</a:t>
-            </a:r>
-          </a:p>
-          <a:p>
-            <a:pPr>
-              <a:spcBef>
-                <a:spcPts val="800"/>
-              </a:spcBef>
-              <a:defRPr sz="1400">
-                <a:solidFill>
-                  <a:srgbClr val="2D2D44"/>
-                </a:solidFill>
-              </a:defRPr>
-            </a:pPr>
-            <a:r>
-              <a:t>Self-report measures: HCQ, BIS-11, FFMQ susceptible to social desirability and limited insight</a:t>
-            </a:r>
-          </a:p>
-          <a:p>
-            <a:pPr>
-              <a:spcBef>
-                <a:spcPts val="800"/>
-              </a:spcBef>
-              <a:defRPr sz="1400">
-                <a:solidFill>
-                  <a:srgbClr val="2D2D44"/>
-                </a:solidFill>
-              </a:defRPr>
-            </a:pPr>
-            <a:r>
-              <a:t>No biological markers: Craving measured subjectively; no physiological/neuroimaging corroboration</a:t>
-            </a:r>
-          </a:p>
-          <a:p>
-            <a:pPr>
-              <a:spcBef>
-                <a:spcPts val="800"/>
-              </a:spcBef>
-              <a:defRPr sz="1400">
-                <a:solidFill>
-                  <a:srgbClr val="2D2D44"/>
-                </a:solidFill>
-              </a:defRPr>
-            </a:pPr>
-            <a:r>
-              <a:t>Therapist effects: Single therapist delivery may introduce therapist-specific confounds</a:t>
-            </a:r>
-          </a:p>
-          <a:p>
-            <a:pPr>
-              <a:spcBef>
-                <a:spcPts val="800"/>
-              </a:spcBef>
-              <a:defRPr sz="1400">
-                <a:solidFill>
-                  <a:srgbClr val="2D2D44"/>
-                </a:solidFill>
-              </a:defRPr>
-            </a:pPr>
-            <a:r>
-              <a:t>Attention control: Psychoeducation controls for contact but not specific mindfulness mechanisms</a:t>
-            </a:r>
-          </a:p>
-          <a:p>
-            <a:pPr>
-              <a:spcBef>
-                <a:spcPts val="800"/>
-              </a:spcBef>
-              <a:defRPr sz="1400">
-                <a:solidFill>
-                  <a:srgbClr val="2D2D44"/>
-                </a:solidFill>
-              </a:defRPr>
-            </a:pPr>
-            <a:r>
-              <a:t>Attrition: Substance-dependent population may have higher dropout rates despite planning</a:t>
+                <a:spcPts val="600"/>
+              </a:spcBef>
+              <a:defRPr sz="1300">
+                <a:solidFill>
+                  <a:srgbClr val="2D2D44"/>
+                </a:solidFill>
+              </a:defRPr>
+            </a:pPr>
+            <a:r>
+              <a:t>Baer, R. A., Smith, G. T., Hopkins, J., Krietemeyer, J., &amp; Toney, L. (2006). Using self-report assessment methods to explore facets of mindfulness. Assessment, 13(1), 27-45.</a:t>
+            </a:r>
+          </a:p>
+          <a:p>
+            <a:pPr>
+              <a:spcBef>
+                <a:spcPts val="600"/>
+              </a:spcBef>
+              <a:defRPr sz="1300">
+                <a:solidFill>
+                  <a:srgbClr val="2D2D44"/>
+                </a:solidFill>
+              </a:defRPr>
+            </a:pPr>
+            <a:r>
+              <a:t>Bowen, S., Chawla, N., &amp; Marlatt, G. A. (2011). Mindfulness-based relapse prevention for addictive behaviors: A clinician's guide. Guilford Press.</a:t>
+            </a:r>
+          </a:p>
+          <a:p>
+            <a:pPr>
+              <a:spcBef>
+                <a:spcPts val="600"/>
+              </a:spcBef>
+              <a:defRPr sz="1300">
+                <a:solidFill>
+                  <a:srgbClr val="2D2D44"/>
+                </a:solidFill>
+              </a:defRPr>
+            </a:pPr>
+            <a:r>
+              <a:t>Bowen, S., &amp; Marlatt, G. A. (2009). Surfing the urge: Brief mindfulness-based intervention for college student smokers. Psychology of Addictive Behaviors, 23(4), 666-671.</a:t>
+            </a:r>
+          </a:p>
+          <a:p>
+            <a:pPr>
+              <a:spcBef>
+                <a:spcPts val="600"/>
+              </a:spcBef>
+              <a:defRPr sz="1300">
+                <a:solidFill>
+                  <a:srgbClr val="2D2D44"/>
+                </a:solidFill>
+              </a:defRPr>
+            </a:pPr>
+            <a:r>
+              <a:t>Bowen, S., Witkiewitz, K., Clifasefi, S. L., et al. (2014). Relative efficacy of MBRP, standard RP, and TAU for substance use disorders. JAMA Psychiatry, 71(5), 547-556.</a:t>
+            </a:r>
+          </a:p>
+          <a:p>
+            <a:pPr>
+              <a:spcBef>
+                <a:spcPts val="600"/>
+              </a:spcBef>
+              <a:defRPr sz="1300">
+                <a:solidFill>
+                  <a:srgbClr val="2D2D44"/>
+                </a:solidFill>
+              </a:defRPr>
+            </a:pPr>
+            <a:r>
+              <a:t>Brewer, J. A., Mallik, S., Babuscio, T. A., et al. (2011). Mindfulness training for smoking cessation. Drug and Alcohol Dependence, 119(1-2), 72-80.</a:t>
+            </a:r>
+          </a:p>
+          <a:p>
+            <a:pPr>
+              <a:spcBef>
+                <a:spcPts val="600"/>
+              </a:spcBef>
+              <a:defRPr sz="1300">
+                <a:solidFill>
+                  <a:srgbClr val="2D2D44"/>
+                </a:solidFill>
+              </a:defRPr>
+            </a:pPr>
+            <a:r>
+              <a:t>Chiesa, A., &amp; Serretti, A. (2014). Are MBIs effective for substance use disorders? Substance Use &amp; Misuse, 49(5), 492-512.</a:t>
             </a:r>
           </a:p>
         </p:txBody>
@@ -10048,7 +9934,7 @@
               </a:defRPr>
             </a:pPr>
             <a:r>
-              <a:t>SLIDE 36: Future Directions</a:t>
+              <a:t>References (2/4)</a:t>
             </a:r>
           </a:p>
         </p:txBody>
@@ -10077,121 +9963,91 @@
           <a:p>
             <a:pPr>
               <a:spcBef>
-                <a:spcPts val="800"/>
-              </a:spcBef>
-              <a:defRPr sz="1400">
-                <a:solidFill>
-                  <a:srgbClr val="2D2D44"/>
-                </a:solidFill>
-              </a:defRPr>
-            </a:pPr>
-            <a:r>
-              <a:t>Follow-up studies: 3-month and 6-month assessments for sustained MBRP effects</a:t>
-            </a:r>
-          </a:p>
-          <a:p>
-            <a:pPr>
-              <a:spcBef>
-                <a:spcPts val="800"/>
-              </a:spcBef>
-              <a:defRPr sz="1400">
-                <a:solidFill>
-                  <a:srgbClr val="2D2D44"/>
-                </a:solidFill>
-              </a:defRPr>
-            </a:pPr>
-            <a:r>
-              <a:t>Multi-site RCTs: Replicate across multiple Indian de-addiction centers for generalizability</a:t>
-            </a:r>
-          </a:p>
-          <a:p>
-            <a:pPr>
-              <a:spcBef>
-                <a:spcPts val="800"/>
-              </a:spcBef>
-              <a:defRPr sz="1400">
-                <a:solidFill>
-                  <a:srgbClr val="2D2D44"/>
-                </a:solidFill>
-              </a:defRPr>
-            </a:pPr>
-            <a:r>
-              <a:t>Female participants: Include female substance-dependent patients for gender-specific effects</a:t>
-            </a:r>
-          </a:p>
-          <a:p>
-            <a:pPr>
-              <a:spcBef>
-                <a:spcPts val="800"/>
-              </a:spcBef>
-              <a:defRPr sz="1400">
-                <a:solidFill>
-                  <a:srgbClr val="2D2D44"/>
-                </a:solidFill>
-              </a:defRPr>
-            </a:pPr>
-            <a:r>
-              <a:t>Neuroimaging integration: fMRI/EEG to examine neural mechanisms of MBRP on craving circuits</a:t>
-            </a:r>
-          </a:p>
-          <a:p>
-            <a:pPr>
-              <a:spcBef>
-                <a:spcPts val="800"/>
-              </a:spcBef>
-              <a:defRPr sz="1400">
-                <a:solidFill>
-                  <a:srgbClr val="2D2D44"/>
-                </a:solidFill>
-              </a:defRPr>
-            </a:pPr>
-            <a:r>
-              <a:t>Dose-response analysis: Compare 6 vs. 8 vs. full 8-week MBRP for optimal dosage</a:t>
-            </a:r>
-          </a:p>
-          <a:p>
-            <a:pPr>
-              <a:spcBef>
-                <a:spcPts val="800"/>
-              </a:spcBef>
-              <a:defRPr sz="1400">
-                <a:solidFill>
-                  <a:srgbClr val="2D2D44"/>
-                </a:solidFill>
-              </a:defRPr>
-            </a:pPr>
-            <a:r>
-              <a:t>Mediator analysis: Examine whether mindfulness improvement mediates craving/impulsivity reduction</a:t>
-            </a:r>
-          </a:p>
-          <a:p>
-            <a:pPr>
-              <a:spcBef>
-                <a:spcPts val="800"/>
-              </a:spcBef>
-              <a:defRPr sz="1400">
-                <a:solidFill>
-                  <a:srgbClr val="2D2D44"/>
-                </a:solidFill>
-              </a:defRPr>
-            </a:pPr>
-            <a:r>
-              <a:t>Technology-assisted delivery: App-based/digital MBRP for post-discharge and rural access</a:t>
-            </a:r>
-          </a:p>
-          <a:p>
-            <a:pPr>
-              <a:spcBef>
-                <a:spcPts val="800"/>
-              </a:spcBef>
-              <a:defRPr sz="1400">
-                <a:solidFill>
-                  <a:srgbClr val="2D2D44"/>
-                </a:solidFill>
-              </a:defRPr>
-            </a:pPr>
-            <a:r>
-              <a:t>Comparative effectiveness: MBRP vs. CBT vs. ACT vs. Contingency Management in Indian samples</a:t>
+                <a:spcPts val="600"/>
+              </a:spcBef>
+              <a:defRPr sz="1300">
+                <a:solidFill>
+                  <a:srgbClr val="2D2D44"/>
+                </a:solidFill>
+              </a:defRPr>
+            </a:pPr>
+            <a:r>
+              <a:t>Garland, E. L., Froeliger, B., &amp; Howard, M. O. (2014). Mindfulness training targets neurocognitive mechanisms of addiction. Frontiers in Psychiatry, 4, 173.</a:t>
+            </a:r>
+          </a:p>
+          <a:p>
+            <a:pPr>
+              <a:spcBef>
+                <a:spcPts val="600"/>
+              </a:spcBef>
+              <a:defRPr sz="1300">
+                <a:solidFill>
+                  <a:srgbClr val="2D2D44"/>
+                </a:solidFill>
+              </a:defRPr>
+            </a:pPr>
+            <a:r>
+              <a:t>Garland, E. L., Manusov, E. G., Froeliger, B., et al. (2014). MORE for chronic pain and opioid misuse. J. Consulting and Clinical Psychology, 82(3), 448-459.</a:t>
+            </a:r>
+          </a:p>
+          <a:p>
+            <a:pPr>
+              <a:spcBef>
+                <a:spcPts val="600"/>
+              </a:spcBef>
+              <a:defRPr sz="1300">
+                <a:solidFill>
+                  <a:srgbClr val="2D2D44"/>
+                </a:solidFill>
+              </a:defRPr>
+            </a:pPr>
+            <a:r>
+              <a:t>Garland, E. L., Roberts-Lewis, A., Tronnier, C. D., et al. (2016). MORE vs. CBT for co-occurring substance dependence. J. Consulting and Clinical Psychology, 84(4), 281-293.</a:t>
+            </a:r>
+          </a:p>
+          <a:p>
+            <a:pPr>
+              <a:spcBef>
+                <a:spcPts val="600"/>
+              </a:spcBef>
+              <a:defRPr sz="1300">
+                <a:solidFill>
+                  <a:srgbClr val="2D2D44"/>
+                </a:solidFill>
+              </a:defRPr>
+            </a:pPr>
+            <a:r>
+              <a:t>Ghosh, A., Basu, D., &amp; Avasthi, A. (2018). Relapse in opioid dependence: Indian perspective. Indian Journal of Psychiatry, 60(Suppl 4), S469-S476.</a:t>
+            </a:r>
+          </a:p>
+          <a:p>
+            <a:pPr>
+              <a:spcBef>
+                <a:spcPts val="600"/>
+              </a:spcBef>
+              <a:defRPr sz="1300">
+                <a:solidFill>
+                  <a:srgbClr val="2D2D44"/>
+                </a:solidFill>
+              </a:defRPr>
+            </a:pPr>
+            <a:r>
+              <a:t>Glasner-Edwards, S., Mooney, L. J., et al. (2017). MBRP for stimulant dependent adults: Pilot RCT. Mindfulness, 8(1), 126-135.</a:t>
+            </a:r>
+          </a:p>
+          <a:p>
+            <a:pPr>
+              <a:spcBef>
+                <a:spcPts val="600"/>
+              </a:spcBef>
+              <a:defRPr sz="1300">
+                <a:solidFill>
+                  <a:srgbClr val="2D2D44"/>
+                </a:solidFill>
+              </a:defRPr>
+            </a:pPr>
+            <a:r>
+              <a:t>Grant, S., Colaiaco, B., et al. (2017). MBRP for SUDs: Systematic review and meta-analysis. J. Addiction Medicine, 11(5), 386-396.</a:t>
             </a:r>
           </a:p>
         </p:txBody>
@@ -10295,7 +10151,7 @@
               </a:defRPr>
             </a:pPr>
             <a:r>
-              <a:t>SLIDE 37: References (1/4)</a:t>
+              <a:t>References (3/4)</a:t>
             </a:r>
           </a:p>
         </p:txBody>
@@ -10324,106 +10180,106 @@
           <a:p>
             <a:pPr>
               <a:spcBef>
-                <a:spcPts val="800"/>
-              </a:spcBef>
-              <a:defRPr sz="1400">
-                <a:solidFill>
-                  <a:srgbClr val="2D2D44"/>
-                </a:solidFill>
-              </a:defRPr>
-            </a:pPr>
-            <a:r>
-              <a:t>Alfonso, J. P., Caracuel, A., Delgado-Pastor, L. C., &amp; Verdejo-Garcia, A. (2011). Drug and Alcohol Dependence, 117(1), 78-81.</a:t>
-            </a:r>
-          </a:p>
-          <a:p>
-            <a:pPr>
-              <a:spcBef>
-                <a:spcPts val="800"/>
-              </a:spcBef>
-              <a:defRPr sz="1400">
-                <a:solidFill>
-                  <a:srgbClr val="2D2D44"/>
-                </a:solidFill>
-              </a:defRPr>
-            </a:pPr>
-            <a:r>
-              <a:t>Baer, R. A., Smith, G. T., Hopkins, J., Krietemeyer, J., &amp; Toney, L. (2006). Assessment, 13(1), 27-45.</a:t>
-            </a:r>
-          </a:p>
-          <a:p>
-            <a:pPr>
-              <a:spcBef>
-                <a:spcPts val="800"/>
-              </a:spcBef>
-              <a:defRPr sz="1400">
-                <a:solidFill>
-                  <a:srgbClr val="2D2D44"/>
-                </a:solidFill>
-              </a:defRPr>
-            </a:pPr>
-            <a:r>
-              <a:t>Bowen, S., Chawla, N., &amp; Marlatt, G. A. (2011). Mindfulness-based relapse prevention for addictive behaviors. Guilford Press.</a:t>
-            </a:r>
-          </a:p>
-          <a:p>
-            <a:pPr>
-              <a:spcBef>
-                <a:spcPts val="800"/>
-              </a:spcBef>
-              <a:defRPr sz="1400">
-                <a:solidFill>
-                  <a:srgbClr val="2D2D44"/>
-                </a:solidFill>
-              </a:defRPr>
-            </a:pPr>
-            <a:r>
-              <a:t>Bowen, S., &amp; Marlatt, G. A. (2009). Psychology of Addictive Behaviors, 23(4), 666-671.</a:t>
-            </a:r>
-          </a:p>
-          <a:p>
-            <a:pPr>
-              <a:spcBef>
-                <a:spcPts val="800"/>
-              </a:spcBef>
-              <a:defRPr sz="1400">
-                <a:solidFill>
-                  <a:srgbClr val="2D2D44"/>
-                </a:solidFill>
-              </a:defRPr>
-            </a:pPr>
-            <a:r>
-              <a:t>Bowen, S., Witkiewitz, K., Clifasefi, S. L., et al. (2014). JAMA Psychiatry, 71(5), 547-556.</a:t>
-            </a:r>
-          </a:p>
-          <a:p>
-            <a:pPr>
-              <a:spcBef>
-                <a:spcPts val="800"/>
-              </a:spcBef>
-              <a:defRPr sz="1400">
-                <a:solidFill>
-                  <a:srgbClr val="2D2D44"/>
-                </a:solidFill>
-              </a:defRPr>
-            </a:pPr>
-            <a:r>
-              <a:t>Bowen, S., Witkiewitz, K., Dillworth, T. M., &amp; Marlatt, G. A. (2007). Addictive Behaviors, 32(10), 2324-2328.</a:t>
-            </a:r>
-          </a:p>
-          <a:p>
-            <a:pPr>
-              <a:spcBef>
-                <a:spcPts val="800"/>
-              </a:spcBef>
-              <a:defRPr sz="1400">
-                <a:solidFill>
-                  <a:srgbClr val="2D2D44"/>
-                </a:solidFill>
-              </a:defRPr>
-            </a:pPr>
-            <a:r>
-              <a:t>Brewer, J. A., Mallik, S., Babuscio, T. A., et al. (2011). Drug and Alcohol Dependence, 119(1-2), 72-80.</a:t>
+                <a:spcPts val="600"/>
+              </a:spcBef>
+              <a:defRPr sz="1300">
+                <a:solidFill>
+                  <a:srgbClr val="2D2D44"/>
+                </a:solidFill>
+              </a:defRPr>
+            </a:pPr>
+            <a:r>
+              <a:t>Humeniuk, R., Ali, R., Babor, T. F., et al. (2008). Validation of ASSIST. Addiction, 103(6), 1039-1047.</a:t>
+            </a:r>
+          </a:p>
+          <a:p>
+            <a:pPr>
+              <a:spcBef>
+                <a:spcPts val="600"/>
+              </a:spcBef>
+              <a:defRPr sz="1300">
+                <a:solidFill>
+                  <a:srgbClr val="2D2D44"/>
+                </a:solidFill>
+              </a:defRPr>
+            </a:pPr>
+            <a:r>
+              <a:t>Kabat-Zinn, J. (1990). Full catastrophe living. Delacorte Press.</a:t>
+            </a:r>
+          </a:p>
+          <a:p>
+            <a:pPr>
+              <a:spcBef>
+                <a:spcPts val="600"/>
+              </a:spcBef>
+              <a:defRPr sz="1300">
+                <a:solidFill>
+                  <a:srgbClr val="2D2D44"/>
+                </a:solidFill>
+              </a:defRPr>
+            </a:pPr>
+            <a:r>
+              <a:t>Karyadi, K. A., VanderVeen, J. D., &amp; Cyders, M. A. (2014). Meta-analysis: trait mindfulness and substance use. Drug and Alcohol Dependence, 143, 1-10.</a:t>
+            </a:r>
+          </a:p>
+          <a:p>
+            <a:pPr>
+              <a:spcBef>
+                <a:spcPts val="600"/>
+              </a:spcBef>
+              <a:defRPr sz="1300">
+                <a:solidFill>
+                  <a:srgbClr val="2D2D44"/>
+                </a:solidFill>
+              </a:defRPr>
+            </a:pPr>
+            <a:r>
+              <a:t>Li, W., Howard, M. O., Garland, E. L., et al. (2017). Mindfulness treatment for substance misuse: Meta-analysis. J. Substance Abuse Treatment, 75, 62-96.</a:t>
+            </a:r>
+          </a:p>
+          <a:p>
+            <a:pPr>
+              <a:spcBef>
+                <a:spcPts val="600"/>
+              </a:spcBef>
+              <a:defRPr sz="1300">
+                <a:solidFill>
+                  <a:srgbClr val="2D2D44"/>
+                </a:solidFill>
+              </a:defRPr>
+            </a:pPr>
+            <a:r>
+              <a:t>Marlatt, G. A., &amp; Gordon, J. R. (1985). Relapse prevention. Guilford Press.</a:t>
+            </a:r>
+          </a:p>
+          <a:p>
+            <a:pPr>
+              <a:spcBef>
+                <a:spcPts val="600"/>
+              </a:spcBef>
+              <a:defRPr sz="1300">
+                <a:solidFill>
+                  <a:srgbClr val="2D2D44"/>
+                </a:solidFill>
+              </a:defRPr>
+            </a:pPr>
+            <a:r>
+              <a:t>Mattoo, S. K., Chakrabarti, S., &amp; Anjaiah, M. (2009). Psychosocial factors in relapse. Indian J. Medical Research, 130(6), 702-708.</a:t>
+            </a:r>
+          </a:p>
+          <a:p>
+            <a:pPr>
+              <a:spcBef>
+                <a:spcPts val="600"/>
+              </a:spcBef>
+              <a:defRPr sz="1300">
+                <a:solidFill>
+                  <a:srgbClr val="2D2D44"/>
+                </a:solidFill>
+              </a:defRPr>
+            </a:pPr>
+            <a:r>
+              <a:t>Moeller, F. G., Barratt, E. S., et al. (2001). Psychiatric aspects of impulsivity. Am. J. Psychiatry, 158(11), 1783-1793.</a:t>
             </a:r>
           </a:p>
         </p:txBody>
@@ -10527,7 +10383,7 @@
               </a:defRPr>
             </a:pPr>
             <a:r>
-              <a:t>SLIDE 38: References (2/4)</a:t>
+              <a:t>References (4/4)</a:t>
             </a:r>
           </a:p>
         </p:txBody>
@@ -10556,368 +10412,136 @@
           <a:p>
             <a:pPr>
               <a:spcBef>
-                <a:spcPts val="800"/>
-              </a:spcBef>
-              <a:defRPr sz="1400">
-                <a:solidFill>
-                  <a:srgbClr val="2D2D44"/>
-                </a:solidFill>
-              </a:defRPr>
-            </a:pPr>
-            <a:r>
-              <a:t>Chiesa, A., &amp; Serretti, A. (2014). Substance Use &amp; Misuse, 49(5), 492-512.</a:t>
-            </a:r>
-          </a:p>
-          <a:p>
-            <a:pPr>
-              <a:spcBef>
-                <a:spcPts val="800"/>
-              </a:spcBef>
-              <a:defRPr sz="1400">
-                <a:solidFill>
-                  <a:srgbClr val="2D2D44"/>
-                </a:solidFill>
-              </a:defRPr>
-            </a:pPr>
-            <a:r>
-              <a:t>Davis, J. M., Goldberg, S. B., Anderson, M. C., et al. (2014). Substance Use &amp; Misuse, 49(5), 571-585.</a:t>
-            </a:r>
-          </a:p>
-          <a:p>
-            <a:pPr>
-              <a:spcBef>
-                <a:spcPts val="800"/>
-              </a:spcBef>
-              <a:defRPr sz="1400">
-                <a:solidFill>
-                  <a:srgbClr val="2D2D44"/>
-                </a:solidFill>
-              </a:defRPr>
-            </a:pPr>
-            <a:r>
-              <a:t>Garland, E. L., Froeliger, B., &amp; Howard, M. O. (2014). Frontiers in Psychiatry, 4, 173.</a:t>
-            </a:r>
-          </a:p>
-          <a:p>
-            <a:pPr>
-              <a:spcBef>
-                <a:spcPts val="800"/>
-              </a:spcBef>
-              <a:defRPr sz="1400">
-                <a:solidFill>
-                  <a:srgbClr val="2D2D44"/>
-                </a:solidFill>
-              </a:defRPr>
-            </a:pPr>
-            <a:r>
-              <a:t>Garland, E. L., Manusov, E. G., Froeliger, B., et al. (2014). J. Consulting and Clinical Psychology, 82(3), 448-459.</a:t>
-            </a:r>
-          </a:p>
-          <a:p>
-            <a:pPr>
-              <a:spcBef>
-                <a:spcPts val="800"/>
-              </a:spcBef>
-              <a:defRPr sz="1400">
-                <a:solidFill>
-                  <a:srgbClr val="2D2D44"/>
-                </a:solidFill>
-              </a:defRPr>
-            </a:pPr>
-            <a:r>
-              <a:t>Garland, E. L., Roberts-Lewis, A., Tronnier, C. D., et al. (2016). J. Consulting and Clinical Psychology, 84(4), 281-293.</a:t>
-            </a:r>
-          </a:p>
-          <a:p>
-            <a:pPr>
-              <a:spcBef>
-                <a:spcPts val="800"/>
-              </a:spcBef>
-              <a:defRPr sz="1400">
-                <a:solidFill>
-                  <a:srgbClr val="2D2D44"/>
-                </a:solidFill>
-              </a:defRPr>
-            </a:pPr>
-            <a:r>
-              <a:t>Ghosh, A., Basu, D., &amp; Avasthi, A. (2018). Indian Journal of Psychiatry, 60(Suppl 4), S469-S476.</a:t>
-            </a:r>
-          </a:p>
-          <a:p>
-            <a:pPr>
-              <a:spcBef>
-                <a:spcPts val="800"/>
-              </a:spcBef>
-              <a:defRPr sz="1400">
-                <a:solidFill>
-                  <a:srgbClr val="2D2D44"/>
-                </a:solidFill>
-              </a:defRPr>
-            </a:pPr>
-            <a:r>
-              <a:t>Glasner-Edwards, S., Mooney, L. J., Ang, A., et al. (2017). Mindfulness, 8(1), 126-135.</a:t>
-            </a:r>
-          </a:p>
-          <a:p>
-            <a:pPr>
-              <a:spcBef>
-                <a:spcPts val="800"/>
-              </a:spcBef>
-              <a:defRPr sz="1400">
-                <a:solidFill>
-                  <a:srgbClr val="2D2D44"/>
-                </a:solidFill>
-              </a:defRPr>
-            </a:pPr>
-            <a:r>
-              <a:t>Grant, S., Colaiaco, B., Motala, A., et al. (2017). J. Addiction Medicine, 11(5), 386-396.</a:t>
-            </a:r>
-          </a:p>
-        </p:txBody>
-      </p:sp>
-    </p:spTree>
-  </p:cSld>
-  <p:clrMapOvr>
-    <a:masterClrMapping/>
-  </p:clrMapOvr>
-</p:sld>
-</file>
-
-<file path=ppt/slides/slide39.xml><?xml version="1.0" encoding="utf-8"?>
-<p:sld xmlns:a="http://schemas.openxmlformats.org/drawingml/2006/main" xmlns:p="http://schemas.openxmlformats.org/presentationml/2006/main" xmlns:r="http://schemas.openxmlformats.org/officeDocument/2006/relationships">
-  <p:cSld>
-    <p:bg>
-      <p:bgPr>
-        <a:solidFill>
-          <a:srgbClr val="F8F9FA"/>
-        </a:solidFill>
-        <a:effectLst/>
-      </p:bgPr>
-    </p:bg>
-    <p:spTree>
-      <p:nvGrpSpPr>
-        <p:cNvPr id="1" name=""/>
-        <p:cNvGrpSpPr/>
-        <p:nvPr/>
-      </p:nvGrpSpPr>
-      <p:grpSpPr/>
-      <p:sp>
-        <p:nvSpPr>
-          <p:cNvPr id="2" name="Rectangle 1"/>
-          <p:cNvSpPr/>
-          <p:nvPr/>
-        </p:nvSpPr>
-        <p:spPr>
-          <a:xfrm>
-            <a:off x="0" y="0"/>
-            <a:ext cx="12191695" cy="1005840"/>
-          </a:xfrm>
-          <a:prstGeom prst="rect">
-            <a:avLst/>
-          </a:prstGeom>
-          <a:solidFill>
-            <a:srgbClr val="1B3A5C"/>
-          </a:solidFill>
-          <a:ln>
-            <a:noFill/>
-          </a:ln>
-        </p:spPr>
-        <p:style>
-          <a:lnRef idx="1">
-            <a:schemeClr val="accent1"/>
-          </a:lnRef>
-          <a:fillRef idx="3">
-            <a:schemeClr val="accent1"/>
-          </a:fillRef>
-          <a:effectRef idx="2">
-            <a:schemeClr val="accent1"/>
-          </a:effectRef>
-          <a:fontRef idx="minor">
-            <a:schemeClr val="lt1"/>
-          </a:fontRef>
-        </p:style>
-        <p:txBody>
-          <a:bodyPr rtlCol="0" anchor="ctr"/>
-          <a:lstStyle/>
-          <a:p>
-            <a:pPr algn="ctr"/>
-          </a:p>
-        </p:txBody>
-      </p:sp>
-      <p:sp>
-        <p:nvSpPr>
-          <p:cNvPr id="3" name="TextBox 2"/>
-          <p:cNvSpPr txBox="1"/>
-          <p:nvPr/>
-        </p:nvSpPr>
-        <p:spPr>
-          <a:xfrm>
-            <a:off x="457200" y="137160"/>
-            <a:ext cx="11247120" cy="822960"/>
-          </a:xfrm>
-          <a:prstGeom prst="rect">
-            <a:avLst/>
-          </a:prstGeom>
-          <a:noFill/>
-        </p:spPr>
-        <p:txBody>
-          <a:bodyPr wrap="none">
-            <a:spAutoFit/>
-          </a:bodyPr>
-          <a:lstStyle/>
-          <a:p>
-            <a:pPr algn="l">
-              <a:defRPr sz="2200" b="1">
-                <a:solidFill>
-                  <a:srgbClr val="FFFFFF"/>
-                </a:solidFill>
-              </a:defRPr>
-            </a:pPr>
-            <a:r>
-              <a:t>SLIDE 39: References (3/4)</a:t>
-            </a:r>
-          </a:p>
-        </p:txBody>
-      </p:sp>
-      <p:sp>
-        <p:nvSpPr>
-          <p:cNvPr id="4" name="TextBox 3"/>
-          <p:cNvSpPr txBox="1"/>
-          <p:nvPr/>
-        </p:nvSpPr>
-        <p:spPr>
-          <a:xfrm>
-            <a:off x="640080" y="1188720"/>
-            <a:ext cx="10881360" cy="5394960"/>
-          </a:xfrm>
-          <a:prstGeom prst="rect">
-            <a:avLst/>
-          </a:prstGeom>
-          <a:noFill/>
-        </p:spPr>
-        <p:txBody>
-          <a:bodyPr wrap="square">
-            <a:spAutoFit/>
-          </a:bodyPr>
-          <a:lstStyle/>
-          <a:p>
-            <a:pPr>
-              <a:spcBef>
-                <a:spcPts val="800"/>
-              </a:spcBef>
-              <a:defRPr sz="1400">
-                <a:solidFill>
-                  <a:srgbClr val="2D2D44"/>
-                </a:solidFill>
-              </a:defRPr>
-            </a:pPr>
-            <a:r>
-              <a:t>Hsu, S. H., Collins, S. E., &amp; Marlatt, G. A. (2013). Addictive Behaviors, 38(3), 1852-1858.</a:t>
-            </a:r>
-          </a:p>
-          <a:p>
-            <a:pPr>
-              <a:spcBef>
-                <a:spcPts val="800"/>
-              </a:spcBef>
-              <a:defRPr sz="1400">
-                <a:solidFill>
-                  <a:srgbClr val="2D2D44"/>
-                </a:solidFill>
-              </a:defRPr>
-            </a:pPr>
-            <a:r>
-              <a:t>Humeniuk, R., Ali, R., Babor, T. F., et al. (2008). Addiction, 103(6), 1039-1047.</a:t>
-            </a:r>
-          </a:p>
-          <a:p>
-            <a:pPr>
-              <a:spcBef>
-                <a:spcPts val="800"/>
-              </a:spcBef>
-              <a:defRPr sz="1400">
-                <a:solidFill>
-                  <a:srgbClr val="2D2D44"/>
-                </a:solidFill>
-              </a:defRPr>
-            </a:pPr>
-            <a:r>
-              <a:t>Jain, R., Majumder, P., &amp; Gupta, T. (2013). Indian Journal of Psychiatry, 55(Suppl 1), S86-S92.</a:t>
-            </a:r>
-          </a:p>
-          <a:p>
-            <a:pPr>
-              <a:spcBef>
-                <a:spcPts val="800"/>
-              </a:spcBef>
-              <a:defRPr sz="1400">
-                <a:solidFill>
-                  <a:srgbClr val="2D2D44"/>
-                </a:solidFill>
-              </a:defRPr>
-            </a:pPr>
-            <a:r>
-              <a:t>Kabat-Zinn, J. (1990). Full catastrophe living. Delacorte Press.</a:t>
-            </a:r>
-          </a:p>
-          <a:p>
-            <a:pPr>
-              <a:spcBef>
-                <a:spcPts val="800"/>
-              </a:spcBef>
-              <a:defRPr sz="1400">
-                <a:solidFill>
-                  <a:srgbClr val="2D2D44"/>
-                </a:solidFill>
-              </a:defRPr>
-            </a:pPr>
-            <a:r>
-              <a:t>Karyadi, K. A., VanderVeen, J. D., &amp; Cyders, M. A. (2014). Drug and Alcohol Dependence, 143, 1-10.</a:t>
-            </a:r>
-          </a:p>
-          <a:p>
-            <a:pPr>
-              <a:spcBef>
-                <a:spcPts val="800"/>
-              </a:spcBef>
-              <a:defRPr sz="1400">
-                <a:solidFill>
-                  <a:srgbClr val="2D2D44"/>
-                </a:solidFill>
-              </a:defRPr>
-            </a:pPr>
-            <a:r>
-              <a:t>Korponay, C., Dentico, D., Kral, T. R. A., et al. (2019). Scientific Reports, 9(1), 11963.</a:t>
-            </a:r>
-          </a:p>
-          <a:p>
-            <a:pPr>
-              <a:spcBef>
-                <a:spcPts val="800"/>
-              </a:spcBef>
-              <a:defRPr sz="1400">
-                <a:solidFill>
-                  <a:srgbClr val="2D2D44"/>
-                </a:solidFill>
-              </a:defRPr>
-            </a:pPr>
-            <a:r>
-              <a:t>Li, W., Howard, M. O., Garland, E. L., et al. (2017). J. Substance Abuse Treatment, 75, 62-96.</a:t>
-            </a:r>
-          </a:p>
-          <a:p>
-            <a:pPr>
-              <a:spcBef>
-                <a:spcPts val="800"/>
-              </a:spcBef>
-              <a:defRPr sz="1400">
-                <a:solidFill>
-                  <a:srgbClr val="2D2D44"/>
-                </a:solidFill>
-              </a:defRPr>
-            </a:pPr>
-            <a:r>
-              <a:t>Marlatt, G. A., &amp; Gordon, J. R. (1985). Relapse prevention. Guilford Press.</a:t>
+                <a:spcPts val="600"/>
+              </a:spcBef>
+              <a:defRPr sz="1300">
+                <a:solidFill>
+                  <a:srgbClr val="2D2D44"/>
+                </a:solidFill>
+              </a:defRPr>
+            </a:pPr>
+            <a:r>
+              <a:t>Murphy, C., &amp; MacKillop, J. (2012). Impulsivity, mindfulness, and alcohol misuse. Psychopharmacology, 219(2), 527-536.</a:t>
+            </a:r>
+          </a:p>
+          <a:p>
+            <a:pPr>
+              <a:spcBef>
+                <a:spcPts val="600"/>
+              </a:spcBef>
+              <a:defRPr sz="1300">
+                <a:solidFill>
+                  <a:srgbClr val="2D2D44"/>
+                </a:solidFill>
+              </a:defRPr>
+            </a:pPr>
+            <a:r>
+              <a:t>NIDA (2020). Drugs, brains, and behavior: The science of addiction. NIDA.</a:t>
+            </a:r>
+          </a:p>
+          <a:p>
+            <a:pPr>
+              <a:spcBef>
+                <a:spcPts val="600"/>
+              </a:spcBef>
+              <a:defRPr sz="1300">
+                <a:solidFill>
+                  <a:srgbClr val="2D2D44"/>
+                </a:solidFill>
+              </a:defRPr>
+            </a:pPr>
+            <a:r>
+              <a:t>Patton, J. H., Stanford, M. S., &amp; Barratt, E. S. (1995). Factor structure of BIS. J. Clinical Psychology, 51(6), 768-774.</a:t>
+            </a:r>
+          </a:p>
+          <a:p>
+            <a:pPr>
+              <a:spcBef>
+                <a:spcPts val="600"/>
+              </a:spcBef>
+              <a:defRPr sz="1300">
+                <a:solidFill>
+                  <a:srgbClr val="2D2D44"/>
+                </a:solidFill>
+              </a:defRPr>
+            </a:pPr>
+            <a:r>
+              <a:t>Robinson, T. E., &amp; Berridge, K. C. (1993). Neural basis of drug craving. Brain Research Reviews, 18(3), 247-291.</a:t>
+            </a:r>
+          </a:p>
+          <a:p>
+            <a:pPr>
+              <a:spcBef>
+                <a:spcPts val="600"/>
+              </a:spcBef>
+              <a:defRPr sz="1300">
+                <a:solidFill>
+                  <a:srgbClr val="2D2D44"/>
+                </a:solidFill>
+              </a:defRPr>
+            </a:pPr>
+            <a:r>
+              <a:t>Sarkar, S., &amp; Balhara, Y. P. S. (2016). Indian J. Endocrinology and Metabolism, 20(4), 527-533.</a:t>
+            </a:r>
+          </a:p>
+          <a:p>
+            <a:pPr>
+              <a:spcBef>
+                <a:spcPts val="600"/>
+              </a:spcBef>
+              <a:defRPr sz="1300">
+                <a:solidFill>
+                  <a:srgbClr val="2D2D44"/>
+                </a:solidFill>
+              </a:defRPr>
+            </a:pPr>
+            <a:r>
+              <a:t>Tiffany, S. T., et al. (2000). Development of heroin craving questionnaire. Unpublished manuscript.</a:t>
+            </a:r>
+          </a:p>
+          <a:p>
+            <a:pPr>
+              <a:spcBef>
+                <a:spcPts val="600"/>
+              </a:spcBef>
+              <a:defRPr sz="1300">
+                <a:solidFill>
+                  <a:srgbClr val="2D2D44"/>
+                </a:solidFill>
+              </a:defRPr>
+            </a:pPr>
+            <a:r>
+              <a:t>WHO ASSIST Working Group (2002). ASSIST: Development, reliability, feasibility. Addiction, 97(9), 1183-1194.</a:t>
+            </a:r>
+          </a:p>
+          <a:p>
+            <a:pPr>
+              <a:spcBef>
+                <a:spcPts val="600"/>
+              </a:spcBef>
+              <a:defRPr sz="1300">
+                <a:solidFill>
+                  <a:srgbClr val="2D2D44"/>
+                </a:solidFill>
+              </a:defRPr>
+            </a:pPr>
+            <a:r>
+              <a:t>Witkiewitz, K., Bowen, S., Douglas, H., &amp; Hsu, S. H. (2013). MBRP for substance craving. Addictive Behaviors, 38(2), 1563-1571.</a:t>
+            </a:r>
+          </a:p>
+          <a:p>
+            <a:pPr>
+              <a:spcBef>
+                <a:spcPts val="600"/>
+              </a:spcBef>
+              <a:defRPr sz="1300">
+                <a:solidFill>
+                  <a:srgbClr val="2D2D44"/>
+                </a:solidFill>
+              </a:defRPr>
+            </a:pPr>
+            <a:r>
+              <a:t>Zgierska, A., et al. (2009). Mindfulness meditation for SUDs: Systematic review. Substance Abuse, 30(4), 266-294.</a:t>
             </a:r>
           </a:p>
         </p:txBody>
@@ -11021,7 +10645,7 @@
               </a:defRPr>
             </a:pPr>
             <a:r>
-              <a:t>SLIDE 4: Introduction &amp; Background (3/3)</a:t>
+              <a:t>Introduction &amp; Background (3/3)</a:t>
             </a:r>
           </a:p>
         </p:txBody>
@@ -11085,9 +10709,9 @@
           <a:p>
             <a:pPr>
               <a:spcBef>
-                <a:spcPts val="800"/>
-              </a:spcBef>
-              <a:defRPr sz="1400">
+                <a:spcPts val="600"/>
+              </a:spcBef>
+              <a:defRPr sz="1300">
                 <a:solidFill>
                   <a:srgbClr val="2D2D44"/>
                 </a:solidFill>
@@ -11100,9 +10724,9 @@
           <a:p>
             <a:pPr>
               <a:spcBef>
-                <a:spcPts val="800"/>
-              </a:spcBef>
-              <a:defRPr sz="1400">
+                <a:spcPts val="600"/>
+              </a:spcBef>
+              <a:defRPr sz="1300">
                 <a:solidFill>
                   <a:srgbClr val="2D2D44"/>
                 </a:solidFill>
@@ -11115,9 +10739,9 @@
           <a:p>
             <a:pPr>
               <a:spcBef>
-                <a:spcPts val="800"/>
-              </a:spcBef>
-              <a:defRPr sz="1400">
+                <a:spcPts val="600"/>
+              </a:spcBef>
+              <a:defRPr sz="1300">
                 <a:solidFill>
                   <a:srgbClr val="2D2D44"/>
                 </a:solidFill>
@@ -11130,9 +10754,9 @@
           <a:p>
             <a:pPr>
               <a:spcBef>
-                <a:spcPts val="800"/>
-              </a:spcBef>
-              <a:defRPr sz="1400">
+                <a:spcPts val="600"/>
+              </a:spcBef>
+              <a:defRPr sz="1300">
                 <a:solidFill>
                   <a:srgbClr val="2D2D44"/>
                 </a:solidFill>
@@ -11145,9 +10769,9 @@
           <a:p>
             <a:pPr>
               <a:spcBef>
-                <a:spcPts val="800"/>
-              </a:spcBef>
-              <a:defRPr sz="1400">
+                <a:spcPts val="600"/>
+              </a:spcBef>
+              <a:defRPr sz="1300">
                 <a:solidFill>
                   <a:srgbClr val="2D2D44"/>
                 </a:solidFill>
@@ -11160,9 +10784,9 @@
           <a:p>
             <a:pPr>
               <a:spcBef>
-                <a:spcPts val="800"/>
-              </a:spcBef>
-              <a:defRPr sz="1400">
+                <a:spcPts val="600"/>
+              </a:spcBef>
+              <a:defRPr sz="1300">
                 <a:solidFill>
                   <a:srgbClr val="2D2D44"/>
                 </a:solidFill>
@@ -11175,9 +10799,9 @@
           <a:p>
             <a:pPr>
               <a:spcBef>
-                <a:spcPts val="800"/>
-              </a:spcBef>
-              <a:defRPr sz="1400">
+                <a:spcPts val="600"/>
+              </a:spcBef>
+              <a:defRPr sz="1300">
                 <a:solidFill>
                   <a:srgbClr val="2D2D44"/>
                 </a:solidFill>
@@ -11185,343 +10809,6 @@
             </a:pPr>
             <a:r>
               <a:t>Growing global evidence supports MBRP; however, Indian validation remains scarce</a:t>
-            </a:r>
-          </a:p>
-        </p:txBody>
-      </p:sp>
-    </p:spTree>
-  </p:cSld>
-  <p:clrMapOvr>
-    <a:masterClrMapping/>
-  </p:clrMapOvr>
-</p:sld>
-</file>
-
-<file path=ppt/slides/slide40.xml><?xml version="1.0" encoding="utf-8"?>
-<p:sld xmlns:a="http://schemas.openxmlformats.org/drawingml/2006/main" xmlns:p="http://schemas.openxmlformats.org/presentationml/2006/main" xmlns:r="http://schemas.openxmlformats.org/officeDocument/2006/relationships">
-  <p:cSld>
-    <p:bg>
-      <p:bgPr>
-        <a:solidFill>
-          <a:srgbClr val="F8F9FA"/>
-        </a:solidFill>
-        <a:effectLst/>
-      </p:bgPr>
-    </p:bg>
-    <p:spTree>
-      <p:nvGrpSpPr>
-        <p:cNvPr id="1" name=""/>
-        <p:cNvGrpSpPr/>
-        <p:nvPr/>
-      </p:nvGrpSpPr>
-      <p:grpSpPr/>
-      <p:sp>
-        <p:nvSpPr>
-          <p:cNvPr id="2" name="Rectangle 1"/>
-          <p:cNvSpPr/>
-          <p:nvPr/>
-        </p:nvSpPr>
-        <p:spPr>
-          <a:xfrm>
-            <a:off x="0" y="0"/>
-            <a:ext cx="12191695" cy="1005840"/>
-          </a:xfrm>
-          <a:prstGeom prst="rect">
-            <a:avLst/>
-          </a:prstGeom>
-          <a:solidFill>
-            <a:srgbClr val="1B3A5C"/>
-          </a:solidFill>
-          <a:ln>
-            <a:noFill/>
-          </a:ln>
-        </p:spPr>
-        <p:style>
-          <a:lnRef idx="1">
-            <a:schemeClr val="accent1"/>
-          </a:lnRef>
-          <a:fillRef idx="3">
-            <a:schemeClr val="accent1"/>
-          </a:fillRef>
-          <a:effectRef idx="2">
-            <a:schemeClr val="accent1"/>
-          </a:effectRef>
-          <a:fontRef idx="minor">
-            <a:schemeClr val="lt1"/>
-          </a:fontRef>
-        </p:style>
-        <p:txBody>
-          <a:bodyPr rtlCol="0" anchor="ctr"/>
-          <a:lstStyle/>
-          <a:p>
-            <a:pPr algn="ctr"/>
-          </a:p>
-        </p:txBody>
-      </p:sp>
-      <p:sp>
-        <p:nvSpPr>
-          <p:cNvPr id="3" name="TextBox 2"/>
-          <p:cNvSpPr txBox="1"/>
-          <p:nvPr/>
-        </p:nvSpPr>
-        <p:spPr>
-          <a:xfrm>
-            <a:off x="457200" y="137160"/>
-            <a:ext cx="11247120" cy="822960"/>
-          </a:xfrm>
-          <a:prstGeom prst="rect">
-            <a:avLst/>
-          </a:prstGeom>
-          <a:noFill/>
-        </p:spPr>
-        <p:txBody>
-          <a:bodyPr wrap="none">
-            <a:spAutoFit/>
-          </a:bodyPr>
-          <a:lstStyle/>
-          <a:p>
-            <a:pPr algn="l">
-              <a:defRPr sz="2200" b="1">
-                <a:solidFill>
-                  <a:srgbClr val="FFFFFF"/>
-                </a:solidFill>
-              </a:defRPr>
-            </a:pPr>
-            <a:r>
-              <a:t>SLIDE 40: References (4/4)</a:t>
-            </a:r>
-          </a:p>
-        </p:txBody>
-      </p:sp>
-      <p:sp>
-        <p:nvSpPr>
-          <p:cNvPr id="4" name="TextBox 3"/>
-          <p:cNvSpPr txBox="1"/>
-          <p:nvPr/>
-        </p:nvSpPr>
-        <p:spPr>
-          <a:xfrm>
-            <a:off x="640080" y="1188720"/>
-            <a:ext cx="10881360" cy="5394960"/>
-          </a:xfrm>
-          <a:prstGeom prst="rect">
-            <a:avLst/>
-          </a:prstGeom>
-          <a:noFill/>
-        </p:spPr>
-        <p:txBody>
-          <a:bodyPr wrap="square">
-            <a:spAutoFit/>
-          </a:bodyPr>
-          <a:lstStyle/>
-          <a:p>
-            <a:pPr>
-              <a:spcBef>
-                <a:spcPts val="800"/>
-              </a:spcBef>
-              <a:defRPr sz="1400">
-                <a:solidFill>
-                  <a:srgbClr val="2D2D44"/>
-                </a:solidFill>
-              </a:defRPr>
-            </a:pPr>
-            <a:r>
-              <a:t>Mattoo, S. K., Chakrabarti, S., &amp; Anjaiah, M. (2009). Indian J. Medical Research, 130(6), 702-708.</a:t>
-            </a:r>
-          </a:p>
-          <a:p>
-            <a:pPr>
-              <a:spcBef>
-                <a:spcPts val="800"/>
-              </a:spcBef>
-              <a:defRPr sz="1400">
-                <a:solidFill>
-                  <a:srgbClr val="2D2D44"/>
-                </a:solidFill>
-              </a:defRPr>
-            </a:pPr>
-            <a:r>
-              <a:t>Moeller, F. G., Barratt, E. S., Dougherty, D. M., et al. (2001). Am. J. Psychiatry, 158(11), 1783-1793.</a:t>
-            </a:r>
-          </a:p>
-          <a:p>
-            <a:pPr>
-              <a:spcBef>
-                <a:spcPts val="800"/>
-              </a:spcBef>
-              <a:defRPr sz="1400">
-                <a:solidFill>
-                  <a:srgbClr val="2D2D44"/>
-                </a:solidFill>
-              </a:defRPr>
-            </a:pPr>
-            <a:r>
-              <a:t>Murphy, C., &amp; MacKillop, J. (2012). Psychopharmacology, 219(2), 527-536.</a:t>
-            </a:r>
-          </a:p>
-          <a:p>
-            <a:pPr>
-              <a:spcBef>
-                <a:spcPts val="800"/>
-              </a:spcBef>
-              <a:defRPr sz="1400">
-                <a:solidFill>
-                  <a:srgbClr val="2D2D44"/>
-                </a:solidFill>
-              </a:defRPr>
-            </a:pPr>
-            <a:r>
-              <a:t>NIDA (2020). Drugs, brains, and behavior: The science of addiction. NIDA.</a:t>
-            </a:r>
-          </a:p>
-          <a:p>
-            <a:pPr>
-              <a:spcBef>
-                <a:spcPts val="800"/>
-              </a:spcBef>
-              <a:defRPr sz="1400">
-                <a:solidFill>
-                  <a:srgbClr val="2D2D44"/>
-                </a:solidFill>
-              </a:defRPr>
-            </a:pPr>
-            <a:r>
-              <a:t>Patton, J. H., Stanford, M. S., &amp; Barratt, E. S. (1995). J. Clinical Psychology, 51(6), 768-774.</a:t>
-            </a:r>
-          </a:p>
-          <a:p>
-            <a:pPr>
-              <a:spcBef>
-                <a:spcPts val="800"/>
-              </a:spcBef>
-              <a:defRPr sz="1400">
-                <a:solidFill>
-                  <a:srgbClr val="2D2D44"/>
-                </a:solidFill>
-              </a:defRPr>
-            </a:pPr>
-            <a:r>
-              <a:t>Peters, J. R., Erisman, S. M., Upton, B. T., et al. (2011). Mindfulness, 2(4), 228-235.</a:t>
-            </a:r>
-          </a:p>
-          <a:p>
-            <a:pPr>
-              <a:spcBef>
-                <a:spcPts val="800"/>
-              </a:spcBef>
-              <a:defRPr sz="1400">
-                <a:solidFill>
-                  <a:srgbClr val="2D2D44"/>
-                </a:solidFill>
-              </a:defRPr>
-            </a:pPr>
-            <a:r>
-              <a:t>Robinson, T. E., &amp; Berridge, K. C. (1993). Brain Research Reviews, 18(3), 247-291.</a:t>
-            </a:r>
-          </a:p>
-          <a:p>
-            <a:pPr>
-              <a:spcBef>
-                <a:spcPts val="800"/>
-              </a:spcBef>
-              <a:defRPr sz="1400">
-                <a:solidFill>
-                  <a:srgbClr val="2D2D44"/>
-                </a:solidFill>
-              </a:defRPr>
-            </a:pPr>
-            <a:r>
-              <a:t>Roos, C. R., Bowen, S., &amp; Witkiewitz, K. (2017). J. Consulting and Clinical Psychology, 85(11), 1041-1051.</a:t>
-            </a:r>
-          </a:p>
-          <a:p>
-            <a:pPr>
-              <a:spcBef>
-                <a:spcPts val="800"/>
-              </a:spcBef>
-              <a:defRPr sz="1400">
-                <a:solidFill>
-                  <a:srgbClr val="2D2D44"/>
-                </a:solidFill>
-              </a:defRPr>
-            </a:pPr>
-            <a:r>
-              <a:t>Sarkar, S., &amp; Balhara, Y. P. S. (2016). Indian J. Endocrinology and Metabolism, 20(4), 527-533.</a:t>
-            </a:r>
-          </a:p>
-          <a:p>
-            <a:pPr>
-              <a:spcBef>
-                <a:spcPts val="800"/>
-              </a:spcBef>
-              <a:defRPr sz="1400">
-                <a:solidFill>
-                  <a:srgbClr val="2D2D44"/>
-                </a:solidFill>
-              </a:defRPr>
-            </a:pPr>
-            <a:r>
-              <a:t>Shorey, R. C., et al. (2017). Substance Use &amp; Misuse, 52(11), 1400-1410.</a:t>
-            </a:r>
-          </a:p>
-          <a:p>
-            <a:pPr>
-              <a:spcBef>
-                <a:spcPts val="800"/>
-              </a:spcBef>
-              <a:defRPr sz="1400">
-                <a:solidFill>
-                  <a:srgbClr val="2D2D44"/>
-                </a:solidFill>
-              </a:defRPr>
-            </a:pPr>
-            <a:r>
-              <a:t>Tiffany, S. T., et al. (2000). Development of heroin craving questionnaire. Unpublished.</a:t>
-            </a:r>
-          </a:p>
-          <a:p>
-            <a:pPr>
-              <a:spcBef>
-                <a:spcPts val="800"/>
-              </a:spcBef>
-              <a:defRPr sz="1400">
-                <a:solidFill>
-                  <a:srgbClr val="2D2D44"/>
-                </a:solidFill>
-              </a:defRPr>
-            </a:pPr>
-            <a:r>
-              <a:t>WHO ASSIST Working Group (2002). Addiction, 97(9), 1183-1194.</a:t>
-            </a:r>
-          </a:p>
-          <a:p>
-            <a:pPr>
-              <a:spcBef>
-                <a:spcPts val="800"/>
-              </a:spcBef>
-              <a:defRPr sz="1400">
-                <a:solidFill>
-                  <a:srgbClr val="2D2D44"/>
-                </a:solidFill>
-              </a:defRPr>
-            </a:pPr>
-            <a:r>
-              <a:t>Witkiewitz, K., &amp; Bowen, S. (2010). J. Consulting and Clinical Psychology, 78(3), 362-374.</a:t>
-            </a:r>
-          </a:p>
-          <a:p>
-            <a:pPr>
-              <a:spcBef>
-                <a:spcPts val="800"/>
-              </a:spcBef>
-              <a:defRPr sz="1400">
-                <a:solidFill>
-                  <a:srgbClr val="2D2D44"/>
-                </a:solidFill>
-              </a:defRPr>
-            </a:pPr>
-            <a:r>
-              <a:t>Zgierska, A., et al. (2009). Substance Abuse, 30(4), 266-294.</a:t>
             </a:r>
           </a:p>
         </p:txBody>
@@ -11625,7 +10912,7 @@
               </a:defRPr>
             </a:pPr>
             <a:r>
-              <a:t>SLIDE 5: Variable 1 - Craving</a:t>
+              <a:t>Variable 1: Craving</a:t>
             </a:r>
           </a:p>
         </p:txBody>
@@ -11654,54 +10941,54 @@
           <a:p>
             <a:pPr>
               <a:spcBef>
-                <a:spcPts val="800"/>
-              </a:spcBef>
-              <a:defRPr sz="1400">
-                <a:solidFill>
-                  <a:srgbClr val="2D2D44"/>
-                </a:solidFill>
-              </a:defRPr>
-            </a:pPr>
-            <a:r>
-              <a:t>DEFINITION: Intense subjective urge to use a substance, triggered by internal/external cues; motivational state from incentive-sensitization (Robinson &amp; Berridge, 1993)</a:t>
-            </a:r>
-          </a:p>
-          <a:p>
-            <a:pPr>
-              <a:spcBef>
-                <a:spcPts val="800"/>
-              </a:spcBef>
-              <a:defRPr sz="1400">
-                <a:solidFill>
-                  <a:srgbClr val="2D2D44"/>
-                </a:solidFill>
-              </a:defRPr>
-            </a:pPr>
-            <a:r>
-              <a:t>RELEVANCE: Primary predictor of relapse in opioid dependence; mediates cue exposure and use behavior; correlates with severity and treatment dropout</a:t>
-            </a:r>
-          </a:p>
-          <a:p>
-            <a:pPr>
-              <a:spcBef>
-                <a:spcPts val="800"/>
-              </a:spcBef>
-              <a:defRPr sz="1400">
-                <a:solidFill>
-                  <a:srgbClr val="2D2D44"/>
-                </a:solidFill>
-              </a:defRPr>
-            </a:pPr>
-            <a:r>
-              <a:t>NEUROPSYCHOLOGICAL BASIS: Mesolimbic dopamine pathway (VTA -&gt; Nucleus Accumbens); PFC hypoactivation; conditioned cue-reward associations</a:t>
-            </a:r>
-          </a:p>
-          <a:p>
-            <a:pPr>
-              <a:spcBef>
-                <a:spcPts val="800"/>
-              </a:spcBef>
-              <a:defRPr sz="1400">
+                <a:spcPts val="600"/>
+              </a:spcBef>
+              <a:defRPr sz="1300">
+                <a:solidFill>
+                  <a:srgbClr val="2D2D44"/>
+                </a:solidFill>
+              </a:defRPr>
+            </a:pPr>
+            <a:r>
+              <a:t>DEFINITION: Intense subjective urge to use a substance triggered by internal/external cues; a motivational state arising from incentive-sensitization (Robinson &amp; Berridge, 1993) and conditioned reinforcement</a:t>
+            </a:r>
+          </a:p>
+          <a:p>
+            <a:pPr>
+              <a:spcBef>
+                <a:spcPts val="600"/>
+              </a:spcBef>
+              <a:defRPr sz="1300">
+                <a:solidFill>
+                  <a:srgbClr val="2D2D44"/>
+                </a:solidFill>
+              </a:defRPr>
+            </a:pPr>
+            <a:r>
+              <a:t>RELEVANCE: Primary predictor of relapse in opioid dependence; mediates relationship between cue exposure and use behavior; intensity correlates with severity and treatment dropout</a:t>
+            </a:r>
+          </a:p>
+          <a:p>
+            <a:pPr>
+              <a:spcBef>
+                <a:spcPts val="600"/>
+              </a:spcBef>
+              <a:defRPr sz="1300">
+                <a:solidFill>
+                  <a:srgbClr val="2D2D44"/>
+                </a:solidFill>
+              </a:defRPr>
+            </a:pPr>
+            <a:r>
+              <a:t>NEUROPSYCHOLOGICAL BASIS: Mesolimbic dopamine pathway activation (VTA -&gt; Nucleus Accumbens); PFC hypoactivation during craving episodes; conditioned cue-reward associations; dysregulated stress-reward interaction</a:t>
+            </a:r>
+          </a:p>
+          <a:p>
+            <a:pPr>
+              <a:spcBef>
+                <a:spcPts val="600"/>
+              </a:spcBef>
+              <a:defRPr sz="1300">
                 <a:solidFill>
                   <a:srgbClr val="2D2D44"/>
                 </a:solidFill>
@@ -11714,9 +11001,9 @@
           <a:p>
             <a:pPr>
               <a:spcBef>
-                <a:spcPts val="800"/>
-              </a:spcBef>
-              <a:defRPr sz="1400">
+                <a:spcPts val="600"/>
+              </a:spcBef>
+              <a:defRPr sz="1300">
                 <a:solidFill>
                   <a:srgbClr val="2D2D44"/>
                 </a:solidFill>
@@ -11729,9 +11016,9 @@
           <a:p>
             <a:pPr>
               <a:spcBef>
-                <a:spcPts val="800"/>
-              </a:spcBef>
-              <a:defRPr sz="1400">
+                <a:spcPts val="600"/>
+              </a:spcBef>
+              <a:defRPr sz="1300">
                 <a:solidFill>
                   <a:srgbClr val="2D2D44"/>
                 </a:solidFill>
@@ -11744,9 +11031,9 @@
           <a:p>
             <a:pPr>
               <a:spcBef>
-                <a:spcPts val="800"/>
-              </a:spcBef>
-              <a:defRPr sz="1400">
+                <a:spcPts val="600"/>
+              </a:spcBef>
+              <a:defRPr sz="1300">
                 <a:solidFill>
                   <a:srgbClr val="2D2D44"/>
                 </a:solidFill>
@@ -11857,7 +11144,7 @@
               </a:defRPr>
             </a:pPr>
             <a:r>
-              <a:t>SLIDE 6: Variable 2 - Impulsivity</a:t>
+              <a:t>Variable 2: Impulsivity</a:t>
             </a:r>
           </a:p>
         </p:txBody>
@@ -11886,54 +11173,54 @@
           <a:p>
             <a:pPr>
               <a:spcBef>
-                <a:spcPts val="800"/>
-              </a:spcBef>
-              <a:defRPr sz="1400">
-                <a:solidFill>
-                  <a:srgbClr val="2D2D44"/>
-                </a:solidFill>
-              </a:defRPr>
-            </a:pPr>
-            <a:r>
-              <a:t>DEFINITION: Tendency toward rapid, unplanned actions without adequate consideration of consequences (Moeller et al., 2001); multi-dimensional: motor, attentional, non-planning (Patton et al., 1995)</a:t>
-            </a:r>
-          </a:p>
-          <a:p>
-            <a:pPr>
-              <a:spcBef>
-                <a:spcPts val="800"/>
-              </a:spcBef>
-              <a:defRPr sz="1400">
-                <a:solidFill>
-                  <a:srgbClr val="2D2D44"/>
-                </a:solidFill>
-              </a:defRPr>
-            </a:pPr>
-            <a:r>
-              <a:t>RELEVANCE: Higher trait impulsivity predicts initiation, escalation, and relapse; mediates craving-to-use behavior; associated with treatment non-adherence</a:t>
-            </a:r>
-          </a:p>
-          <a:p>
-            <a:pPr>
-              <a:spcBef>
-                <a:spcPts val="800"/>
-              </a:spcBef>
-              <a:defRPr sz="1400">
-                <a:solidFill>
-                  <a:srgbClr val="2D2D44"/>
-                </a:solidFill>
-              </a:defRPr>
-            </a:pPr>
-            <a:r>
-              <a:t>NEUROPSYCHOLOGICAL BASIS: PFC dysfunction -&gt; impaired executive control; reduced inhibitory control (Go/No-Go); impaired delay discounting; DLPFC hypoactivation</a:t>
-            </a:r>
-          </a:p>
-          <a:p>
-            <a:pPr>
-              <a:spcBef>
-                <a:spcPts val="800"/>
-              </a:spcBef>
-              <a:defRPr sz="1400">
+                <a:spcPts val="600"/>
+              </a:spcBef>
+              <a:defRPr sz="1300">
+                <a:solidFill>
+                  <a:srgbClr val="2D2D44"/>
+                </a:solidFill>
+              </a:defRPr>
+            </a:pPr>
+            <a:r>
+              <a:t>DEFINITION: Tendency toward rapid, unplanned actions without adequate consideration of consequences (Moeller et al., 2001); multi-dimensional: motor, attentional, non-planning impulsivity (Patton et al., 1995)</a:t>
+            </a:r>
+          </a:p>
+          <a:p>
+            <a:pPr>
+              <a:spcBef>
+                <a:spcPts val="600"/>
+              </a:spcBef>
+              <a:defRPr sz="1300">
+                <a:solidFill>
+                  <a:srgbClr val="2D2D44"/>
+                </a:solidFill>
+              </a:defRPr>
+            </a:pPr>
+            <a:r>
+              <a:t>RELEVANCE: Higher trait impulsivity predicts initiation, escalation, and relapse; mediates craving-to-use behavior; associated with treatment non-adherence and premature dropout</a:t>
+            </a:r>
+          </a:p>
+          <a:p>
+            <a:pPr>
+              <a:spcBef>
+                <a:spcPts val="600"/>
+              </a:spcBef>
+              <a:defRPr sz="1300">
+                <a:solidFill>
+                  <a:srgbClr val="2D2D44"/>
+                </a:solidFill>
+              </a:defRPr>
+            </a:pPr>
+            <a:r>
+              <a:t>NEUROPSYCHOLOGICAL BASIS: Prefrontal cortex dysfunction -&gt; impaired executive control; reduced inhibitory control (Go/No-Go); impaired delay discounting; dorsolateral PFC hypoactivation</a:t>
+            </a:r>
+          </a:p>
+          <a:p>
+            <a:pPr>
+              <a:spcBef>
+                <a:spcPts val="600"/>
+              </a:spcBef>
+              <a:defRPr sz="1300">
                 <a:solidFill>
                   <a:srgbClr val="2D2D44"/>
                 </a:solidFill>
@@ -11946,9 +11233,9 @@
           <a:p>
             <a:pPr>
               <a:spcBef>
-                <a:spcPts val="800"/>
-              </a:spcBef>
-              <a:defRPr sz="1400">
+                <a:spcPts val="600"/>
+              </a:spcBef>
+              <a:defRPr sz="1300">
                 <a:solidFill>
                   <a:srgbClr val="2D2D44"/>
                 </a:solidFill>
@@ -11961,9 +11248,9 @@
           <a:p>
             <a:pPr>
               <a:spcBef>
-                <a:spcPts val="800"/>
-              </a:spcBef>
-              <a:defRPr sz="1400">
+                <a:spcPts val="600"/>
+              </a:spcBef>
+              <a:defRPr sz="1300">
                 <a:solidFill>
                   <a:srgbClr val="2D2D44"/>
                 </a:solidFill>
@@ -11976,9 +11263,9 @@
           <a:p>
             <a:pPr>
               <a:spcBef>
-                <a:spcPts val="800"/>
-              </a:spcBef>
-              <a:defRPr sz="1400">
+                <a:spcPts val="600"/>
+              </a:spcBef>
+              <a:defRPr sz="1300">
                 <a:solidFill>
                   <a:srgbClr val="2D2D44"/>
                 </a:solidFill>
@@ -12089,7 +11376,7 @@
               </a:defRPr>
             </a:pPr>
             <a:r>
-              <a:t>SLIDE 7: Variable 3 - Mindfulness</a:t>
+              <a:t>Variable 3: Mindfulness</a:t>
             </a:r>
           </a:p>
         </p:txBody>
@@ -12118,39 +11405,39 @@
           <a:p>
             <a:pPr>
               <a:spcBef>
-                <a:spcPts val="800"/>
-              </a:spcBef>
-              <a:defRPr sz="1400">
-                <a:solidFill>
-                  <a:srgbClr val="2D2D44"/>
-                </a:solidFill>
-              </a:defRPr>
-            </a:pPr>
-            <a:r>
-              <a:t>DEFINITION: Capacity to attend to present-moment experience with openness, curiosity, and non-judgment; 5 facets: Observing, Describing, Acting with Awareness, Non-Judging, Non-Reactivity (Baer et al., 2006)</a:t>
-            </a:r>
-          </a:p>
-          <a:p>
-            <a:pPr>
-              <a:spcBef>
-                <a:spcPts val="800"/>
-              </a:spcBef>
-              <a:defRPr sz="1400">
-                <a:solidFill>
-                  <a:srgbClr val="2D2D44"/>
-                </a:solidFill>
-              </a:defRPr>
-            </a:pPr>
-            <a:r>
-              <a:t>RELEVANCE: Substance-dependent individuals show significantly lower dispositional mindfulness; acts as protective factor against relapse; improvements mediate treatment outcomes</a:t>
-            </a:r>
-          </a:p>
-          <a:p>
-            <a:pPr>
-              <a:spcBef>
-                <a:spcPts val="800"/>
-              </a:spcBef>
-              <a:defRPr sz="1400">
+                <a:spcPts val="600"/>
+              </a:spcBef>
+              <a:defRPr sz="1300">
+                <a:solidFill>
+                  <a:srgbClr val="2D2D44"/>
+                </a:solidFill>
+              </a:defRPr>
+            </a:pPr>
+            <a:r>
+              <a:t>DEFINITION: Capacity to attend to present-moment experience with openness, curiosity, non-judgment; 5 facets: Observing, Describing, Acting with Awareness, Non-Judging, Non-Reactivity (Baer et al., 2006)</a:t>
+            </a:r>
+          </a:p>
+          <a:p>
+            <a:pPr>
+              <a:spcBef>
+                <a:spcPts val="600"/>
+              </a:spcBef>
+              <a:defRPr sz="1300">
+                <a:solidFill>
+                  <a:srgbClr val="2D2D44"/>
+                </a:solidFill>
+              </a:defRPr>
+            </a:pPr>
+            <a:r>
+              <a:t>RELEVANCE: Substance-dependent individuals show significantly lower dispositional mindfulness; acts as protective factor against relapse; improvements mediate treatment outcomes in MBRP studies</a:t>
+            </a:r>
+          </a:p>
+          <a:p>
+            <a:pPr>
+              <a:spcBef>
+                <a:spcPts val="600"/>
+              </a:spcBef>
+              <a:defRPr sz="1300">
                 <a:solidFill>
                   <a:srgbClr val="2D2D44"/>
                 </a:solidFill>
@@ -12163,9 +11450,9 @@
           <a:p>
             <a:pPr>
               <a:spcBef>
-                <a:spcPts val="800"/>
-              </a:spcBef>
-              <a:defRPr sz="1400">
+                <a:spcPts val="600"/>
+              </a:spcBef>
+              <a:defRPr sz="1300">
                 <a:solidFill>
                   <a:srgbClr val="2D2D44"/>
                 </a:solidFill>
@@ -12178,9 +11465,9 @@
           <a:p>
             <a:pPr>
               <a:spcBef>
-                <a:spcPts val="800"/>
-              </a:spcBef>
-              <a:defRPr sz="1400">
+                <a:spcPts val="600"/>
+              </a:spcBef>
+              <a:defRPr sz="1300">
                 <a:solidFill>
                   <a:srgbClr val="2D2D44"/>
                 </a:solidFill>
@@ -12193,9 +11480,9 @@
           <a:p>
             <a:pPr>
               <a:spcBef>
-                <a:spcPts val="800"/>
-              </a:spcBef>
-              <a:defRPr sz="1400">
+                <a:spcPts val="600"/>
+              </a:spcBef>
+              <a:defRPr sz="1300">
                 <a:solidFill>
                   <a:srgbClr val="2D2D44"/>
                 </a:solidFill>
@@ -12208,9 +11495,9 @@
           <a:p>
             <a:pPr>
               <a:spcBef>
-                <a:spcPts val="800"/>
-              </a:spcBef>
-              <a:defRPr sz="1400">
+                <a:spcPts val="600"/>
+              </a:spcBef>
+              <a:defRPr sz="1300">
                 <a:solidFill>
                   <a:srgbClr val="2D2D44"/>
                 </a:solidFill>
@@ -12314,14 +11601,14 @@
           <a:lstStyle/>
           <a:p>
             <a:pPr algn="l">
-              <a:defRPr sz="2200" b="1">
+              <a:defRPr sz="2000" b="1">
                 <a:solidFill>
                   <a:srgbClr val="FFFFFF"/>
                 </a:solidFill>
               </a:defRPr>
             </a:pPr>
             <a:r>
-              <a:t>SLIDE 8: Review of Literature (1/7) - MBRP Foundational Studies</a:t>
+              <a:t>Review of Literature (1/5) - MBRP &amp; Relapse Prevention</a:t>
             </a:r>
           </a:p>
         </p:txBody>
@@ -12334,8 +11621,8 @@
         </p:nvSpPr>
         <p:spPr>
           <a:xfrm>
-            <a:off x="640080" y="1188720"/>
-            <a:ext cx="10881360" cy="5394960"/>
+            <a:off x="548640" y="1143000"/>
+            <a:ext cx="11064240" cy="5486400"/>
           </a:xfrm>
           <a:prstGeom prst="rect">
             <a:avLst/>
@@ -12350,76 +11637,52 @@
           <a:p>
             <a:pPr>
               <a:spcBef>
-                <a:spcPts val="800"/>
-              </a:spcBef>
-              <a:defRPr sz="1400">
-                <a:solidFill>
-                  <a:srgbClr val="2D2D44"/>
-                </a:solidFill>
-              </a:defRPr>
-            </a:pPr>
-            <a:r>
-              <a:t>Bowen, Chawla, &amp; Marlatt (2011) developed original MBRP as 8-session aftercare integrating mindfulness + cognitive-behavioral relapse prevention</a:t>
-            </a:r>
-          </a:p>
-          <a:p>
-            <a:pPr>
-              <a:spcBef>
-                <a:spcPts val="800"/>
-              </a:spcBef>
-              <a:defRPr sz="1400">
-                <a:solidFill>
-                  <a:srgbClr val="2D2D44"/>
-                </a:solidFill>
-              </a:defRPr>
-            </a:pPr>
-            <a:r>
-              <a:t>Bowen, Witkiewitz, et al. (2014) RCT (N=286): MBRP showed significantly fewer substance use days at 12-month follow-up vs. RP and TAU</a:t>
-            </a:r>
-          </a:p>
-          <a:p>
-            <a:pPr>
-              <a:spcBef>
-                <a:spcPts val="800"/>
-              </a:spcBef>
-              <a:defRPr sz="1400">
-                <a:solidFill>
-                  <a:srgbClr val="2D2D44"/>
-                </a:solidFill>
-              </a:defRPr>
-            </a:pPr>
-            <a:r>
-              <a:t>Witkiewitz &amp; Bowen (2010) demonstrated MBRP reduced relationship between depressive symptoms and craving; mindfulness mediates affect-craving pathways</a:t>
-            </a:r>
-          </a:p>
-          <a:p>
-            <a:pPr>
-              <a:spcBef>
-                <a:spcPts val="800"/>
-              </a:spcBef>
-              <a:defRPr sz="1400">
-                <a:solidFill>
-                  <a:srgbClr val="2D2D44"/>
-                </a:solidFill>
-              </a:defRPr>
-            </a:pPr>
-            <a:r>
-              <a:t>Bowen &amp; Marlatt (2009) found brief mindfulness meditation reduced craving among incarcerated substance users vs. controls</a:t>
-            </a:r>
-          </a:p>
-          <a:p>
-            <a:pPr>
-              <a:spcBef>
-                <a:spcPts val="800"/>
-              </a:spcBef>
-              <a:defRPr sz="1400">
-                <a:solidFill>
-                  <a:srgbClr val="2D2D44"/>
-                </a:solidFill>
-              </a:defRPr>
-            </a:pPr>
-            <a:r>
-              <a:t>Zgierska et al. (2009) systematic review: mindfulness meditation is a promising adjunct in substance use disorder treatment</a:t>
+                <a:spcPts val="1200"/>
+              </a:spcBef>
+              <a:spcAft>
+                <a:spcPts val="600"/>
+              </a:spcAft>
+              <a:defRPr sz="1200">
+                <a:solidFill>
+                  <a:srgbClr val="2D2D44"/>
+                </a:solidFill>
+              </a:defRPr>
+            </a:pPr>
+            <a:r>
+              <a:t>Bowen, Witkiewitz, Clifasefi, Grow, Chawla, Hsu, Carroll, Harrop, Collins, Lustyk, and Larimer (2014) investigate the relative efficacy of Mindfulness-Based Relapse Prevention compared to standard Relapse Prevention and Treatment As Usual for substance use disorders in JAMA Psychiatry. The randomized clinical trial involved 286 participants who had completed initial treatment for substance use disorders. The study demonstrates that at 12-month follow-up, MBRP participants reported significantly fewer days of substance use and heavy drinking compared to both standard RP and TAU groups. The researchers highlight that while all three groups showed initial improvements, MBRP participants maintained superior long-term outcomes, suggesting that the cultivation of mindfulness skills provides a durable protective mechanism against relapse. The study establishes that MBRP's integration of present-moment awareness with traditional cognitive-behavioral relapse prevention strategies creates a synergistic therapeutic effect that addresses both the automatic reactivity underlying craving and the cognitive distortions that precipitate relapse. These findings provide foundational evidence for MBRP as a gold-standard psychosocial intervention in substance use disorder aftercare.</a:t>
+            </a:r>
+          </a:p>
+          <a:p>
+            <a:pPr>
+              <a:spcBef>
+                <a:spcPts val="1200"/>
+              </a:spcBef>
+              <a:spcAft>
+                <a:spcPts val="600"/>
+              </a:spcAft>
+              <a:defRPr sz="1200">
+                <a:solidFill>
+                  <a:srgbClr val="2D2D44"/>
+                </a:solidFill>
+              </a:defRPr>
+            </a:pPr>
+          </a:p>
+          <a:p>
+            <a:pPr>
+              <a:spcBef>
+                <a:spcPts val="1200"/>
+              </a:spcBef>
+              <a:spcAft>
+                <a:spcPts val="600"/>
+              </a:spcAft>
+              <a:defRPr sz="1200">
+                <a:solidFill>
+                  <a:srgbClr val="2D2D44"/>
+                </a:solidFill>
+              </a:defRPr>
+            </a:pPr>
+            <a:r>
+              <a:t>Bowen and Marlatt (2009) examine the effects of brief mindfulness-based intervention on craving among substance users in Psychology of Addictive Behaviors. The study recruited incarcerated individuals with substance use histories and administered a brief urge surfing meditation intervention. Results demonstrated significant reductions in craving intensity and frequency in the mindfulness condition compared to controls. The authors propose that even brief exposure to mindfulness techniques can disrupt the automaticity of craving responses by introducing a meta-cognitive awareness layer between trigger and behavioral response. This study is particularly relevant to the present research as it validates the premise that abbreviated mindfulness interventions can produce meaningful clinical effects on craving, supporting the feasibility of brief MBRP protocols in settings where extended treatment programs are impractical.</a:t>
             </a:r>
           </a:p>
         </p:txBody>
@@ -12516,14 +11779,14 @@
           <a:lstStyle/>
           <a:p>
             <a:pPr algn="l">
-              <a:defRPr sz="2200" b="1">
+              <a:defRPr sz="2000" b="1">
                 <a:solidFill>
                   <a:srgbClr val="FFFFFF"/>
                 </a:solidFill>
               </a:defRPr>
             </a:pPr>
             <a:r>
-              <a:t>SLIDE 9: Review of Literature (2/7) - Craving Studies</a:t>
+              <a:t>Review of Literature (2/5) - Craving &amp; Mindfulness Mechanisms</a:t>
             </a:r>
           </a:p>
         </p:txBody>
@@ -12536,8 +11799,8 @@
         </p:nvSpPr>
         <p:spPr>
           <a:xfrm>
-            <a:off x="640080" y="1188720"/>
-            <a:ext cx="10881360" cy="5394960"/>
+            <a:off x="548640" y="1143000"/>
+            <a:ext cx="11064240" cy="5486400"/>
           </a:xfrm>
           <a:prstGeom prst="rect">
             <a:avLst/>
@@ -12552,76 +11815,52 @@
           <a:p>
             <a:pPr>
               <a:spcBef>
-                <a:spcPts val="800"/>
-              </a:spcBef>
-              <a:defRPr sz="1400">
-                <a:solidFill>
-                  <a:srgbClr val="2D2D44"/>
-                </a:solidFill>
-              </a:defRPr>
-            </a:pPr>
-            <a:r>
-              <a:t>Witkiewitz, Bowen, Douglas, &amp; Hsu (2013): MBRP participants showed significant reductions in craving intensity vs. TAU over 4-month follow-up</a:t>
-            </a:r>
-          </a:p>
-          <a:p>
-            <a:pPr>
-              <a:spcBef>
-                <a:spcPts val="800"/>
-              </a:spcBef>
-              <a:defRPr sz="1400">
-                <a:solidFill>
-                  <a:srgbClr val="2D2D44"/>
-                </a:solidFill>
-              </a:defRPr>
-            </a:pPr>
-            <a:r>
-              <a:t>Garland, Froeliger, &amp; Howard (2014): Mindfulness-Oriented Recovery Enhancement (MORE) reduced opioid craving through enhanced positive reappraisal</a:t>
-            </a:r>
-          </a:p>
-          <a:p>
-            <a:pPr>
-              <a:spcBef>
-                <a:spcPts val="800"/>
-              </a:spcBef>
-              <a:defRPr sz="1400">
-                <a:solidFill>
-                  <a:srgbClr val="2D2D44"/>
-                </a:solidFill>
-              </a:defRPr>
-            </a:pPr>
-            <a:r>
-              <a:t>Garland, Manusov, et al. (2014): Mindfulness training associated with reduced craving and decreased neural reactivity to drug cues in opioid patients</a:t>
-            </a:r>
-          </a:p>
-          <a:p>
-            <a:pPr>
-              <a:spcBef>
-                <a:spcPts val="800"/>
-              </a:spcBef>
-              <a:defRPr sz="1400">
-                <a:solidFill>
-                  <a:srgbClr val="2D2D44"/>
-                </a:solidFill>
-              </a:defRPr>
-            </a:pPr>
-            <a:r>
-              <a:t>Brewer, Mallik, et al. (2011): Mindfulness training (vs. CBT) resulted in greater craving reductions in cigarette smokers</a:t>
-            </a:r>
-          </a:p>
-          <a:p>
-            <a:pPr>
-              <a:spcBef>
-                <a:spcPts val="800"/>
-              </a:spcBef>
-              <a:defRPr sz="1400">
-                <a:solidFill>
-                  <a:srgbClr val="2D2D44"/>
-                </a:solidFill>
-              </a:defRPr>
-            </a:pPr>
-            <a:r>
-              <a:t>Hsu, Collins, &amp; Marlatt (2013): Urge surfing effectively reduced craving intensity and frequency in alcohol-dependent outpatients</a:t>
+                <a:spcPts val="1200"/>
+              </a:spcBef>
+              <a:spcAft>
+                <a:spcPts val="600"/>
+              </a:spcAft>
+              <a:defRPr sz="1200">
+                <a:solidFill>
+                  <a:srgbClr val="2D2D44"/>
+                </a:solidFill>
+              </a:defRPr>
+            </a:pPr>
+            <a:r>
+              <a:t>Garland, Froeliger, and Howard (2014) explore how mindfulness training targets neurocognitive mechanisms of addiction at the attention-appraisal-emotion interface in Frontiers in Psychiatry. The study presents a theoretical and empirical framework demonstrating that Mindfulness-Oriented Recovery Enhancement (MORE) reduces opioid craving through three interconnected mechanisms: attentional reorientation away from drug-related cues, positive reappraisal of previously neutral stimuli to generate natural reward, and enhanced savoring of healthy pleasures. The researchers provide neuroimaging evidence showing that mindfulness practice modulates activity in prefrontal and limbic circuits associated with craving and emotional regulation. The study is significant because it elucidates the precise cognitive-neural pathways through which mindfulness reduces craving in opioid users specifically, providing a mechanistic rationale for why MBRP techniques such as urge surfing and mindful awareness of craving sensations can reduce the subjective intensity and behavioral impact of craving episodes in substance-dependent patients.</a:t>
+            </a:r>
+          </a:p>
+          <a:p>
+            <a:pPr>
+              <a:spcBef>
+                <a:spcPts val="1200"/>
+              </a:spcBef>
+              <a:spcAft>
+                <a:spcPts val="600"/>
+              </a:spcAft>
+              <a:defRPr sz="1200">
+                <a:solidFill>
+                  <a:srgbClr val="2D2D44"/>
+                </a:solidFill>
+              </a:defRPr>
+            </a:pPr>
+          </a:p>
+          <a:p>
+            <a:pPr>
+              <a:spcBef>
+                <a:spcPts val="1200"/>
+              </a:spcBef>
+              <a:spcAft>
+                <a:spcPts val="600"/>
+              </a:spcAft>
+              <a:defRPr sz="1200">
+                <a:solidFill>
+                  <a:srgbClr val="2D2D44"/>
+                </a:solidFill>
+              </a:defRPr>
+            </a:pPr>
+            <a:r>
+              <a:t>Witkiewitz, Bowen, Douglas, and Hsu (2013) investigate mindfulness-based relapse prevention effects on substance craving in Addictive Behaviors. The study conducted secondary analyses of data from a randomized controlled trial comparing MBRP to TAU among individuals in aftercare following substance use disorder treatment. Over a 4-month follow-up period, MBRP participants demonstrated significantly lower craving levels compared to TAU participants, and importantly, the relationship between negative affect and subsequent craving was significantly attenuated in the MBRP group. The authors conclude that mindfulness practice weakens the affect-craving pathway by cultivating non-reactive awareness of emotional states, thereby preventing negative emotions from automatically triggering craving responses. This decoupling of affect and craving represents a critical therapeutic mechanism that distinguishes MBRP from traditional relapse prevention approaches that primarily rely on cognitive restructuring and behavioral avoidance strategies.</a:t>
             </a:r>
           </a:p>
         </p:txBody>
